--- a/docs/03_参考資料/Copilot_Cowork_競合比較.pptx
+++ b/docs/03_参考資料/Copilot_Cowork_競合比較.pptx
@@ -9,6 +9,8 @@
     <p:sldId id="257" r:id="rId8"/>
     <p:sldId id="258" r:id="rId9"/>
     <p:sldId id="259" r:id="rId10"/>
+    <p:sldId id="260" r:id="rId11"/>
+    <p:sldId id="261" r:id="rId12"/>
   </p:sldIdLst>
   <p:sldSz cx="12191695" cy="6858000" type="screen4x3"/>
   <p:notesSz cx="6858000" cy="9144000"/>
@@ -4985,6 +4987,1503 @@
             <a:avLst/>
           </a:prstGeom>
           <a:solidFill>
+            <a:srgbClr val="FBF9F5"/>
+          </a:solidFill>
+          <a:ln>
+            <a:noFill/>
+          </a:ln>
+          <a:effectLst/>
+        </p:spPr>
+        <p:style>
+          <a:lnRef idx="1">
+            <a:schemeClr val="accent1"/>
+          </a:lnRef>
+          <a:fillRef idx="3">
+            <a:schemeClr val="accent1"/>
+          </a:fillRef>
+          <a:effectRef idx="2">
+            <a:schemeClr val="accent1"/>
+          </a:effectRef>
+          <a:fontRef idx="minor">
+            <a:schemeClr val="lt1"/>
+          </a:fontRef>
+        </p:style>
+        <p:txBody>
+          <a:bodyPr rtlCol="0" anchor="ctr"/>
+          <a:lstStyle/>
+          <a:p>
+            <a:pPr algn="ctr"/>
+          </a:p>
+        </p:txBody>
+      </p:sp>
+      <p:sp>
+        <p:nvSpPr>
+          <p:cNvPr id="3" name="TextBox 2"/>
+          <p:cNvSpPr txBox="1"/>
+          <p:nvPr/>
+        </p:nvSpPr>
+        <p:spPr>
+          <a:xfrm>
+            <a:off x="548640" y="502920"/>
+            <a:ext cx="10972800" cy="731520"/>
+          </a:xfrm>
+          <a:prstGeom prst="rect">
+            <a:avLst/>
+          </a:prstGeom>
+          <a:noFill/>
+        </p:spPr>
+        <p:txBody>
+          <a:bodyPr wrap="square" anchor="t" lIns="0" rIns="0" tIns="0" bIns="0">
+            <a:spAutoFit/>
+          </a:bodyPr>
+          <a:lstStyle/>
+          <a:p>
+            <a:pPr algn="l">
+              <a:spcBef>
+                <a:spcPts val="0"/>
+              </a:spcBef>
+              <a:spcAft>
+                <a:spcPts val="400"/>
+              </a:spcAft>
+            </a:pPr>
+            <a:r>
+              <a:rPr sz="2800" b="1">
+                <a:solidFill>
+                  <a:srgbClr val="232830"/>
+                </a:solidFill>
+                <a:latin typeface="Meiryo"/>
+              </a:rPr>
+              <a:t>Copilotを使っている人が Claude Cowork を足す理由</a:t>
+            </a:r>
+          </a:p>
+        </p:txBody>
+      </p:sp>
+      <p:sp>
+        <p:nvSpPr>
+          <p:cNvPr id="4" name="TextBox 3"/>
+          <p:cNvSpPr txBox="1"/>
+          <p:nvPr/>
+        </p:nvSpPr>
+        <p:spPr>
+          <a:xfrm>
+            <a:off x="548640" y="1188720"/>
+            <a:ext cx="10972800" cy="457200"/>
+          </a:xfrm>
+          <a:prstGeom prst="rect">
+            <a:avLst/>
+          </a:prstGeom>
+          <a:noFill/>
+        </p:spPr>
+        <p:txBody>
+          <a:bodyPr wrap="square" anchor="t" lIns="0" rIns="0" tIns="0" bIns="0">
+            <a:spAutoFit/>
+          </a:bodyPr>
+          <a:lstStyle/>
+          <a:p>
+            <a:pPr algn="l">
+              <a:spcBef>
+                <a:spcPts val="0"/>
+              </a:spcBef>
+              <a:spcAft>
+                <a:spcPts val="400"/>
+              </a:spcAft>
+            </a:pPr>
+            <a:r>
+              <a:rPr sz="1500" b="0">
+                <a:solidFill>
+                  <a:srgbClr val="6F7683"/>
+                </a:solidFill>
+                <a:latin typeface="Meiryo"/>
+              </a:rPr>
+              <a:t>置き換えではなく、Copilotが届きにくい“外側”を埋める（補完）。</a:t>
+            </a:r>
+          </a:p>
+        </p:txBody>
+      </p:sp>
+      <p:sp>
+        <p:nvSpPr>
+          <p:cNvPr id="5" name="Rectangle 4"/>
+          <p:cNvSpPr/>
+          <p:nvPr/>
+        </p:nvSpPr>
+        <p:spPr>
+          <a:xfrm>
+            <a:off x="640080" y="1965960"/>
+            <a:ext cx="146304" cy="146304"/>
+          </a:xfrm>
+          <a:prstGeom prst="rect">
+            <a:avLst/>
+          </a:prstGeom>
+          <a:solidFill>
+            <a:srgbClr val="A97C37"/>
+          </a:solidFill>
+          <a:ln>
+            <a:noFill/>
+          </a:ln>
+          <a:effectLst/>
+        </p:spPr>
+        <p:style>
+          <a:lnRef idx="1">
+            <a:schemeClr val="accent1"/>
+          </a:lnRef>
+          <a:fillRef idx="3">
+            <a:schemeClr val="accent1"/>
+          </a:fillRef>
+          <a:effectRef idx="2">
+            <a:schemeClr val="accent1"/>
+          </a:effectRef>
+          <a:fontRef idx="minor">
+            <a:schemeClr val="lt1"/>
+          </a:fontRef>
+        </p:style>
+        <p:txBody>
+          <a:bodyPr rtlCol="0" anchor="ctr"/>
+          <a:lstStyle/>
+          <a:p>
+            <a:pPr algn="ctr"/>
+          </a:p>
+        </p:txBody>
+      </p:sp>
+      <p:sp>
+        <p:nvSpPr>
+          <p:cNvPr id="6" name="TextBox 5"/>
+          <p:cNvSpPr txBox="1"/>
+          <p:nvPr/>
+        </p:nvSpPr>
+        <p:spPr>
+          <a:xfrm>
+            <a:off x="1005840" y="1883664"/>
+            <a:ext cx="10332720" cy="411480"/>
+          </a:xfrm>
+          <a:prstGeom prst="rect">
+            <a:avLst/>
+          </a:prstGeom>
+          <a:noFill/>
+        </p:spPr>
+        <p:txBody>
+          <a:bodyPr wrap="square" anchor="t" lIns="0" rIns="0" tIns="0" bIns="0">
+            <a:spAutoFit/>
+          </a:bodyPr>
+          <a:lstStyle/>
+          <a:p>
+            <a:pPr algn="l">
+              <a:spcBef>
+                <a:spcPts val="0"/>
+              </a:spcBef>
+              <a:spcAft>
+                <a:spcPts val="400"/>
+              </a:spcAft>
+            </a:pPr>
+            <a:r>
+              <a:rPr sz="1800" b="1">
+                <a:solidFill>
+                  <a:srgbClr val="8A6326"/>
+                </a:solidFill>
+                <a:latin typeface="Meiryo"/>
+              </a:rPr>
+              <a:t>社外・非Officeのデータも扱える</a:t>
+            </a:r>
+          </a:p>
+        </p:txBody>
+      </p:sp>
+      <p:sp>
+        <p:nvSpPr>
+          <p:cNvPr id="7" name="TextBox 6"/>
+          <p:cNvSpPr txBox="1"/>
+          <p:nvPr/>
+        </p:nvSpPr>
+        <p:spPr>
+          <a:xfrm>
+            <a:off x="1005840" y="2286000"/>
+            <a:ext cx="10332720" cy="457200"/>
+          </a:xfrm>
+          <a:prstGeom prst="rect">
+            <a:avLst/>
+          </a:prstGeom>
+          <a:noFill/>
+        </p:spPr>
+        <p:txBody>
+          <a:bodyPr wrap="square" anchor="t" lIns="0" rIns="0" tIns="0" bIns="0">
+            <a:spAutoFit/>
+          </a:bodyPr>
+          <a:lstStyle/>
+          <a:p>
+            <a:pPr algn="l">
+              <a:spcBef>
+                <a:spcPts val="0"/>
+              </a:spcBef>
+              <a:spcAft>
+                <a:spcPts val="400"/>
+              </a:spcAft>
+            </a:pPr>
+            <a:r>
+              <a:rPr sz="1400" b="0">
+                <a:solidFill>
+                  <a:srgbClr val="232830"/>
+                </a:solidFill>
+                <a:latin typeface="Meiryo"/>
+              </a:rPr>
+              <a:t>M365テナント外のデータや形式（例：EDINETのXBRL）を直接処理できる。</a:t>
+            </a:r>
+          </a:p>
+        </p:txBody>
+      </p:sp>
+      <p:sp>
+        <p:nvSpPr>
+          <p:cNvPr id="8" name="Rectangle 7"/>
+          <p:cNvSpPr/>
+          <p:nvPr/>
+        </p:nvSpPr>
+        <p:spPr>
+          <a:xfrm>
+            <a:off x="640080" y="2880360"/>
+            <a:ext cx="146304" cy="146304"/>
+          </a:xfrm>
+          <a:prstGeom prst="rect">
+            <a:avLst/>
+          </a:prstGeom>
+          <a:solidFill>
+            <a:srgbClr val="A97C37"/>
+          </a:solidFill>
+          <a:ln>
+            <a:noFill/>
+          </a:ln>
+          <a:effectLst/>
+        </p:spPr>
+        <p:style>
+          <a:lnRef idx="1">
+            <a:schemeClr val="accent1"/>
+          </a:lnRef>
+          <a:fillRef idx="3">
+            <a:schemeClr val="accent1"/>
+          </a:fillRef>
+          <a:effectRef idx="2">
+            <a:schemeClr val="accent1"/>
+          </a:effectRef>
+          <a:fontRef idx="minor">
+            <a:schemeClr val="lt1"/>
+          </a:fontRef>
+        </p:style>
+        <p:txBody>
+          <a:bodyPr rtlCol="0" anchor="ctr"/>
+          <a:lstStyle/>
+          <a:p>
+            <a:pPr algn="ctr"/>
+          </a:p>
+        </p:txBody>
+      </p:sp>
+      <p:sp>
+        <p:nvSpPr>
+          <p:cNvPr id="9" name="TextBox 8"/>
+          <p:cNvSpPr txBox="1"/>
+          <p:nvPr/>
+        </p:nvSpPr>
+        <p:spPr>
+          <a:xfrm>
+            <a:off x="1005840" y="2798064"/>
+            <a:ext cx="10332720" cy="411480"/>
+          </a:xfrm>
+          <a:prstGeom prst="rect">
+            <a:avLst/>
+          </a:prstGeom>
+          <a:noFill/>
+        </p:spPr>
+        <p:txBody>
+          <a:bodyPr wrap="square" anchor="t" lIns="0" rIns="0" tIns="0" bIns="0">
+            <a:spAutoFit/>
+          </a:bodyPr>
+          <a:lstStyle/>
+          <a:p>
+            <a:pPr algn="l">
+              <a:spcBef>
+                <a:spcPts val="0"/>
+              </a:spcBef>
+              <a:spcAft>
+                <a:spcPts val="400"/>
+              </a:spcAft>
+            </a:pPr>
+            <a:r>
+              <a:rPr sz="1800" b="1">
+                <a:solidFill>
+                  <a:srgbClr val="8A6326"/>
+                </a:solidFill>
+                <a:latin typeface="Meiryo"/>
+              </a:rPr>
+              <a:t>成果物の自由度が高い</a:t>
+            </a:r>
+          </a:p>
+        </p:txBody>
+      </p:sp>
+      <p:sp>
+        <p:nvSpPr>
+          <p:cNvPr id="10" name="TextBox 9"/>
+          <p:cNvSpPr txBox="1"/>
+          <p:nvPr/>
+        </p:nvSpPr>
+        <p:spPr>
+          <a:xfrm>
+            <a:off x="1005840" y="3200400"/>
+            <a:ext cx="10332720" cy="457200"/>
+          </a:xfrm>
+          <a:prstGeom prst="rect">
+            <a:avLst/>
+          </a:prstGeom>
+          <a:noFill/>
+        </p:spPr>
+        <p:txBody>
+          <a:bodyPr wrap="square" anchor="t" lIns="0" rIns="0" tIns="0" bIns="0">
+            <a:spAutoFit/>
+          </a:bodyPr>
+          <a:lstStyle/>
+          <a:p>
+            <a:pPr algn="l">
+              <a:spcBef>
+                <a:spcPts val="0"/>
+              </a:spcBef>
+              <a:spcAft>
+                <a:spcPts val="400"/>
+              </a:spcAft>
+            </a:pPr>
+            <a:r>
+              <a:rPr sz="1400" b="0">
+                <a:solidFill>
+                  <a:srgbClr val="232830"/>
+                </a:solidFill>
+                <a:latin typeface="Meiryo"/>
+              </a:rPr>
+              <a:t>Office文書に限らず、独自ツールやHTMLダッシュボード等を生成できる。</a:t>
+            </a:r>
+          </a:p>
+        </p:txBody>
+      </p:sp>
+      <p:sp>
+        <p:nvSpPr>
+          <p:cNvPr id="11" name="Rectangle 10"/>
+          <p:cNvSpPr/>
+          <p:nvPr/>
+        </p:nvSpPr>
+        <p:spPr>
+          <a:xfrm>
+            <a:off x="640080" y="3794759"/>
+            <a:ext cx="146304" cy="146304"/>
+          </a:xfrm>
+          <a:prstGeom prst="rect">
+            <a:avLst/>
+          </a:prstGeom>
+          <a:solidFill>
+            <a:srgbClr val="A97C37"/>
+          </a:solidFill>
+          <a:ln>
+            <a:noFill/>
+          </a:ln>
+          <a:effectLst/>
+        </p:spPr>
+        <p:style>
+          <a:lnRef idx="1">
+            <a:schemeClr val="accent1"/>
+          </a:lnRef>
+          <a:fillRef idx="3">
+            <a:schemeClr val="accent1"/>
+          </a:fillRef>
+          <a:effectRef idx="2">
+            <a:schemeClr val="accent1"/>
+          </a:effectRef>
+          <a:fontRef idx="minor">
+            <a:schemeClr val="lt1"/>
+          </a:fontRef>
+        </p:style>
+        <p:txBody>
+          <a:bodyPr rtlCol="0" anchor="ctr"/>
+          <a:lstStyle/>
+          <a:p>
+            <a:pPr algn="ctr"/>
+          </a:p>
+        </p:txBody>
+      </p:sp>
+      <p:sp>
+        <p:nvSpPr>
+          <p:cNvPr id="12" name="TextBox 11"/>
+          <p:cNvSpPr txBox="1"/>
+          <p:nvPr/>
+        </p:nvSpPr>
+        <p:spPr>
+          <a:xfrm>
+            <a:off x="1005840" y="3712463"/>
+            <a:ext cx="10332720" cy="411480"/>
+          </a:xfrm>
+          <a:prstGeom prst="rect">
+            <a:avLst/>
+          </a:prstGeom>
+          <a:noFill/>
+        </p:spPr>
+        <p:txBody>
+          <a:bodyPr wrap="square" anchor="t" lIns="0" rIns="0" tIns="0" bIns="0">
+            <a:spAutoFit/>
+          </a:bodyPr>
+          <a:lstStyle/>
+          <a:p>
+            <a:pPr algn="l">
+              <a:spcBef>
+                <a:spcPts val="0"/>
+              </a:spcBef>
+              <a:spcAft>
+                <a:spcPts val="400"/>
+              </a:spcAft>
+            </a:pPr>
+            <a:r>
+              <a:rPr sz="1800" b="1">
+                <a:solidFill>
+                  <a:srgbClr val="8A6326"/>
+                </a:solidFill>
+                <a:latin typeface="Meiryo"/>
+              </a:rPr>
+              <a:t>タスクを丸ごと自律実行</a:t>
+            </a:r>
+          </a:p>
+        </p:txBody>
+      </p:sp>
+      <p:sp>
+        <p:nvSpPr>
+          <p:cNvPr id="13" name="TextBox 12"/>
+          <p:cNvSpPr txBox="1"/>
+          <p:nvPr/>
+        </p:nvSpPr>
+        <p:spPr>
+          <a:xfrm>
+            <a:off x="1005840" y="4114800"/>
+            <a:ext cx="10332720" cy="457200"/>
+          </a:xfrm>
+          <a:prstGeom prst="rect">
+            <a:avLst/>
+          </a:prstGeom>
+          <a:noFill/>
+        </p:spPr>
+        <p:txBody>
+          <a:bodyPr wrap="square" anchor="t" lIns="0" rIns="0" tIns="0" bIns="0">
+            <a:spAutoFit/>
+          </a:bodyPr>
+          <a:lstStyle/>
+          <a:p>
+            <a:pPr algn="l">
+              <a:spcBef>
+                <a:spcPts val="0"/>
+              </a:spcBef>
+              <a:spcAft>
+                <a:spcPts val="400"/>
+              </a:spcAft>
+            </a:pPr>
+            <a:r>
+              <a:rPr sz="1400" b="0">
+                <a:solidFill>
+                  <a:srgbClr val="232830"/>
+                </a:solidFill>
+                <a:latin typeface="Meiryo"/>
+              </a:rPr>
+              <a:t>複数ステップを計画→実行。外部ツール(MCP)やコード実行まで任せられる。</a:t>
+            </a:r>
+          </a:p>
+        </p:txBody>
+      </p:sp>
+      <p:sp>
+        <p:nvSpPr>
+          <p:cNvPr id="14" name="Rectangle 13"/>
+          <p:cNvSpPr/>
+          <p:nvPr/>
+        </p:nvSpPr>
+        <p:spPr>
+          <a:xfrm>
+            <a:off x="640080" y="4709159"/>
+            <a:ext cx="146304" cy="146304"/>
+          </a:xfrm>
+          <a:prstGeom prst="rect">
+            <a:avLst/>
+          </a:prstGeom>
+          <a:solidFill>
+            <a:srgbClr val="A97C37"/>
+          </a:solidFill>
+          <a:ln>
+            <a:noFill/>
+          </a:ln>
+          <a:effectLst/>
+        </p:spPr>
+        <p:style>
+          <a:lnRef idx="1">
+            <a:schemeClr val="accent1"/>
+          </a:lnRef>
+          <a:fillRef idx="3">
+            <a:schemeClr val="accent1"/>
+          </a:fillRef>
+          <a:effectRef idx="2">
+            <a:schemeClr val="accent1"/>
+          </a:effectRef>
+          <a:fontRef idx="minor">
+            <a:schemeClr val="lt1"/>
+          </a:fontRef>
+        </p:style>
+        <p:txBody>
+          <a:bodyPr rtlCol="0" anchor="ctr"/>
+          <a:lstStyle/>
+          <a:p>
+            <a:pPr algn="ctr"/>
+          </a:p>
+        </p:txBody>
+      </p:sp>
+      <p:sp>
+        <p:nvSpPr>
+          <p:cNvPr id="15" name="TextBox 14"/>
+          <p:cNvSpPr txBox="1"/>
+          <p:nvPr/>
+        </p:nvSpPr>
+        <p:spPr>
+          <a:xfrm>
+            <a:off x="1005840" y="4626864"/>
+            <a:ext cx="10332720" cy="411480"/>
+          </a:xfrm>
+          <a:prstGeom prst="rect">
+            <a:avLst/>
+          </a:prstGeom>
+          <a:noFill/>
+        </p:spPr>
+        <p:txBody>
+          <a:bodyPr wrap="square" anchor="t" lIns="0" rIns="0" tIns="0" bIns="0">
+            <a:spAutoFit/>
+          </a:bodyPr>
+          <a:lstStyle/>
+          <a:p>
+            <a:pPr algn="l">
+              <a:spcBef>
+                <a:spcPts val="0"/>
+              </a:spcBef>
+              <a:spcAft>
+                <a:spcPts val="400"/>
+              </a:spcAft>
+            </a:pPr>
+            <a:r>
+              <a:rPr sz="1800" b="1">
+                <a:solidFill>
+                  <a:srgbClr val="8A6326"/>
+                </a:solidFill>
+                <a:latin typeface="Meiryo"/>
+              </a:rPr>
+              <a:t>本件は範囲を絞って導入</a:t>
+            </a:r>
+          </a:p>
+        </p:txBody>
+      </p:sp>
+      <p:sp>
+        <p:nvSpPr>
+          <p:cNvPr id="16" name="TextBox 15"/>
+          <p:cNvSpPr txBox="1"/>
+          <p:nvPr/>
+        </p:nvSpPr>
+        <p:spPr>
+          <a:xfrm>
+            <a:off x="1005840" y="5029200"/>
+            <a:ext cx="10332720" cy="457200"/>
+          </a:xfrm>
+          <a:prstGeom prst="rect">
+            <a:avLst/>
+          </a:prstGeom>
+          <a:noFill/>
+        </p:spPr>
+        <p:txBody>
+          <a:bodyPr wrap="square" anchor="t" lIns="0" rIns="0" tIns="0" bIns="0">
+            <a:spAutoFit/>
+          </a:bodyPr>
+          <a:lstStyle/>
+          <a:p>
+            <a:pPr algn="l">
+              <a:spcBef>
+                <a:spcPts val="0"/>
+              </a:spcBef>
+              <a:spcAft>
+                <a:spcPts val="400"/>
+              </a:spcAft>
+            </a:pPr>
+            <a:r>
+              <a:rPr sz="1400" b="0">
+                <a:solidFill>
+                  <a:srgbClr val="232830"/>
+                </a:solidFill>
+                <a:latin typeface="Meiryo"/>
+              </a:rPr>
+              <a:t>Bedrock経由・フォルダ制限・権限確認で、使える範囲を限定して統治できる。</a:t>
+            </a:r>
+          </a:p>
+        </p:txBody>
+      </p:sp>
+      <p:sp>
+        <p:nvSpPr>
+          <p:cNvPr id="17" name="TextBox 16"/>
+          <p:cNvSpPr txBox="1"/>
+          <p:nvPr/>
+        </p:nvSpPr>
+        <p:spPr>
+          <a:xfrm>
+            <a:off x="548640" y="5715000"/>
+            <a:ext cx="10972800" cy="548640"/>
+          </a:xfrm>
+          <a:prstGeom prst="rect">
+            <a:avLst/>
+          </a:prstGeom>
+          <a:noFill/>
+        </p:spPr>
+        <p:txBody>
+          <a:bodyPr wrap="square" anchor="t" lIns="0" rIns="0" tIns="0" bIns="0">
+            <a:spAutoFit/>
+          </a:bodyPr>
+          <a:lstStyle/>
+          <a:p>
+            <a:pPr algn="l">
+              <a:spcBef>
+                <a:spcPts val="0"/>
+              </a:spcBef>
+              <a:spcAft>
+                <a:spcPts val="400"/>
+              </a:spcAft>
+            </a:pPr>
+            <a:r>
+              <a:rPr sz="1500" b="1">
+                <a:solidFill>
+                  <a:srgbClr val="8A6326"/>
+                </a:solidFill>
+                <a:latin typeface="Meiryo"/>
+              </a:rPr>
+              <a:t>要は：</a:t>
+            </a:r>
+            <a:r>
+              <a:rPr sz="1500" b="0">
+                <a:solidFill>
+                  <a:srgbClr val="232830"/>
+                </a:solidFill>
+                <a:latin typeface="Meiryo"/>
+              </a:rPr>
+              <a:t>Copilotは“Officeの中×自社データ”が強い。Coworkはその外側を埋める＝競合ではなく補完。</a:t>
+            </a:r>
+          </a:p>
+        </p:txBody>
+      </p:sp>
+      <p:sp>
+        <p:nvSpPr>
+          <p:cNvPr id="18" name="TextBox 17"/>
+          <p:cNvSpPr txBox="1"/>
+          <p:nvPr/>
+        </p:nvSpPr>
+        <p:spPr>
+          <a:xfrm>
+            <a:off x="548640" y="6355080"/>
+            <a:ext cx="10972800" cy="320040"/>
+          </a:xfrm>
+          <a:prstGeom prst="rect">
+            <a:avLst/>
+          </a:prstGeom>
+          <a:noFill/>
+        </p:spPr>
+        <p:txBody>
+          <a:bodyPr wrap="square" anchor="t" lIns="0" rIns="0" tIns="0" bIns="0">
+            <a:spAutoFit/>
+          </a:bodyPr>
+          <a:lstStyle/>
+          <a:p>
+            <a:pPr algn="l">
+              <a:spcBef>
+                <a:spcPts val="0"/>
+              </a:spcBef>
+              <a:spcAft>
+                <a:spcPts val="400"/>
+              </a:spcAft>
+            </a:pPr>
+            <a:r>
+              <a:rPr sz="1000" b="0">
+                <a:solidFill>
+                  <a:srgbClr val="6F7683"/>
+                </a:solidFill>
+                <a:latin typeface="Meiryo"/>
+              </a:rPr>
+              <a:t>出典：各社公式ドキュメント（Anthropic / Microsoft Learn / OpenAI / Google）・2026-10時点</a:t>
+            </a:r>
+          </a:p>
+        </p:txBody>
+      </p:sp>
+    </p:spTree>
+  </p:cSld>
+  <p:clrMapOvr>
+    <a:masterClrMapping/>
+  </p:clrMapOvr>
+</p:sld>
+</file>
+
+<file path=ppt/slides/slide5.xml><?xml version="1.0" encoding="utf-8"?>
+<p:sld xmlns:a="http://schemas.openxmlformats.org/drawingml/2006/main" xmlns:p="http://schemas.openxmlformats.org/presentationml/2006/main" xmlns:r="http://schemas.openxmlformats.org/officeDocument/2006/relationships">
+  <p:cSld>
+    <p:spTree>
+      <p:nvGrpSpPr>
+        <p:cNvPr id="1" name=""/>
+        <p:cNvGrpSpPr/>
+        <p:nvPr/>
+      </p:nvGrpSpPr>
+      <p:grpSpPr/>
+      <p:sp>
+        <p:nvSpPr>
+          <p:cNvPr id="2" name="Rectangle 1"/>
+          <p:cNvSpPr/>
+          <p:nvPr/>
+        </p:nvSpPr>
+        <p:spPr>
+          <a:xfrm>
+            <a:off x="0" y="0"/>
+            <a:ext cx="12191695" cy="6858000"/>
+          </a:xfrm>
+          <a:prstGeom prst="rect">
+            <a:avLst/>
+          </a:prstGeom>
+          <a:solidFill>
+            <a:srgbClr val="FBF9F5"/>
+          </a:solidFill>
+          <a:ln>
+            <a:noFill/>
+          </a:ln>
+          <a:effectLst/>
+        </p:spPr>
+        <p:style>
+          <a:lnRef idx="1">
+            <a:schemeClr val="accent1"/>
+          </a:lnRef>
+          <a:fillRef idx="3">
+            <a:schemeClr val="accent1"/>
+          </a:fillRef>
+          <a:effectRef idx="2">
+            <a:schemeClr val="accent1"/>
+          </a:effectRef>
+          <a:fontRef idx="minor">
+            <a:schemeClr val="lt1"/>
+          </a:fontRef>
+        </p:style>
+        <p:txBody>
+          <a:bodyPr rtlCol="0" anchor="ctr"/>
+          <a:lstStyle/>
+          <a:p>
+            <a:pPr algn="ctr"/>
+          </a:p>
+        </p:txBody>
+      </p:sp>
+      <p:sp>
+        <p:nvSpPr>
+          <p:cNvPr id="3" name="TextBox 2"/>
+          <p:cNvSpPr txBox="1"/>
+          <p:nvPr/>
+        </p:nvSpPr>
+        <p:spPr>
+          <a:xfrm>
+            <a:off x="548640" y="502920"/>
+            <a:ext cx="10972800" cy="731520"/>
+          </a:xfrm>
+          <a:prstGeom prst="rect">
+            <a:avLst/>
+          </a:prstGeom>
+          <a:noFill/>
+        </p:spPr>
+        <p:txBody>
+          <a:bodyPr wrap="square" anchor="t" lIns="0" rIns="0" tIns="0" bIns="0">
+            <a:spAutoFit/>
+          </a:bodyPr>
+          <a:lstStyle/>
+          <a:p>
+            <a:pPr algn="l">
+              <a:spcBef>
+                <a:spcPts val="0"/>
+              </a:spcBef>
+              <a:spcAft>
+                <a:spcPts val="400"/>
+              </a:spcAft>
+            </a:pPr>
+            <a:r>
+              <a:rPr sz="2800" b="1">
+                <a:solidFill>
+                  <a:srgbClr val="232830"/>
+                </a:solidFill>
+                <a:latin typeface="Meiryo"/>
+              </a:rPr>
+              <a:t>Claude Code と M365 Copilot：似て見えて役割が違う</a:t>
+            </a:r>
+          </a:p>
+        </p:txBody>
+      </p:sp>
+      <p:sp>
+        <p:nvSpPr>
+          <p:cNvPr id="4" name="TextBox 3"/>
+          <p:cNvSpPr txBox="1"/>
+          <p:nvPr/>
+        </p:nvSpPr>
+        <p:spPr>
+          <a:xfrm>
+            <a:off x="548640" y="1188720"/>
+            <a:ext cx="10972800" cy="457200"/>
+          </a:xfrm>
+          <a:prstGeom prst="rect">
+            <a:avLst/>
+          </a:prstGeom>
+          <a:noFill/>
+        </p:spPr>
+        <p:txBody>
+          <a:bodyPr wrap="square" anchor="t" lIns="0" rIns="0" tIns="0" bIns="0">
+            <a:spAutoFit/>
+          </a:bodyPr>
+          <a:lstStyle/>
+          <a:p>
+            <a:pPr algn="l">
+              <a:spcBef>
+                <a:spcPts val="0"/>
+              </a:spcBef>
+              <a:spcAft>
+                <a:spcPts val="400"/>
+              </a:spcAft>
+            </a:pPr>
+            <a:r>
+              <a:rPr sz="1500" b="0">
+                <a:solidFill>
+                  <a:srgbClr val="6F7683"/>
+                </a:solidFill>
+                <a:latin typeface="Meiryo"/>
+              </a:rPr>
+              <a:t>どちらもAIアシスタント。だが“何のために作られたか”が違う。</a:t>
+            </a:r>
+          </a:p>
+        </p:txBody>
+      </p:sp>
+      <p:sp>
+        <p:nvSpPr>
+          <p:cNvPr id="5" name="Rounded Rectangle 4"/>
+          <p:cNvSpPr/>
+          <p:nvPr/>
+        </p:nvSpPr>
+        <p:spPr>
+          <a:xfrm>
+            <a:off x="548640" y="1828800"/>
+            <a:ext cx="5394960" cy="3108960"/>
+          </a:xfrm>
+          <a:prstGeom prst="roundRect">
+            <a:avLst>
+              <a:gd name="adj" fmla="val 6000"/>
+            </a:avLst>
+          </a:prstGeom>
+          <a:solidFill>
+            <a:srgbClr val="FFFFFF"/>
+          </a:solidFill>
+          <a:ln w="12700">
+            <a:solidFill>
+              <a:srgbClr val="E7DECE"/>
+            </a:solidFill>
+          </a:ln>
+          <a:effectLst/>
+        </p:spPr>
+        <p:style>
+          <a:lnRef idx="1">
+            <a:schemeClr val="accent1"/>
+          </a:lnRef>
+          <a:fillRef idx="3">
+            <a:schemeClr val="accent1"/>
+          </a:fillRef>
+          <a:effectRef idx="2">
+            <a:schemeClr val="accent1"/>
+          </a:effectRef>
+          <a:fontRef idx="minor">
+            <a:schemeClr val="lt1"/>
+          </a:fontRef>
+        </p:style>
+        <p:txBody>
+          <a:bodyPr rtlCol="0" anchor="ctr"/>
+          <a:lstStyle/>
+          <a:p>
+            <a:pPr algn="ctr"/>
+          </a:p>
+        </p:txBody>
+      </p:sp>
+      <p:sp>
+        <p:nvSpPr>
+          <p:cNvPr id="6" name="TextBox 5"/>
+          <p:cNvSpPr txBox="1"/>
+          <p:nvPr/>
+        </p:nvSpPr>
+        <p:spPr>
+          <a:xfrm>
+            <a:off x="868680" y="2103120"/>
+            <a:ext cx="4754880" cy="457200"/>
+          </a:xfrm>
+          <a:prstGeom prst="rect">
+            <a:avLst/>
+          </a:prstGeom>
+          <a:noFill/>
+        </p:spPr>
+        <p:txBody>
+          <a:bodyPr wrap="square" anchor="t" lIns="0" rIns="0" tIns="0" bIns="0">
+            <a:spAutoFit/>
+          </a:bodyPr>
+          <a:lstStyle/>
+          <a:p>
+            <a:pPr algn="l">
+              <a:spcBef>
+                <a:spcPts val="0"/>
+              </a:spcBef>
+              <a:spcAft>
+                <a:spcPts val="400"/>
+              </a:spcAft>
+            </a:pPr>
+            <a:r>
+              <a:rPr sz="2100" b="1">
+                <a:solidFill>
+                  <a:srgbClr val="8A6326"/>
+                </a:solidFill>
+                <a:latin typeface="Meiryo"/>
+              </a:rPr>
+              <a:t>M365 Copilot</a:t>
+            </a:r>
+          </a:p>
+        </p:txBody>
+      </p:sp>
+      <p:sp>
+        <p:nvSpPr>
+          <p:cNvPr id="7" name="TextBox 6"/>
+          <p:cNvSpPr txBox="1"/>
+          <p:nvPr/>
+        </p:nvSpPr>
+        <p:spPr>
+          <a:xfrm>
+            <a:off x="868680" y="2578608"/>
+            <a:ext cx="4754880" cy="365760"/>
+          </a:xfrm>
+          <a:prstGeom prst="rect">
+            <a:avLst/>
+          </a:prstGeom>
+          <a:noFill/>
+        </p:spPr>
+        <p:txBody>
+          <a:bodyPr wrap="square" anchor="t" lIns="0" rIns="0" tIns="0" bIns="0">
+            <a:spAutoFit/>
+          </a:bodyPr>
+          <a:lstStyle/>
+          <a:p>
+            <a:pPr algn="l">
+              <a:spcBef>
+                <a:spcPts val="0"/>
+              </a:spcBef>
+              <a:spcAft>
+                <a:spcPts val="400"/>
+              </a:spcAft>
+            </a:pPr>
+            <a:r>
+              <a:rPr sz="1300" b="0">
+                <a:solidFill>
+                  <a:srgbClr val="6F7683"/>
+                </a:solidFill>
+                <a:latin typeface="Meiryo"/>
+              </a:rPr>
+              <a:t>Officeの中の相棒</a:t>
+            </a:r>
+          </a:p>
+        </p:txBody>
+      </p:sp>
+      <p:sp>
+        <p:nvSpPr>
+          <p:cNvPr id="8" name="TextBox 7"/>
+          <p:cNvSpPr txBox="1"/>
+          <p:nvPr/>
+        </p:nvSpPr>
+        <p:spPr>
+          <a:xfrm>
+            <a:off x="868680" y="3063240"/>
+            <a:ext cx="4754880" cy="1737360"/>
+          </a:xfrm>
+          <a:prstGeom prst="rect">
+            <a:avLst/>
+          </a:prstGeom>
+          <a:noFill/>
+        </p:spPr>
+        <p:txBody>
+          <a:bodyPr wrap="square" anchor="t" lIns="0" rIns="0" tIns="0" bIns="0">
+            <a:spAutoFit/>
+          </a:bodyPr>
+          <a:lstStyle/>
+          <a:p>
+            <a:pPr algn="l">
+              <a:spcBef>
+                <a:spcPts val="0"/>
+              </a:spcBef>
+              <a:spcAft>
+                <a:spcPts val="1100"/>
+              </a:spcAft>
+            </a:pPr>
+            <a:r>
+              <a:rPr sz="1400" b="1">
+                <a:solidFill>
+                  <a:srgbClr val="A97C37"/>
+                </a:solidFill>
+                <a:latin typeface="Meiryo"/>
+              </a:rPr>
+              <a:t>•  </a:t>
+            </a:r>
+            <a:r>
+              <a:rPr sz="1400" b="0">
+                <a:solidFill>
+                  <a:srgbClr val="232830"/>
+                </a:solidFill>
+                <a:latin typeface="Meiryo"/>
+              </a:rPr>
+              <a:t>自社データ(Graph/Work IQ)で下書き・要約・分析</a:t>
+            </a:r>
+          </a:p>
+          <a:p>
+            <a:pPr algn="l">
+              <a:spcBef>
+                <a:spcPts val="0"/>
+              </a:spcBef>
+              <a:spcAft>
+                <a:spcPts val="1100"/>
+              </a:spcAft>
+            </a:pPr>
+            <a:r>
+              <a:rPr sz="1400" b="1">
+                <a:solidFill>
+                  <a:srgbClr val="A97C37"/>
+                </a:solidFill>
+                <a:latin typeface="Meiryo"/>
+              </a:rPr>
+              <a:t>•  </a:t>
+            </a:r>
+            <a:r>
+              <a:rPr sz="1400" b="0">
+                <a:solidFill>
+                  <a:srgbClr val="232830"/>
+                </a:solidFill>
+                <a:latin typeface="Meiryo"/>
+              </a:rPr>
+              <a:t>Word/Excel/PPT/Outlook/Teams の中で完結</a:t>
+            </a:r>
+          </a:p>
+          <a:p>
+            <a:pPr algn="l">
+              <a:spcBef>
+                <a:spcPts val="0"/>
+              </a:spcBef>
+              <a:spcAft>
+                <a:spcPts val="1100"/>
+              </a:spcAft>
+            </a:pPr>
+            <a:r>
+              <a:rPr sz="1400" b="1">
+                <a:solidFill>
+                  <a:srgbClr val="A97C37"/>
+                </a:solidFill>
+                <a:latin typeface="Meiryo"/>
+              </a:rPr>
+              <a:t>•  </a:t>
+            </a:r>
+            <a:r>
+              <a:rPr sz="1400" b="0">
+                <a:solidFill>
+                  <a:srgbClr val="232830"/>
+                </a:solidFill>
+                <a:latin typeface="Meiryo"/>
+              </a:rPr>
+              <a:t>主に業務ユーザー。M365の統治下で使う</a:t>
+            </a:r>
+          </a:p>
+        </p:txBody>
+      </p:sp>
+      <p:sp>
+        <p:nvSpPr>
+          <p:cNvPr id="9" name="Rounded Rectangle 8"/>
+          <p:cNvSpPr/>
+          <p:nvPr/>
+        </p:nvSpPr>
+        <p:spPr>
+          <a:xfrm>
+            <a:off x="6245352" y="1828800"/>
+            <a:ext cx="5394960" cy="3108960"/>
+          </a:xfrm>
+          <a:prstGeom prst="roundRect">
+            <a:avLst>
+              <a:gd name="adj" fmla="val 6000"/>
+            </a:avLst>
+          </a:prstGeom>
+          <a:solidFill>
+            <a:srgbClr val="FFFFFF"/>
+          </a:solidFill>
+          <a:ln w="12700">
+            <a:solidFill>
+              <a:srgbClr val="E7DECE"/>
+            </a:solidFill>
+          </a:ln>
+          <a:effectLst/>
+        </p:spPr>
+        <p:style>
+          <a:lnRef idx="1">
+            <a:schemeClr val="accent1"/>
+          </a:lnRef>
+          <a:fillRef idx="3">
+            <a:schemeClr val="accent1"/>
+          </a:fillRef>
+          <a:effectRef idx="2">
+            <a:schemeClr val="accent1"/>
+          </a:effectRef>
+          <a:fontRef idx="minor">
+            <a:schemeClr val="lt1"/>
+          </a:fontRef>
+        </p:style>
+        <p:txBody>
+          <a:bodyPr rtlCol="0" anchor="ctr"/>
+          <a:lstStyle/>
+          <a:p>
+            <a:pPr algn="ctr"/>
+          </a:p>
+        </p:txBody>
+      </p:sp>
+      <p:sp>
+        <p:nvSpPr>
+          <p:cNvPr id="10" name="TextBox 9"/>
+          <p:cNvSpPr txBox="1"/>
+          <p:nvPr/>
+        </p:nvSpPr>
+        <p:spPr>
+          <a:xfrm>
+            <a:off x="6565392" y="2103120"/>
+            <a:ext cx="4754880" cy="457200"/>
+          </a:xfrm>
+          <a:prstGeom prst="rect">
+            <a:avLst/>
+          </a:prstGeom>
+          <a:noFill/>
+        </p:spPr>
+        <p:txBody>
+          <a:bodyPr wrap="square" anchor="t" lIns="0" rIns="0" tIns="0" bIns="0">
+            <a:spAutoFit/>
+          </a:bodyPr>
+          <a:lstStyle/>
+          <a:p>
+            <a:pPr algn="l">
+              <a:spcBef>
+                <a:spcPts val="0"/>
+              </a:spcBef>
+              <a:spcAft>
+                <a:spcPts val="400"/>
+              </a:spcAft>
+            </a:pPr>
+            <a:r>
+              <a:rPr sz="2100" b="1">
+                <a:solidFill>
+                  <a:srgbClr val="8A6326"/>
+                </a:solidFill>
+                <a:latin typeface="Meiryo"/>
+              </a:rPr>
+              <a:t>Claude Code</a:t>
+            </a:r>
+          </a:p>
+        </p:txBody>
+      </p:sp>
+      <p:sp>
+        <p:nvSpPr>
+          <p:cNvPr id="11" name="TextBox 10"/>
+          <p:cNvSpPr txBox="1"/>
+          <p:nvPr/>
+        </p:nvSpPr>
+        <p:spPr>
+          <a:xfrm>
+            <a:off x="6565392" y="2578608"/>
+            <a:ext cx="4754880" cy="365760"/>
+          </a:xfrm>
+          <a:prstGeom prst="rect">
+            <a:avLst/>
+          </a:prstGeom>
+          <a:noFill/>
+        </p:spPr>
+        <p:txBody>
+          <a:bodyPr wrap="square" anchor="t" lIns="0" rIns="0" tIns="0" bIns="0">
+            <a:spAutoFit/>
+          </a:bodyPr>
+          <a:lstStyle/>
+          <a:p>
+            <a:pPr algn="l">
+              <a:spcBef>
+                <a:spcPts val="0"/>
+              </a:spcBef>
+              <a:spcAft>
+                <a:spcPts val="400"/>
+              </a:spcAft>
+            </a:pPr>
+            <a:r>
+              <a:rPr sz="1300" b="0">
+                <a:solidFill>
+                  <a:srgbClr val="6F7683"/>
+                </a:solidFill>
+                <a:latin typeface="Meiryo"/>
+              </a:rPr>
+              <a:t>開発者グレードの作業エージェント</a:t>
+            </a:r>
+          </a:p>
+        </p:txBody>
+      </p:sp>
+      <p:sp>
+        <p:nvSpPr>
+          <p:cNvPr id="12" name="TextBox 11"/>
+          <p:cNvSpPr txBox="1"/>
+          <p:nvPr/>
+        </p:nvSpPr>
+        <p:spPr>
+          <a:xfrm>
+            <a:off x="6565392" y="3063240"/>
+            <a:ext cx="4754880" cy="1737360"/>
+          </a:xfrm>
+          <a:prstGeom prst="rect">
+            <a:avLst/>
+          </a:prstGeom>
+          <a:noFill/>
+        </p:spPr>
+        <p:txBody>
+          <a:bodyPr wrap="square" anchor="t" lIns="0" rIns="0" tIns="0" bIns="0">
+            <a:spAutoFit/>
+          </a:bodyPr>
+          <a:lstStyle/>
+          <a:p>
+            <a:pPr algn="l">
+              <a:spcBef>
+                <a:spcPts val="0"/>
+              </a:spcBef>
+              <a:spcAft>
+                <a:spcPts val="1100"/>
+              </a:spcAft>
+            </a:pPr>
+            <a:r>
+              <a:rPr sz="1400" b="1">
+                <a:solidFill>
+                  <a:srgbClr val="A97C37"/>
+                </a:solidFill>
+                <a:latin typeface="Meiryo"/>
+              </a:rPr>
+              <a:t>•  </a:t>
+            </a:r>
+            <a:r>
+              <a:rPr sz="1400" b="0">
+                <a:solidFill>
+                  <a:srgbClr val="232830"/>
+                </a:solidFill>
+                <a:latin typeface="Meiryo"/>
+              </a:rPr>
+              <a:t>ファイル・コード・外部ツール(MCP)を操作して“作る/自動化”</a:t>
+            </a:r>
+          </a:p>
+          <a:p>
+            <a:pPr algn="l">
+              <a:spcBef>
+                <a:spcPts val="0"/>
+              </a:spcBef>
+              <a:spcAft>
+                <a:spcPts val="1100"/>
+              </a:spcAft>
+            </a:pPr>
+            <a:r>
+              <a:rPr sz="1400" b="1">
+                <a:solidFill>
+                  <a:srgbClr val="A97C37"/>
+                </a:solidFill>
+                <a:latin typeface="Meiryo"/>
+              </a:rPr>
+              <a:t>•  </a:t>
+            </a:r>
+            <a:r>
+              <a:rPr sz="1400" b="0">
+                <a:solidFill>
+                  <a:srgbClr val="232830"/>
+                </a:solidFill>
+                <a:latin typeface="Meiryo"/>
+              </a:rPr>
+              <a:t>独自成果物（スクリプト/パイプライン/ダッシュボード）を生成</a:t>
+            </a:r>
+          </a:p>
+          <a:p>
+            <a:pPr algn="l">
+              <a:spcBef>
+                <a:spcPts val="0"/>
+              </a:spcBef>
+              <a:spcAft>
+                <a:spcPts val="1100"/>
+              </a:spcAft>
+            </a:pPr>
+            <a:r>
+              <a:rPr sz="1400" b="1">
+                <a:solidFill>
+                  <a:srgbClr val="A97C37"/>
+                </a:solidFill>
+                <a:latin typeface="Meiryo"/>
+              </a:rPr>
+              <a:t>•  </a:t>
+            </a:r>
+            <a:r>
+              <a:rPr sz="1400" b="0">
+                <a:solidFill>
+                  <a:srgbClr val="232830"/>
+                </a:solidFill>
+                <a:latin typeface="Meiryo"/>
+              </a:rPr>
+              <a:t>ターミナル/プロジェクト単位。本件のEDINET→DBもこちら</a:t>
+            </a:r>
+          </a:p>
+        </p:txBody>
+      </p:sp>
+      <p:sp>
+        <p:nvSpPr>
+          <p:cNvPr id="13" name="TextBox 12"/>
+          <p:cNvSpPr txBox="1"/>
+          <p:nvPr/>
+        </p:nvSpPr>
+        <p:spPr>
+          <a:xfrm>
+            <a:off x="548640" y="5212080"/>
+            <a:ext cx="10972800" cy="1005840"/>
+          </a:xfrm>
+          <a:prstGeom prst="rect">
+            <a:avLst/>
+          </a:prstGeom>
+          <a:noFill/>
+        </p:spPr>
+        <p:txBody>
+          <a:bodyPr wrap="square" anchor="t" lIns="0" rIns="0" tIns="0" bIns="0">
+            <a:spAutoFit/>
+          </a:bodyPr>
+          <a:lstStyle/>
+          <a:p>
+            <a:pPr algn="l">
+              <a:spcBef>
+                <a:spcPts val="0"/>
+              </a:spcBef>
+              <a:spcAft>
+                <a:spcPts val="500"/>
+              </a:spcAft>
+            </a:pPr>
+            <a:r>
+              <a:rPr sz="1500" b="1">
+                <a:solidFill>
+                  <a:srgbClr val="8A6326"/>
+                </a:solidFill>
+                <a:latin typeface="Meiryo"/>
+              </a:rPr>
+              <a:t>使い分け：</a:t>
+            </a:r>
+          </a:p>
+          <a:p>
+            <a:pPr algn="l">
+              <a:spcBef>
+                <a:spcPts val="0"/>
+              </a:spcBef>
+              <a:spcAft>
+                <a:spcPts val="500"/>
+              </a:spcAft>
+            </a:pPr>
+            <a:r>
+              <a:rPr sz="1400" b="0">
+                <a:solidFill>
+                  <a:srgbClr val="232830"/>
+                </a:solidFill>
+                <a:latin typeface="Meiryo"/>
+              </a:rPr>
+              <a:t>・Officeの中で自社データを扱い、文章・資料・分析をしたい → M365 Copilot</a:t>
+            </a:r>
+          </a:p>
+          <a:p>
+            <a:pPr algn="l">
+              <a:spcBef>
+                <a:spcPts val="0"/>
+              </a:spcBef>
+              <a:spcAft>
+                <a:spcPts val="500"/>
+              </a:spcAft>
+            </a:pPr>
+            <a:r>
+              <a:rPr sz="1400" b="0">
+                <a:solidFill>
+                  <a:srgbClr val="232830"/>
+                </a:solidFill>
+                <a:latin typeface="Meiryo"/>
+              </a:rPr>
+              <a:t>・何かを作る/自動化/データをコードやツールで処理して独自成果物 → Claude Code</a:t>
+            </a:r>
+          </a:p>
+        </p:txBody>
+      </p:sp>
+      <p:sp>
+        <p:nvSpPr>
+          <p:cNvPr id="14" name="TextBox 13"/>
+          <p:cNvSpPr txBox="1"/>
+          <p:nvPr/>
+        </p:nvSpPr>
+        <p:spPr>
+          <a:xfrm>
+            <a:off x="548640" y="6355080"/>
+            <a:ext cx="10972800" cy="320040"/>
+          </a:xfrm>
+          <a:prstGeom prst="rect">
+            <a:avLst/>
+          </a:prstGeom>
+          <a:noFill/>
+        </p:spPr>
+        <p:txBody>
+          <a:bodyPr wrap="square" anchor="t" lIns="0" rIns="0" tIns="0" bIns="0">
+            <a:spAutoFit/>
+          </a:bodyPr>
+          <a:lstStyle/>
+          <a:p>
+            <a:pPr algn="l">
+              <a:spcBef>
+                <a:spcPts val="0"/>
+              </a:spcBef>
+              <a:spcAft>
+                <a:spcPts val="400"/>
+              </a:spcAft>
+            </a:pPr>
+            <a:r>
+              <a:rPr sz="1000" b="0">
+                <a:solidFill>
+                  <a:srgbClr val="6F7683"/>
+                </a:solidFill>
+                <a:latin typeface="Meiryo"/>
+              </a:rPr>
+              <a:t>出典：各社公式ドキュメント（Anthropic / Microsoft Learn / OpenAI / Google）・2026-10時点</a:t>
+            </a:r>
+          </a:p>
+        </p:txBody>
+      </p:sp>
+    </p:spTree>
+  </p:cSld>
+  <p:clrMapOvr>
+    <a:masterClrMapping/>
+  </p:clrMapOvr>
+</p:sld>
+</file>
+
+<file path=ppt/slides/slide6.xml><?xml version="1.0" encoding="utf-8"?>
+<p:sld xmlns:a="http://schemas.openxmlformats.org/drawingml/2006/main" xmlns:p="http://schemas.openxmlformats.org/presentationml/2006/main" xmlns:r="http://schemas.openxmlformats.org/officeDocument/2006/relationships">
+  <p:cSld>
+    <p:spTree>
+      <p:nvGrpSpPr>
+        <p:cNvPr id="1" name=""/>
+        <p:cNvGrpSpPr/>
+        <p:nvPr/>
+      </p:nvGrpSpPr>
+      <p:grpSpPr/>
+      <p:sp>
+        <p:nvSpPr>
+          <p:cNvPr id="2" name="Rectangle 1"/>
+          <p:cNvSpPr/>
+          <p:nvPr/>
+        </p:nvSpPr>
+        <p:spPr>
+          <a:xfrm>
+            <a:off x="0" y="0"/>
+            <a:ext cx="12191695" cy="6858000"/>
+          </a:xfrm>
+          <a:prstGeom prst="rect">
+            <a:avLst/>
+          </a:prstGeom>
+          <a:solidFill>
             <a:srgbClr val="232830"/>
           </a:solidFill>
           <a:ln>

--- a/docs/03_参考資料/Copilot_Cowork_競合比較.pptx
+++ b/docs/03_参考資料/Copilot_Cowork_競合比較.pptx
@@ -5804,7 +5804,7 @@
                 </a:solidFill>
                 <a:latin typeface="Meiryo"/>
               </a:rPr>
-              <a:t>Claude Code と M365 Copilot：似て見えて役割が違う</a:t>
+              <a:t>Claude Cowork と Claude Code：同じ頭脳、入り口が違う</a:t>
             </a:r>
           </a:p>
         </p:txBody>
@@ -5846,7 +5846,7 @@
                 </a:solidFill>
                 <a:latin typeface="Meiryo"/>
               </a:rPr>
-              <a:t>どちらもAIアシスタント。だが“何のために作られたか”が違う。</a:t>
+              <a:t>どちらもClaudeの“同一の自律エージェント基盤”。対象と使う人で選ぶ（本件は両方使う）。</a:t>
             </a:r>
           </a:p>
         </p:txBody>
@@ -5860,7 +5860,7 @@
         <p:spPr>
           <a:xfrm>
             <a:off x="548640" y="1828800"/>
-            <a:ext cx="5394960" cy="3108960"/>
+            <a:ext cx="5394960" cy="3200400"/>
           </a:xfrm>
           <a:prstGeom prst="roundRect">
             <a:avLst>
@@ -5936,7 +5936,7 @@
                 </a:solidFill>
                 <a:latin typeface="Meiryo"/>
               </a:rPr>
-              <a:t>M365 Copilot</a:t>
+              <a:t>Claude Cowork</a:t>
             </a:r>
           </a:p>
         </p:txBody>
@@ -5978,7 +5978,7 @@
                 </a:solidFill>
                 <a:latin typeface="Meiryo"/>
               </a:rPr>
-              <a:t>Officeの中の相棒</a:t>
+              <a:t>ターミナル不要の業務エージェント</a:t>
             </a:r>
           </a:p>
         </p:txBody>
@@ -5991,8 +5991,8 @@
         </p:nvSpPr>
         <p:spPr>
           <a:xfrm>
-            <a:off x="868680" y="3063240"/>
-            <a:ext cx="4754880" cy="1737360"/>
+            <a:off x="868680" y="3017520"/>
+            <a:ext cx="4754880" cy="1920240"/>
           </a:xfrm>
           <a:prstGeom prst="rect">
             <a:avLst/>
@@ -6010,11 +6010,11 @@
                 <a:spcPts val="0"/>
               </a:spcBef>
               <a:spcAft>
-                <a:spcPts val="1100"/>
+                <a:spcPts val="900"/>
               </a:spcAft>
             </a:pPr>
             <a:r>
-              <a:rPr sz="1400" b="1">
+              <a:rPr sz="1300" b="1">
                 <a:solidFill>
                   <a:srgbClr val="A97C37"/>
                 </a:solidFill>
@@ -6023,13 +6023,13 @@
               <a:t>•  </a:t>
             </a:r>
             <a:r>
-              <a:rPr sz="1400" b="0">
+              <a:rPr sz="1300" b="0">
                 <a:solidFill>
                   <a:srgbClr val="232830"/>
                 </a:solidFill>
                 <a:latin typeface="Meiryo"/>
               </a:rPr>
-              <a:t>自社データ(Graph/Work IQ)で下書き・要約・分析</a:t>
+              <a:t>コーディング不要。主に業務ユーザー向け</a:t>
             </a:r>
           </a:p>
           <a:p>
@@ -6038,11 +6038,11 @@
                 <a:spcPts val="0"/>
               </a:spcBef>
               <a:spcAft>
-                <a:spcPts val="1100"/>
+                <a:spcPts val="900"/>
               </a:spcAft>
             </a:pPr>
             <a:r>
-              <a:rPr sz="1400" b="1">
+              <a:rPr sz="1300" b="1">
                 <a:solidFill>
                   <a:srgbClr val="A97C37"/>
                 </a:solidFill>
@@ -6051,13 +6051,13 @@
               <a:t>•  </a:t>
             </a:r>
             <a:r>
-              <a:rPr sz="1400" b="0">
+              <a:rPr sz="1300" b="0">
                 <a:solidFill>
                   <a:srgbClr val="232830"/>
                 </a:solidFill>
                 <a:latin typeface="Meiryo"/>
               </a:rPr>
-              <a:t>Word/Excel/PPT/Outlook/Teams の中で完結</a:t>
+              <a:t>文書・スライド・表・レポートを作成</a:t>
             </a:r>
           </a:p>
           <a:p>
@@ -6066,11 +6066,11 @@
                 <a:spcPts val="0"/>
               </a:spcBef>
               <a:spcAft>
-                <a:spcPts val="1100"/>
+                <a:spcPts val="900"/>
               </a:spcAft>
             </a:pPr>
             <a:r>
-              <a:rPr sz="1400" b="1">
+              <a:rPr sz="1300" b="1">
                 <a:solidFill>
                   <a:srgbClr val="A97C37"/>
                 </a:solidFill>
@@ -6079,13 +6079,41 @@
               <a:t>•  </a:t>
             </a:r>
             <a:r>
-              <a:rPr sz="1400" b="0">
+              <a:rPr sz="1300" b="0">
                 <a:solidFill>
                   <a:srgbClr val="232830"/>
                 </a:solidFill>
                 <a:latin typeface="Meiryo"/>
               </a:rPr>
-              <a:t>主に業務ユーザー。M365の統治下で使う</a:t>
+              <a:t>選んだフォルダのファイル＋Web＋MCP</a:t>
+            </a:r>
+          </a:p>
+          <a:p>
+            <a:pPr algn="l">
+              <a:spcBef>
+                <a:spcPts val="0"/>
+              </a:spcBef>
+              <a:spcAft>
+                <a:spcPts val="900"/>
+              </a:spcAft>
+            </a:pPr>
+            <a:r>
+              <a:rPr sz="1300" b="1">
+                <a:solidFill>
+                  <a:srgbClr val="A97C37"/>
+                </a:solidFill>
+                <a:latin typeface="Meiryo"/>
+              </a:rPr>
+              <a:t>•  </a:t>
+            </a:r>
+            <a:r>
+              <a:rPr sz="1300" b="0">
+                <a:solidFill>
+                  <a:srgbClr val="232830"/>
+                </a:solidFill>
+                <a:latin typeface="Meiryo"/>
+              </a:rPr>
+              <a:t>調査・資料づくり・データ整理を任せる</a:t>
             </a:r>
           </a:p>
         </p:txBody>
@@ -6099,7 +6127,7 @@
         <p:spPr>
           <a:xfrm>
             <a:off x="6245352" y="1828800"/>
-            <a:ext cx="5394960" cy="3108960"/>
+            <a:ext cx="5394960" cy="3200400"/>
           </a:xfrm>
           <a:prstGeom prst="roundRect">
             <a:avLst>
@@ -6230,8 +6258,8 @@
         </p:nvSpPr>
         <p:spPr>
           <a:xfrm>
-            <a:off x="6565392" y="3063240"/>
-            <a:ext cx="4754880" cy="1737360"/>
+            <a:off x="6565392" y="3017520"/>
+            <a:ext cx="4754880" cy="1920240"/>
           </a:xfrm>
           <a:prstGeom prst="rect">
             <a:avLst/>
@@ -6249,11 +6277,11 @@
                 <a:spcPts val="0"/>
               </a:spcBef>
               <a:spcAft>
-                <a:spcPts val="1100"/>
+                <a:spcPts val="900"/>
               </a:spcAft>
             </a:pPr>
             <a:r>
-              <a:rPr sz="1400" b="1">
+              <a:rPr sz="1300" b="1">
                 <a:solidFill>
                   <a:srgbClr val="A97C37"/>
                 </a:solidFill>
@@ -6262,13 +6290,13 @@
               <a:t>•  </a:t>
             </a:r>
             <a:r>
-              <a:rPr sz="1400" b="0">
+              <a:rPr sz="1300" b="0">
                 <a:solidFill>
                   <a:srgbClr val="232830"/>
                 </a:solidFill>
                 <a:latin typeface="Meiryo"/>
               </a:rPr>
-              <a:t>ファイル・コード・外部ツール(MCP)を操作して“作る/自動化”</a:t>
+              <a:t>ターミナル/CLI・プロジェクト単位</a:t>
             </a:r>
           </a:p>
           <a:p>
@@ -6277,11 +6305,11 @@
                 <a:spcPts val="0"/>
               </a:spcBef>
               <a:spcAft>
-                <a:spcPts val="1100"/>
+                <a:spcPts val="900"/>
               </a:spcAft>
             </a:pPr>
             <a:r>
-              <a:rPr sz="1400" b="1">
+              <a:rPr sz="1300" b="1">
                 <a:solidFill>
                   <a:srgbClr val="A97C37"/>
                 </a:solidFill>
@@ -6290,13 +6318,13 @@
               <a:t>•  </a:t>
             </a:r>
             <a:r>
-              <a:rPr sz="1400" b="0">
+              <a:rPr sz="1300" b="0">
                 <a:solidFill>
                   <a:srgbClr val="232830"/>
                 </a:solidFill>
                 <a:latin typeface="Meiryo"/>
               </a:rPr>
-              <a:t>独自成果物（スクリプト/パイプライン/ダッシュボード）を生成</a:t>
+              <a:t>コード・リポジトリ・ファイルを操作</a:t>
             </a:r>
           </a:p>
           <a:p>
@@ -6305,11 +6333,11 @@
                 <a:spcPts val="0"/>
               </a:spcBef>
               <a:spcAft>
-                <a:spcPts val="1100"/>
+                <a:spcPts val="900"/>
               </a:spcAft>
             </a:pPr>
             <a:r>
-              <a:rPr sz="1400" b="1">
+              <a:rPr sz="1300" b="1">
                 <a:solidFill>
                   <a:srgbClr val="A97C37"/>
                 </a:solidFill>
@@ -6318,13 +6346,41 @@
               <a:t>•  </a:t>
             </a:r>
             <a:r>
-              <a:rPr sz="1400" b="0">
+              <a:rPr sz="1300" b="0">
                 <a:solidFill>
                   <a:srgbClr val="232830"/>
                 </a:solidFill>
                 <a:latin typeface="Meiryo"/>
               </a:rPr>
-              <a:t>ターミナル/プロジェクト単位。本件のEDINET→DBもこちら</a:t>
+              <a:t>スクリプト/パイプライン等で作り込み・自動化</a:t>
+            </a:r>
+          </a:p>
+          <a:p>
+            <a:pPr algn="l">
+              <a:spcBef>
+                <a:spcPts val="0"/>
+              </a:spcBef>
+              <a:spcAft>
+                <a:spcPts val="900"/>
+              </a:spcAft>
+            </a:pPr>
+            <a:r>
+              <a:rPr sz="1300" b="1">
+                <a:solidFill>
+                  <a:srgbClr val="A97C37"/>
+                </a:solidFill>
+                <a:latin typeface="Meiryo"/>
+              </a:rPr>
+              <a:t>•  </a:t>
+            </a:r>
+            <a:r>
+              <a:rPr sz="1300" b="0">
+                <a:solidFill>
+                  <a:srgbClr val="232830"/>
+                </a:solidFill>
+                <a:latin typeface="Meiryo"/>
+              </a:rPr>
+              <a:t>本件のEDINET→ダッシュボード構築もこちら</a:t>
             </a:r>
           </a:p>
         </p:txBody>
@@ -6337,7 +6393,7 @@
         </p:nvSpPr>
         <p:spPr>
           <a:xfrm>
-            <a:off x="548640" y="5212080"/>
+            <a:off x="548640" y="5257800"/>
             <a:ext cx="10972800" cy="1005840"/>
           </a:xfrm>
           <a:prstGeom prst="rect">
@@ -6385,7 +6441,7 @@
                 </a:solidFill>
                 <a:latin typeface="Meiryo"/>
               </a:rPr>
-              <a:t>・Officeの中で自社データを扱い、文章・資料・分析をしたい → M365 Copilot</a:t>
+              <a:t>・コーディング不要で、日常業務のタスク（調査・資料・データ整理）を任せたい → Claude Cowork</a:t>
             </a:r>
           </a:p>
           <a:p>
@@ -6404,7 +6460,7 @@
                 </a:solidFill>
                 <a:latin typeface="Meiryo"/>
               </a:rPr>
-              <a:t>・何かを作る/自動化/データをコードやツールで処理して独自成果物 → Claude Code</a:t>
+              <a:t>・コードやCLIで作り込み・自動化・リポジトリ操作をしたい → Claude Code</a:t>
             </a:r>
           </a:p>
         </p:txBody>

--- a/docs/03_参考資料/Copilot_Cowork_競合比較.pptx
+++ b/docs/03_参考資料/Copilot_Cowork_競合比較.pptx
@@ -3108,7 +3108,7 @@
             <a:avLst/>
           </a:prstGeom>
           <a:solidFill>
-            <a:srgbClr val="232830"/>
+            <a:srgbClr val="1E2832"/>
           </a:solidFill>
           <a:ln>
             <a:noFill/>
@@ -3170,9 +3170,11 @@
             <a:r>
               <a:rPr sz="1500" b="1">
                 <a:solidFill>
-                  <a:srgbClr val="A97C37"/>
-                </a:solidFill>
-                <a:latin typeface="Meiryo"/>
+                  <a:srgbClr val="7AA7D4"/>
+                </a:solidFill>
+                <a:latin typeface="游ゴシック"/>
+                <a:ea typeface="游ゴシック"/>
+                <a:cs typeface="游ゴシック"/>
               </a:rPr>
               <a:t>AIエージェントの地図</a:t>
             </a:r>
@@ -3214,7 +3216,9 @@
                 <a:solidFill>
                   <a:srgbClr val="FFFFFF"/>
                 </a:solidFill>
-                <a:latin typeface="Meiryo"/>
+                <a:latin typeface="游ゴシック"/>
+                <a:ea typeface="游ゴシック"/>
+                <a:cs typeface="游ゴシック"/>
               </a:rPr>
               <a:t>Claude Code / Cowork と</a:t>
             </a:r>
@@ -3233,7 +3237,9 @@
                 <a:solidFill>
                   <a:srgbClr val="FFFFFF"/>
                 </a:solidFill>
-                <a:latin typeface="Meiryo"/>
+                <a:latin typeface="游ゴシック"/>
+                <a:ea typeface="游ゴシック"/>
+                <a:cs typeface="游ゴシック"/>
               </a:rPr>
               <a:t>周辺ツールの位置づけ</a:t>
             </a:r>
@@ -3273,9 +3279,11 @@
             <a:r>
               <a:rPr sz="1800" b="0">
                 <a:solidFill>
-                  <a:srgbClr val="D9DDE3"/>
-                </a:solidFill>
-                <a:latin typeface="Meiryo"/>
+                  <a:srgbClr val="C7D0D9"/>
+                </a:solidFill>
+                <a:latin typeface="游ゴシック"/>
+                <a:ea typeface="游ゴシック"/>
+                <a:cs typeface="游ゴシック"/>
               </a:rPr>
               <a:t>「純粋な競合（同じ土俵）」と「補完（別エコシステム）」を分けて理解する</a:t>
             </a:r>
@@ -3315,9 +3323,11 @@
             <a:r>
               <a:rPr sz="1000" b="0">
                 <a:solidFill>
-                  <a:srgbClr val="6F7683"/>
-                </a:solidFill>
-                <a:latin typeface="Meiryo"/>
+                  <a:srgbClr val="5B6670"/>
+                </a:solidFill>
+                <a:latin typeface="游ゴシック"/>
+                <a:ea typeface="游ゴシック"/>
+                <a:cs typeface="游ゴシック"/>
               </a:rPr>
               <a:t>出典：各社公式ドキュメント（Anthropic / Microsoft Learn / OpenAI / Google）・2026-10時点</a:t>
             </a:r>
@@ -3357,7 +3367,7 @@
             <a:avLst/>
           </a:prstGeom>
           <a:solidFill>
-            <a:srgbClr val="FBF9F5"/>
+            <a:srgbClr val="FFFFFF"/>
           </a:solidFill>
           <a:ln>
             <a:noFill/>
@@ -3419,9 +3429,11 @@
             <a:r>
               <a:rPr sz="3200" b="1">
                 <a:solidFill>
-                  <a:srgbClr val="232830"/>
-                </a:solidFill>
-                <a:latin typeface="Meiryo"/>
+                  <a:srgbClr val="1E2832"/>
+                </a:solidFill>
+                <a:latin typeface="游ゴシック"/>
+                <a:ea typeface="游ゴシック"/>
+                <a:cs typeface="游ゴシック"/>
               </a:rPr>
               <a:t>純粋な競合：自律コーディングエージェント</a:t>
             </a:r>
@@ -3461,9 +3473,11 @@
             <a:r>
               <a:rPr sz="1500" b="0">
                 <a:solidFill>
-                  <a:srgbClr val="6F7683"/>
-                </a:solidFill>
-                <a:latin typeface="Meiryo"/>
+                  <a:srgbClr val="5B6670"/>
+                </a:solidFill>
+                <a:latin typeface="游ゴシック"/>
+                <a:ea typeface="游ゴシック"/>
+                <a:cs typeface="游ゴシック"/>
               </a:rPr>
               <a:t>同じ土俵。ターミナル／CLIでリポジトリに対し自律的に作業する系。</a:t>
             </a:r>
@@ -3491,7 +3505,7 @@
           </a:solidFill>
           <a:ln w="12700">
             <a:solidFill>
-              <a:srgbClr val="E7DECE"/>
+              <a:srgbClr val="D8DEE4"/>
             </a:solidFill>
           </a:ln>
           <a:effectLst/>
@@ -3551,9 +3565,11 @@
             <a:r>
               <a:rPr sz="2000" b="1">
                 <a:solidFill>
-                  <a:srgbClr val="8A6326"/>
-                </a:solidFill>
-                <a:latin typeface="Meiryo"/>
+                  <a:srgbClr val="2E5A88"/>
+                </a:solidFill>
+                <a:latin typeface="游ゴシック"/>
+                <a:ea typeface="游ゴシック"/>
+                <a:cs typeface="游ゴシック"/>
               </a:rPr>
               <a:t>Claude Code</a:t>
             </a:r>
@@ -3593,11 +3609,13 @@
             <a:r>
               <a:rPr sz="1200" b="0">
                 <a:solidFill>
-                  <a:srgbClr val="6F7683"/>
-                </a:solidFill>
-                <a:latin typeface="Meiryo"/>
-              </a:rPr>
-              <a:t>Anthropic（本件）</a:t>
+                  <a:srgbClr val="5B6670"/>
+                </a:solidFill>
+                <a:latin typeface="游ゴシック"/>
+                <a:ea typeface="游ゴシック"/>
+                <a:cs typeface="游ゴシック"/>
+              </a:rPr>
+              <a:t>Anthropic</a:t>
             </a:r>
           </a:p>
         </p:txBody>
@@ -3635,18 +3653,22 @@
             <a:r>
               <a:rPr sz="1200" b="1">
                 <a:solidFill>
-                  <a:srgbClr val="232830"/>
-                </a:solidFill>
-                <a:latin typeface="Meiryo"/>
+                  <a:srgbClr val="1E2832"/>
+                </a:solidFill>
+                <a:latin typeface="游ゴシック"/>
+                <a:ea typeface="游ゴシック"/>
+                <a:cs typeface="游ゴシック"/>
               </a:rPr>
               <a:t>形態：</a:t>
             </a:r>
             <a:r>
               <a:rPr sz="1200" b="0">
                 <a:solidFill>
-                  <a:srgbClr val="232830"/>
-                </a:solidFill>
-                <a:latin typeface="Meiryo"/>
+                  <a:srgbClr val="1E2832"/>
+                </a:solidFill>
+                <a:latin typeface="游ゴシック"/>
+                <a:ea typeface="游ゴシック"/>
+                <a:cs typeface="游ゴシック"/>
               </a:rPr>
               <a:t>CLI＋デスクトップの自律エージェント</a:t>
             </a:r>
@@ -3663,18 +3685,22 @@
             <a:r>
               <a:rPr sz="1200" b="1">
                 <a:solidFill>
-                  <a:srgbClr val="232830"/>
-                </a:solidFill>
-                <a:latin typeface="Meiryo"/>
+                  <a:srgbClr val="1E2832"/>
+                </a:solidFill>
+                <a:latin typeface="游ゴシック"/>
+                <a:ea typeface="游ゴシック"/>
+                <a:cs typeface="游ゴシック"/>
               </a:rPr>
               <a:t>モデル：</a:t>
             </a:r>
             <a:r>
               <a:rPr sz="1200" b="0">
                 <a:solidFill>
-                  <a:srgbClr val="232830"/>
-                </a:solidFill>
-                <a:latin typeface="Meiryo"/>
+                  <a:srgbClr val="1E2832"/>
+                </a:solidFill>
+                <a:latin typeface="游ゴシック"/>
+                <a:ea typeface="游ゴシック"/>
+                <a:cs typeface="游ゴシック"/>
               </a:rPr>
               <a:t>Claude</a:t>
             </a:r>
@@ -3691,20 +3717,24 @@
             <a:r>
               <a:rPr sz="1200" b="1">
                 <a:solidFill>
-                  <a:srgbClr val="232830"/>
-                </a:solidFill>
-                <a:latin typeface="Meiryo"/>
+                  <a:srgbClr val="1E2832"/>
+                </a:solidFill>
+                <a:latin typeface="游ゴシック"/>
+                <a:ea typeface="游ゴシック"/>
+                <a:cs typeface="游ゴシック"/>
               </a:rPr>
               <a:t>特徴：</a:t>
             </a:r>
             <a:r>
               <a:rPr sz="1200" b="0">
                 <a:solidFill>
-                  <a:srgbClr val="232830"/>
-                </a:solidFill>
-                <a:latin typeface="Meiryo"/>
-              </a:rPr>
-              <a:t>本ハンズオンで使用。スキル/MCPで拡張</a:t>
+                  <a:srgbClr val="1E2832"/>
+                </a:solidFill>
+                <a:latin typeface="游ゴシック"/>
+                <a:ea typeface="游ゴシック"/>
+                <a:cs typeface="游ゴシック"/>
+              </a:rPr>
+              <a:t>スキル/MCPで拡張できる</a:t>
             </a:r>
           </a:p>
         </p:txBody>
@@ -3730,7 +3760,7 @@
           </a:solidFill>
           <a:ln w="12700">
             <a:solidFill>
-              <a:srgbClr val="E7DECE"/>
+              <a:srgbClr val="D8DEE4"/>
             </a:solidFill>
           </a:ln>
           <a:effectLst/>
@@ -3790,9 +3820,11 @@
             <a:r>
               <a:rPr sz="2000" b="1">
                 <a:solidFill>
-                  <a:srgbClr val="8A6326"/>
-                </a:solidFill>
-                <a:latin typeface="Meiryo"/>
+                  <a:srgbClr val="2E5A88"/>
+                </a:solidFill>
+                <a:latin typeface="游ゴシック"/>
+                <a:ea typeface="游ゴシック"/>
+                <a:cs typeface="游ゴシック"/>
               </a:rPr>
               <a:t>OpenAI Codex</a:t>
             </a:r>
@@ -3832,9 +3864,11 @@
             <a:r>
               <a:rPr sz="1200" b="0">
                 <a:solidFill>
-                  <a:srgbClr val="6F7683"/>
-                </a:solidFill>
-                <a:latin typeface="Meiryo"/>
+                  <a:srgbClr val="5B6670"/>
+                </a:solidFill>
+                <a:latin typeface="游ゴシック"/>
+                <a:ea typeface="游ゴシック"/>
+                <a:cs typeface="游ゴシック"/>
               </a:rPr>
               <a:t>OpenAI</a:t>
             </a:r>
@@ -3874,18 +3908,22 @@
             <a:r>
               <a:rPr sz="1200" b="1">
                 <a:solidFill>
-                  <a:srgbClr val="232830"/>
-                </a:solidFill>
-                <a:latin typeface="Meiryo"/>
+                  <a:srgbClr val="1E2832"/>
+                </a:solidFill>
+                <a:latin typeface="游ゴシック"/>
+                <a:ea typeface="游ゴシック"/>
+                <a:cs typeface="游ゴシック"/>
               </a:rPr>
               <a:t>形態：</a:t>
             </a:r>
             <a:r>
               <a:rPr sz="1200" b="0">
                 <a:solidFill>
-                  <a:srgbClr val="232830"/>
-                </a:solidFill>
-                <a:latin typeface="Meiryo"/>
+                  <a:srgbClr val="1E2832"/>
+                </a:solidFill>
+                <a:latin typeface="游ゴシック"/>
+                <a:ea typeface="游ゴシック"/>
+                <a:cs typeface="游ゴシック"/>
               </a:rPr>
               <a:t>Codex CLI(OSS)＋Cloud＋IDE拡張＋SDK</a:t>
             </a:r>
@@ -3902,18 +3940,22 @@
             <a:r>
               <a:rPr sz="1200" b="1">
                 <a:solidFill>
-                  <a:srgbClr val="232830"/>
-                </a:solidFill>
-                <a:latin typeface="Meiryo"/>
+                  <a:srgbClr val="1E2832"/>
+                </a:solidFill>
+                <a:latin typeface="游ゴシック"/>
+                <a:ea typeface="游ゴシック"/>
+                <a:cs typeface="游ゴシック"/>
               </a:rPr>
               <a:t>モデル：</a:t>
             </a:r>
             <a:r>
               <a:rPr sz="1200" b="0">
                 <a:solidFill>
-                  <a:srgbClr val="232830"/>
-                </a:solidFill>
-                <a:latin typeface="Meiryo"/>
+                  <a:srgbClr val="1E2832"/>
+                </a:solidFill>
+                <a:latin typeface="游ゴシック"/>
+                <a:ea typeface="游ゴシック"/>
+                <a:cs typeface="游ゴシック"/>
               </a:rPr>
               <a:t>GPT‑5‑codex 系</a:t>
             </a:r>
@@ -3930,18 +3972,22 @@
             <a:r>
               <a:rPr sz="1200" b="1">
                 <a:solidFill>
-                  <a:srgbClr val="232830"/>
-                </a:solidFill>
-                <a:latin typeface="Meiryo"/>
+                  <a:srgbClr val="1E2832"/>
+                </a:solidFill>
+                <a:latin typeface="游ゴシック"/>
+                <a:ea typeface="游ゴシック"/>
+                <a:cs typeface="游ゴシック"/>
               </a:rPr>
               <a:t>特徴：</a:t>
             </a:r>
             <a:r>
               <a:rPr sz="1200" b="0">
                 <a:solidFill>
-                  <a:srgbClr val="232830"/>
-                </a:solidFill>
-                <a:latin typeface="Meiryo"/>
+                  <a:srgbClr val="1E2832"/>
+                </a:solidFill>
+                <a:latin typeface="游ゴシック"/>
+                <a:ea typeface="游ゴシック"/>
+                <a:cs typeface="游ゴシック"/>
               </a:rPr>
               <a:t>ローカルとクラウドsandboxを行き来</a:t>
             </a:r>
@@ -3969,7 +4015,7 @@
           </a:solidFill>
           <a:ln w="12700">
             <a:solidFill>
-              <a:srgbClr val="E7DECE"/>
+              <a:srgbClr val="D8DEE4"/>
             </a:solidFill>
           </a:ln>
           <a:effectLst/>
@@ -4029,9 +4075,11 @@
             <a:r>
               <a:rPr sz="2000" b="1">
                 <a:solidFill>
-                  <a:srgbClr val="8A6326"/>
-                </a:solidFill>
-                <a:latin typeface="Meiryo"/>
+                  <a:srgbClr val="2E5A88"/>
+                </a:solidFill>
+                <a:latin typeface="游ゴシック"/>
+                <a:ea typeface="游ゴシック"/>
+                <a:cs typeface="游ゴシック"/>
               </a:rPr>
               <a:t>Gemini CLI</a:t>
             </a:r>
@@ -4071,9 +4119,11 @@
             <a:r>
               <a:rPr sz="1200" b="0">
                 <a:solidFill>
-                  <a:srgbClr val="6F7683"/>
-                </a:solidFill>
-                <a:latin typeface="Meiryo"/>
+                  <a:srgbClr val="5B6670"/>
+                </a:solidFill>
+                <a:latin typeface="游ゴシック"/>
+                <a:ea typeface="游ゴシック"/>
+                <a:cs typeface="游ゴシック"/>
               </a:rPr>
               <a:t>Google</a:t>
             </a:r>
@@ -4113,18 +4163,22 @@
             <a:r>
               <a:rPr sz="1200" b="1">
                 <a:solidFill>
-                  <a:srgbClr val="232830"/>
-                </a:solidFill>
-                <a:latin typeface="Meiryo"/>
+                  <a:srgbClr val="1E2832"/>
+                </a:solidFill>
+                <a:latin typeface="游ゴシック"/>
+                <a:ea typeface="游ゴシック"/>
+                <a:cs typeface="游ゴシック"/>
               </a:rPr>
               <a:t>形態：</a:t>
             </a:r>
             <a:r>
               <a:rPr sz="1200" b="0">
                 <a:solidFill>
-                  <a:srgbClr val="232830"/>
-                </a:solidFill>
-                <a:latin typeface="Meiryo"/>
+                  <a:srgbClr val="1E2832"/>
+                </a:solidFill>
+                <a:latin typeface="游ゴシック"/>
+                <a:ea typeface="游ゴシック"/>
+                <a:cs typeface="游ゴシック"/>
               </a:rPr>
               <a:t>OSSターミナルエージェント（ReAct＋MCP）</a:t>
             </a:r>
@@ -4141,18 +4195,22 @@
             <a:r>
               <a:rPr sz="1200" b="1">
                 <a:solidFill>
-                  <a:srgbClr val="232830"/>
-                </a:solidFill>
-                <a:latin typeface="Meiryo"/>
+                  <a:srgbClr val="1E2832"/>
+                </a:solidFill>
+                <a:latin typeface="游ゴシック"/>
+                <a:ea typeface="游ゴシック"/>
+                <a:cs typeface="游ゴシック"/>
               </a:rPr>
               <a:t>モデル：</a:t>
             </a:r>
             <a:r>
               <a:rPr sz="1200" b="0">
                 <a:solidFill>
-                  <a:srgbClr val="232830"/>
-                </a:solidFill>
-                <a:latin typeface="Meiryo"/>
+                  <a:srgbClr val="1E2832"/>
+                </a:solidFill>
+                <a:latin typeface="游ゴシック"/>
+                <a:ea typeface="游ゴシック"/>
+                <a:cs typeface="游ゴシック"/>
               </a:rPr>
               <a:t>Gemini</a:t>
             </a:r>
@@ -4169,18 +4227,22 @@
             <a:r>
               <a:rPr sz="1200" b="1">
                 <a:solidFill>
-                  <a:srgbClr val="232830"/>
-                </a:solidFill>
-                <a:latin typeface="Meiryo"/>
+                  <a:srgbClr val="1E2832"/>
+                </a:solidFill>
+                <a:latin typeface="游ゴシック"/>
+                <a:ea typeface="游ゴシック"/>
+                <a:cs typeface="游ゴシック"/>
               </a:rPr>
               <a:t>特徴：</a:t>
             </a:r>
             <a:r>
               <a:rPr sz="1200" b="0">
                 <a:solidFill>
-                  <a:srgbClr val="232830"/>
-                </a:solidFill>
-                <a:latin typeface="Meiryo"/>
+                  <a:srgbClr val="1E2832"/>
+                </a:solidFill>
+                <a:latin typeface="游ゴシック"/>
+                <a:ea typeface="游ゴシック"/>
+                <a:cs typeface="游ゴシック"/>
               </a:rPr>
               <a:t>Antigravity CLI へ移行中（2026-06）</a:t>
             </a:r>
@@ -4220,18 +4282,22 @@
             <a:r>
               <a:rPr sz="1500" b="1">
                 <a:solidFill>
-                  <a:srgbClr val="8A6326"/>
-                </a:solidFill>
-                <a:latin typeface="Meiryo"/>
+                  <a:srgbClr val="2E5A88"/>
+                </a:solidFill>
+                <a:latin typeface="游ゴシック"/>
+                <a:ea typeface="游ゴシック"/>
+                <a:cs typeface="游ゴシック"/>
               </a:rPr>
               <a:t>選ぶ基準：</a:t>
             </a:r>
             <a:r>
               <a:rPr sz="1500" b="0">
                 <a:solidFill>
-                  <a:srgbClr val="232830"/>
-                </a:solidFill>
-                <a:latin typeface="Meiryo"/>
+                  <a:srgbClr val="1E2832"/>
+                </a:solidFill>
+                <a:latin typeface="游ゴシック"/>
+                <a:ea typeface="游ゴシック"/>
+                <a:cs typeface="游ゴシック"/>
               </a:rPr>
               <a:t>モデル品質・既存エコシステム・社内方針。ここは真っ向勝負で、1つを選ぶ領域。</a:t>
             </a:r>
@@ -4271,9 +4337,11 @@
             <a:r>
               <a:rPr sz="1000" b="0">
                 <a:solidFill>
-                  <a:srgbClr val="6F7683"/>
-                </a:solidFill>
-                <a:latin typeface="Meiryo"/>
+                  <a:srgbClr val="5B6670"/>
+                </a:solidFill>
+                <a:latin typeface="游ゴシック"/>
+                <a:ea typeface="游ゴシック"/>
+                <a:cs typeface="游ゴシック"/>
               </a:rPr>
               <a:t>出典：各社公式ドキュメント（Anthropic / Microsoft Learn / OpenAI / Google）・2026-10時点</a:t>
             </a:r>
@@ -4313,7 +4381,7 @@
             <a:avLst/>
           </a:prstGeom>
           <a:solidFill>
-            <a:srgbClr val="FBF9F5"/>
+            <a:srgbClr val="FFFFFF"/>
           </a:solidFill>
           <a:ln>
             <a:noFill/>
@@ -4375,9 +4443,11 @@
             <a:r>
               <a:rPr sz="3200" b="1">
                 <a:solidFill>
-                  <a:srgbClr val="232830"/>
-                </a:solidFill>
-                <a:latin typeface="Meiryo"/>
+                  <a:srgbClr val="1E2832"/>
+                </a:solidFill>
+                <a:latin typeface="游ゴシック"/>
+                <a:ea typeface="游ゴシック"/>
+                <a:cs typeface="游ゴシック"/>
               </a:rPr>
               <a:t>補完：組織AI vs 独立エージェント</a:t>
             </a:r>
@@ -4417,9 +4487,11 @@
             <a:r>
               <a:rPr sz="1500" b="0">
                 <a:solidFill>
-                  <a:srgbClr val="6F7683"/>
-                </a:solidFill>
-                <a:latin typeface="Meiryo"/>
+                  <a:srgbClr val="5B6670"/>
+                </a:solidFill>
+                <a:latin typeface="游ゴシック"/>
+                <a:ea typeface="游ゴシック"/>
+                <a:cs typeface="游ゴシック"/>
               </a:rPr>
               <a:t>競合というより住み分け。何に根ざし、どう統治されるかで分かれる。</a:t>
             </a:r>
@@ -4460,7 +4532,9 @@
                           <a:solidFill>
                             <a:srgbClr val="FFFFFF"/>
                           </a:solidFill>
-                          <a:latin typeface="Meiryo"/>
+                          <a:latin typeface="游ゴシック"/>
+                          <a:ea typeface="游ゴシック"/>
+                          <a:cs typeface="游ゴシック"/>
                         </a:rPr>
                         <a:t>観点</a:t>
                       </a:r>
@@ -4468,7 +4542,7 @@
                   </a:txBody>
                   <a:tcPr marL="109728" marR="109728" marT="54864" marB="54864" anchor="ctr">
                     <a:solidFill>
-                      <a:srgbClr val="8A6326"/>
+                      <a:srgbClr val="2E5A88"/>
                     </a:solidFill>
                   </a:tcPr>
                 </a:tc>
@@ -4482,7 +4556,9 @@
                           <a:solidFill>
                             <a:srgbClr val="FFFFFF"/>
                           </a:solidFill>
-                          <a:latin typeface="Meiryo"/>
+                          <a:latin typeface="游ゴシック"/>
+                          <a:ea typeface="游ゴシック"/>
+                          <a:cs typeface="游ゴシック"/>
                         </a:rPr>
                         <a:t>Microsoft 365 Copilot（自社Cowork/Code含む）</a:t>
                       </a:r>
@@ -4490,7 +4566,7 @@
                   </a:txBody>
                   <a:tcPr marL="109728" marR="109728" marT="54864" marB="54864" anchor="ctr">
                     <a:solidFill>
-                      <a:srgbClr val="8A6326"/>
+                      <a:srgbClr val="2E5A88"/>
                     </a:solidFill>
                   </a:tcPr>
                 </a:tc>
@@ -4504,15 +4580,17 @@
                           <a:solidFill>
                             <a:srgbClr val="FFFFFF"/>
                           </a:solidFill>
-                          <a:latin typeface="Meiryo"/>
+                          <a:latin typeface="游ゴシック"/>
+                          <a:ea typeface="游ゴシック"/>
+                          <a:cs typeface="游ゴシック"/>
                         </a:rPr>
-                        <a:t>Claude Cowork（本件・Bedrock経由）</a:t>
+                        <a:t>Claude Cowork</a:t>
                       </a:r>
                     </a:p>
                   </a:txBody>
                   <a:tcPr marL="109728" marR="109728" marT="54864" marB="54864" anchor="ctr">
                     <a:solidFill>
-                      <a:srgbClr val="8A6326"/>
+                      <a:srgbClr val="2E5A88"/>
                     </a:solidFill>
                   </a:tcPr>
                 </a:tc>
@@ -4526,9 +4604,11 @@
                       <a:r>
                         <a:rPr sz="1200" b="1">
                           <a:solidFill>
-                            <a:srgbClr val="232830"/>
+                            <a:srgbClr val="1E2832"/>
                           </a:solidFill>
-                          <a:latin typeface="Meiryo"/>
+                          <a:latin typeface="游ゴシック"/>
+                          <a:ea typeface="游ゴシック"/>
+                          <a:cs typeface="游ゴシック"/>
                         </a:rPr>
                         <a:t>立ち位置</a:t>
                       </a:r>
@@ -4536,7 +4616,7 @@
                   </a:txBody>
                   <a:tcPr marL="109728" marR="109728" marT="54864" marB="54864" anchor="ctr">
                     <a:solidFill>
-                      <a:srgbClr val="F1EADD"/>
+                      <a:srgbClr val="F2F5F8"/>
                     </a:solidFill>
                   </a:tcPr>
                 </a:tc>
@@ -4548,9 +4628,11 @@
                       <a:r>
                         <a:rPr sz="1200" b="0">
                           <a:solidFill>
-                            <a:srgbClr val="232830"/>
+                            <a:srgbClr val="1E2832"/>
                           </a:solidFill>
-                          <a:latin typeface="Meiryo"/>
+                          <a:latin typeface="游ゴシック"/>
+                          <a:ea typeface="游ゴシック"/>
+                          <a:cs typeface="游ゴシック"/>
                         </a:rPr>
                         <a:t>Microsoftエコシステムに内蔵</a:t>
                       </a:r>
@@ -4570,9 +4652,11 @@
                       <a:r>
                         <a:rPr sz="1200" b="0">
                           <a:solidFill>
-                            <a:srgbClr val="232830"/>
+                            <a:srgbClr val="1E2832"/>
                           </a:solidFill>
-                          <a:latin typeface="Meiryo"/>
+                          <a:latin typeface="游ゴシック"/>
+                          <a:ea typeface="游ゴシック"/>
+                          <a:cs typeface="游ゴシック"/>
                         </a:rPr>
                         <a:t>独立した作業エージェント</a:t>
                       </a:r>
@@ -4594,9 +4678,11 @@
                       <a:r>
                         <a:rPr sz="1200" b="1">
                           <a:solidFill>
-                            <a:srgbClr val="232830"/>
+                            <a:srgbClr val="1E2832"/>
                           </a:solidFill>
-                          <a:latin typeface="Meiryo"/>
+                          <a:latin typeface="游ゴシック"/>
+                          <a:ea typeface="游ゴシック"/>
+                          <a:cs typeface="游ゴシック"/>
                         </a:rPr>
                         <a:t>根ざすデータ</a:t>
                       </a:r>
@@ -4604,7 +4690,7 @@
                   </a:txBody>
                   <a:tcPr marL="109728" marR="109728" marT="54864" marB="54864" anchor="ctr">
                     <a:solidFill>
-                      <a:srgbClr val="F1EADD"/>
+                      <a:srgbClr val="F2F5F8"/>
                     </a:solidFill>
                   </a:tcPr>
                 </a:tc>
@@ -4616,9 +4702,11 @@
                       <a:r>
                         <a:rPr sz="1200" b="0">
                           <a:solidFill>
-                            <a:srgbClr val="232830"/>
+                            <a:srgbClr val="1E2832"/>
                           </a:solidFill>
-                          <a:latin typeface="Meiryo"/>
+                          <a:latin typeface="游ゴシック"/>
+                          <a:ea typeface="游ゴシック"/>
+                          <a:cs typeface="游ゴシック"/>
                         </a:rPr>
                         <a:t>自社テナント（Microsoft Graph / Work IQ）を権限内で自動参照</a:t>
                       </a:r>
@@ -4638,9 +4726,11 @@
                       <a:r>
                         <a:rPr sz="1200" b="0">
                           <a:solidFill>
-                            <a:srgbClr val="232830"/>
+                            <a:srgbClr val="1E2832"/>
                           </a:solidFill>
-                          <a:latin typeface="Meiryo"/>
+                          <a:latin typeface="游ゴシック"/>
+                          <a:ea typeface="游ゴシック"/>
+                          <a:cs typeface="游ゴシック"/>
                         </a:rPr>
                         <a:t>渡したフォルダ＋Web＋外部ツール(MCP)。テナント連携しない</a:t>
                       </a:r>
@@ -4662,9 +4752,11 @@
                       <a:r>
                         <a:rPr sz="1200" b="1">
                           <a:solidFill>
-                            <a:srgbClr val="232830"/>
+                            <a:srgbClr val="1E2832"/>
                           </a:solidFill>
-                          <a:latin typeface="Meiryo"/>
+                          <a:latin typeface="游ゴシック"/>
+                          <a:ea typeface="游ゴシック"/>
+                          <a:cs typeface="游ゴシック"/>
                         </a:rPr>
                         <a:t>自律エージェント</a:t>
                       </a:r>
@@ -4672,7 +4764,7 @@
                   </a:txBody>
                   <a:tcPr marL="109728" marR="109728" marT="54864" marB="54864" anchor="ctr">
                     <a:solidFill>
-                      <a:srgbClr val="F1EADD"/>
+                      <a:srgbClr val="F2F5F8"/>
                     </a:solidFill>
                   </a:tcPr>
                 </a:tc>
@@ -4684,9 +4776,11 @@
                       <a:r>
                         <a:rPr sz="1200" b="0">
                           <a:solidFill>
-                            <a:srgbClr val="232830"/>
+                            <a:srgbClr val="1E2832"/>
                           </a:solidFill>
-                          <a:latin typeface="Meiryo"/>
+                          <a:latin typeface="游ゴシック"/>
+                          <a:ea typeface="游ゴシック"/>
+                          <a:cs typeface="游ゴシック"/>
                         </a:rPr>
                         <a:t>あり（Copilot Studio／Copilot Cowork・Code）</a:t>
                       </a:r>
@@ -4706,9 +4800,11 @@
                       <a:r>
                         <a:rPr sz="1200" b="0">
                           <a:solidFill>
-                            <a:srgbClr val="232830"/>
+                            <a:srgbClr val="1E2832"/>
                           </a:solidFill>
-                          <a:latin typeface="Meiryo"/>
+                          <a:latin typeface="游ゴシック"/>
+                          <a:ea typeface="游ゴシック"/>
+                          <a:cs typeface="游ゴシック"/>
                         </a:rPr>
                         <a:t>あり（Claude Codeと同一アーキテクチャ・ターミナル不要）</a:t>
                       </a:r>
@@ -4730,9 +4826,11 @@
                       <a:r>
                         <a:rPr sz="1200" b="1">
                           <a:solidFill>
-                            <a:srgbClr val="232830"/>
+                            <a:srgbClr val="1E2832"/>
                           </a:solidFill>
-                          <a:latin typeface="Meiryo"/>
+                          <a:latin typeface="游ゴシック"/>
+                          <a:ea typeface="游ゴシック"/>
+                          <a:cs typeface="游ゴシック"/>
                         </a:rPr>
                         <a:t>使うモデル</a:t>
                       </a:r>
@@ -4740,7 +4838,7 @@
                   </a:txBody>
                   <a:tcPr marL="109728" marR="109728" marT="54864" marB="54864" anchor="ctr">
                     <a:solidFill>
-                      <a:srgbClr val="F1EADD"/>
+                      <a:srgbClr val="F2F5F8"/>
                     </a:solidFill>
                   </a:tcPr>
                 </a:tc>
@@ -4752,9 +4850,11 @@
                       <a:r>
                         <a:rPr sz="1200" b="0">
                           <a:solidFill>
-                            <a:srgbClr val="232830"/>
+                            <a:srgbClr val="1E2832"/>
                           </a:solidFill>
-                          <a:latin typeface="Meiryo"/>
+                          <a:latin typeface="游ゴシック"/>
+                          <a:ea typeface="游ゴシック"/>
+                          <a:cs typeface="游ゴシック"/>
                         </a:rPr>
                         <a:t>自動ルーター（Anthropic含む複数）</a:t>
                       </a:r>
@@ -4774,9 +4874,11 @@
                       <a:r>
                         <a:rPr sz="1200" b="0">
                           <a:solidFill>
-                            <a:srgbClr val="232830"/>
+                            <a:srgbClr val="1E2832"/>
                           </a:solidFill>
-                          <a:latin typeface="Meiryo"/>
+                          <a:latin typeface="游ゴシック"/>
+                          <a:ea typeface="游ゴシック"/>
+                          <a:cs typeface="游ゴシック"/>
                         </a:rPr>
                         <a:t>Claude</a:t>
                       </a:r>
@@ -4798,9 +4900,11 @@
                       <a:r>
                         <a:rPr sz="1200" b="1">
                           <a:solidFill>
-                            <a:srgbClr val="232830"/>
+                            <a:srgbClr val="1E2832"/>
                           </a:solidFill>
-                          <a:latin typeface="Meiryo"/>
+                          <a:latin typeface="游ゴシック"/>
+                          <a:ea typeface="游ゴシック"/>
+                          <a:cs typeface="游ゴシック"/>
                         </a:rPr>
                         <a:t>統治／境界</a:t>
                       </a:r>
@@ -4808,7 +4912,7 @@
                   </a:txBody>
                   <a:tcPr marL="109728" marR="109728" marT="54864" marB="54864" anchor="ctr">
                     <a:solidFill>
-                      <a:srgbClr val="F1EADD"/>
+                      <a:srgbClr val="F2F5F8"/>
                     </a:solidFill>
                   </a:tcPr>
                 </a:tc>
@@ -4820,9 +4924,11 @@
                       <a:r>
                         <a:rPr sz="1200" b="0">
                           <a:solidFill>
-                            <a:srgbClr val="232830"/>
+                            <a:srgbClr val="1E2832"/>
                           </a:solidFill>
-                          <a:latin typeface="Meiryo"/>
+                          <a:latin typeface="游ゴシック"/>
+                          <a:ea typeface="游ゴシック"/>
+                          <a:cs typeface="游ゴシック"/>
                         </a:rPr>
                         <a:t>M365コンプライアンス（EDP / Purview / EUDB）</a:t>
                       </a:r>
@@ -4842,11 +4948,13 @@
                       <a:r>
                         <a:rPr sz="1200" b="0">
                           <a:solidFill>
-                            <a:srgbClr val="232830"/>
+                            <a:srgbClr val="1E2832"/>
                           </a:solidFill>
-                          <a:latin typeface="Meiryo"/>
+                          <a:latin typeface="游ゴシック"/>
+                          <a:ea typeface="游ゴシック"/>
+                          <a:cs typeface="游ゴシック"/>
                         </a:rPr>
-                        <a:t>Bedrock・フォルダ制限・権限確認</a:t>
+                        <a:t>権限確認・フォルダ単位のアクセス制限（Bedrock等のクラウドでも導入可）</a:t>
                       </a:r>
                     </a:p>
                   </a:txBody>
@@ -4894,18 +5002,22 @@
             <a:r>
               <a:rPr sz="1400" b="1">
                 <a:solidFill>
-                  <a:srgbClr val="8A6326"/>
-                </a:solidFill>
-                <a:latin typeface="Meiryo"/>
+                  <a:srgbClr val="2E5A88"/>
+                </a:solidFill>
+                <a:latin typeface="游ゴシック"/>
+                <a:ea typeface="游ゴシック"/>
+                <a:cs typeface="游ゴシック"/>
               </a:rPr>
               <a:t>注意：</a:t>
             </a:r>
             <a:r>
               <a:rPr sz="1300" b="0">
                 <a:solidFill>
-                  <a:srgbClr val="232830"/>
-                </a:solidFill>
-                <a:latin typeface="Meiryo"/>
+                  <a:srgbClr val="1E2832"/>
+                </a:solidFill>
+                <a:latin typeface="游ゴシック"/>
+                <a:ea typeface="游ゴシック"/>
+                <a:cs typeface="游ゴシック"/>
               </a:rPr>
               <a:t>「Cowork」は両社が使う名称（必ず社名を冠す）。Copilotも内部でClaudeを利用可＝モデルは差別化軸にならない。</a:t>
             </a:r>
@@ -4945,9 +5057,11 @@
             <a:r>
               <a:rPr sz="1000" b="0">
                 <a:solidFill>
-                  <a:srgbClr val="6F7683"/>
-                </a:solidFill>
-                <a:latin typeface="Meiryo"/>
+                  <a:srgbClr val="5B6670"/>
+                </a:solidFill>
+                <a:latin typeface="游ゴシック"/>
+                <a:ea typeface="游ゴシック"/>
+                <a:cs typeface="游ゴシック"/>
               </a:rPr>
               <a:t>出典：各社公式ドキュメント（Anthropic / Microsoft Learn / OpenAI / Google）・2026-10時点</a:t>
             </a:r>
@@ -4987,7 +5101,7 @@
             <a:avLst/>
           </a:prstGeom>
           <a:solidFill>
-            <a:srgbClr val="FBF9F5"/>
+            <a:srgbClr val="FFFFFF"/>
           </a:solidFill>
           <a:ln>
             <a:noFill/>
@@ -5049,9 +5163,11 @@
             <a:r>
               <a:rPr sz="2800" b="1">
                 <a:solidFill>
-                  <a:srgbClr val="232830"/>
-                </a:solidFill>
-                <a:latin typeface="Meiryo"/>
+                  <a:srgbClr val="1E2832"/>
+                </a:solidFill>
+                <a:latin typeface="游ゴシック"/>
+                <a:ea typeface="游ゴシック"/>
+                <a:cs typeface="游ゴシック"/>
               </a:rPr>
               <a:t>Copilotを使っている人が Claude Cowork を足す理由</a:t>
             </a:r>
@@ -5091,9 +5207,11 @@
             <a:r>
               <a:rPr sz="1500" b="0">
                 <a:solidFill>
-                  <a:srgbClr val="6F7683"/>
-                </a:solidFill>
-                <a:latin typeface="Meiryo"/>
+                  <a:srgbClr val="5B6670"/>
+                </a:solidFill>
+                <a:latin typeface="游ゴシック"/>
+                <a:ea typeface="游ゴシック"/>
+                <a:cs typeface="游ゴシック"/>
               </a:rPr>
               <a:t>置き換えではなく、Copilotが届きにくい“外側”を埋める（補完）。</a:t>
             </a:r>
@@ -5115,7 +5233,7 @@
             <a:avLst/>
           </a:prstGeom>
           <a:solidFill>
-            <a:srgbClr val="A97C37"/>
+            <a:srgbClr val="2E5A88"/>
           </a:solidFill>
           <a:ln>
             <a:noFill/>
@@ -5177,9 +5295,11 @@
             <a:r>
               <a:rPr sz="1800" b="1">
                 <a:solidFill>
-                  <a:srgbClr val="8A6326"/>
-                </a:solidFill>
-                <a:latin typeface="Meiryo"/>
+                  <a:srgbClr val="2E5A88"/>
+                </a:solidFill>
+                <a:latin typeface="游ゴシック"/>
+                <a:ea typeface="游ゴシック"/>
+                <a:cs typeface="游ゴシック"/>
               </a:rPr>
               <a:t>社外・非Officeのデータも扱える</a:t>
             </a:r>
@@ -5219,11 +5339,13 @@
             <a:r>
               <a:rPr sz="1400" b="0">
                 <a:solidFill>
-                  <a:srgbClr val="232830"/>
-                </a:solidFill>
-                <a:latin typeface="Meiryo"/>
-              </a:rPr>
-              <a:t>M365テナント外のデータや形式（例：EDINETのXBRL）を直接処理できる。</a:t>
+                  <a:srgbClr val="1E2832"/>
+                </a:solidFill>
+                <a:latin typeface="游ゴシック"/>
+                <a:ea typeface="游ゴシック"/>
+                <a:cs typeface="游ゴシック"/>
+              </a:rPr>
+              <a:t>M365テナント外のデータや形式（社外の公開データ・他システムのCSV等）を直接処理できる。</a:t>
             </a:r>
           </a:p>
         </p:txBody>
@@ -5243,7 +5365,7 @@
             <a:avLst/>
           </a:prstGeom>
           <a:solidFill>
-            <a:srgbClr val="A97C37"/>
+            <a:srgbClr val="2E5A88"/>
           </a:solidFill>
           <a:ln>
             <a:noFill/>
@@ -5305,9 +5427,11 @@
             <a:r>
               <a:rPr sz="1800" b="1">
                 <a:solidFill>
-                  <a:srgbClr val="8A6326"/>
-                </a:solidFill>
-                <a:latin typeface="Meiryo"/>
+                  <a:srgbClr val="2E5A88"/>
+                </a:solidFill>
+                <a:latin typeface="游ゴシック"/>
+                <a:ea typeface="游ゴシック"/>
+                <a:cs typeface="游ゴシック"/>
               </a:rPr>
               <a:t>成果物の自由度が高い</a:t>
             </a:r>
@@ -5347,9 +5471,11 @@
             <a:r>
               <a:rPr sz="1400" b="0">
                 <a:solidFill>
-                  <a:srgbClr val="232830"/>
-                </a:solidFill>
-                <a:latin typeface="Meiryo"/>
+                  <a:srgbClr val="1E2832"/>
+                </a:solidFill>
+                <a:latin typeface="游ゴシック"/>
+                <a:ea typeface="游ゴシック"/>
+                <a:cs typeface="游ゴシック"/>
               </a:rPr>
               <a:t>Office文書に限らず、独自ツールやHTMLダッシュボード等を生成できる。</a:t>
             </a:r>
@@ -5371,7 +5497,7 @@
             <a:avLst/>
           </a:prstGeom>
           <a:solidFill>
-            <a:srgbClr val="A97C37"/>
+            <a:srgbClr val="2E5A88"/>
           </a:solidFill>
           <a:ln>
             <a:noFill/>
@@ -5433,9 +5559,11 @@
             <a:r>
               <a:rPr sz="1800" b="1">
                 <a:solidFill>
-                  <a:srgbClr val="8A6326"/>
-                </a:solidFill>
-                <a:latin typeface="Meiryo"/>
+                  <a:srgbClr val="2E5A88"/>
+                </a:solidFill>
+                <a:latin typeface="游ゴシック"/>
+                <a:ea typeface="游ゴシック"/>
+                <a:cs typeface="游ゴシック"/>
               </a:rPr>
               <a:t>タスクを丸ごと自律実行</a:t>
             </a:r>
@@ -5475,9 +5603,11 @@
             <a:r>
               <a:rPr sz="1400" b="0">
                 <a:solidFill>
-                  <a:srgbClr val="232830"/>
-                </a:solidFill>
-                <a:latin typeface="Meiryo"/>
+                  <a:srgbClr val="1E2832"/>
+                </a:solidFill>
+                <a:latin typeface="游ゴシック"/>
+                <a:ea typeface="游ゴシック"/>
+                <a:cs typeface="游ゴシック"/>
               </a:rPr>
               <a:t>複数ステップを計画→実行。外部ツール(MCP)やコード実行まで任せられる。</a:t>
             </a:r>
@@ -5499,7 +5629,7 @@
             <a:avLst/>
           </a:prstGeom>
           <a:solidFill>
-            <a:srgbClr val="A97C37"/>
+            <a:srgbClr val="2E5A88"/>
           </a:solidFill>
           <a:ln>
             <a:noFill/>
@@ -5561,11 +5691,13 @@
             <a:r>
               <a:rPr sz="1800" b="1">
                 <a:solidFill>
-                  <a:srgbClr val="8A6326"/>
-                </a:solidFill>
-                <a:latin typeface="Meiryo"/>
-              </a:rPr>
-              <a:t>本件は範囲を絞って導入</a:t>
+                  <a:srgbClr val="2E5A88"/>
+                </a:solidFill>
+                <a:latin typeface="游ゴシック"/>
+                <a:ea typeface="游ゴシック"/>
+                <a:cs typeface="游ゴシック"/>
+              </a:rPr>
+              <a:t>範囲を絞って導入できる</a:t>
             </a:r>
           </a:p>
         </p:txBody>
@@ -5603,11 +5735,13 @@
             <a:r>
               <a:rPr sz="1400" b="0">
                 <a:solidFill>
-                  <a:srgbClr val="232830"/>
-                </a:solidFill>
-                <a:latin typeface="Meiryo"/>
-              </a:rPr>
-              <a:t>Bedrock経由・フォルダ制限・権限確認で、使える範囲を限定して統治できる。</a:t>
+                  <a:srgbClr val="1E2832"/>
+                </a:solidFill>
+                <a:latin typeface="游ゴシック"/>
+                <a:ea typeface="游ゴシック"/>
+                <a:cs typeface="游ゴシック"/>
+              </a:rPr>
+              <a:t>フォルダ制限・権限確認で、使える範囲を限定して統治できる（Bedrock等のクラウドにも対応）。</a:t>
             </a:r>
           </a:p>
         </p:txBody>
@@ -5645,18 +5779,22 @@
             <a:r>
               <a:rPr sz="1500" b="1">
                 <a:solidFill>
-                  <a:srgbClr val="8A6326"/>
-                </a:solidFill>
-                <a:latin typeface="Meiryo"/>
+                  <a:srgbClr val="2E5A88"/>
+                </a:solidFill>
+                <a:latin typeface="游ゴシック"/>
+                <a:ea typeface="游ゴシック"/>
+                <a:cs typeface="游ゴシック"/>
               </a:rPr>
               <a:t>要は：</a:t>
             </a:r>
             <a:r>
               <a:rPr sz="1500" b="0">
                 <a:solidFill>
-                  <a:srgbClr val="232830"/>
-                </a:solidFill>
-                <a:latin typeface="Meiryo"/>
+                  <a:srgbClr val="1E2832"/>
+                </a:solidFill>
+                <a:latin typeface="游ゴシック"/>
+                <a:ea typeface="游ゴシック"/>
+                <a:cs typeface="游ゴシック"/>
               </a:rPr>
               <a:t>Copilotは“Officeの中×自社データ”が強い。Coworkはその外側を埋める＝競合ではなく補完。</a:t>
             </a:r>
@@ -5696,9 +5834,11 @@
             <a:r>
               <a:rPr sz="1000" b="0">
                 <a:solidFill>
-                  <a:srgbClr val="6F7683"/>
-                </a:solidFill>
-                <a:latin typeface="Meiryo"/>
+                  <a:srgbClr val="5B6670"/>
+                </a:solidFill>
+                <a:latin typeface="游ゴシック"/>
+                <a:ea typeface="游ゴシック"/>
+                <a:cs typeface="游ゴシック"/>
               </a:rPr>
               <a:t>出典：各社公式ドキュメント（Anthropic / Microsoft Learn / OpenAI / Google）・2026-10時点</a:t>
             </a:r>
@@ -5738,7 +5878,7 @@
             <a:avLst/>
           </a:prstGeom>
           <a:solidFill>
-            <a:srgbClr val="FBF9F5"/>
+            <a:srgbClr val="FFFFFF"/>
           </a:solidFill>
           <a:ln>
             <a:noFill/>
@@ -5800,9 +5940,11 @@
             <a:r>
               <a:rPr sz="2800" b="1">
                 <a:solidFill>
-                  <a:srgbClr val="232830"/>
-                </a:solidFill>
-                <a:latin typeface="Meiryo"/>
+                  <a:srgbClr val="1E2832"/>
+                </a:solidFill>
+                <a:latin typeface="游ゴシック"/>
+                <a:ea typeface="游ゴシック"/>
+                <a:cs typeface="游ゴシック"/>
               </a:rPr>
               <a:t>Claude Cowork と Claude Code：同じ頭脳、入り口が違う</a:t>
             </a:r>
@@ -5842,11 +5984,13 @@
             <a:r>
               <a:rPr sz="1500" b="0">
                 <a:solidFill>
-                  <a:srgbClr val="6F7683"/>
-                </a:solidFill>
-                <a:latin typeface="Meiryo"/>
-              </a:rPr>
-              <a:t>どちらもClaudeの“同一の自律エージェント基盤”。対象と使う人で選ぶ（本件は両方使う）。</a:t>
+                  <a:srgbClr val="5B6670"/>
+                </a:solidFill>
+                <a:latin typeface="游ゴシック"/>
+                <a:ea typeface="游ゴシック"/>
+                <a:cs typeface="游ゴシック"/>
+              </a:rPr>
+              <a:t>どちらもClaudeの“同一の自律エージェント基盤”。対象と使う人で選ぶ。</a:t>
             </a:r>
           </a:p>
         </p:txBody>
@@ -5872,7 +6016,7 @@
           </a:solidFill>
           <a:ln w="12700">
             <a:solidFill>
-              <a:srgbClr val="E7DECE"/>
+              <a:srgbClr val="D8DEE4"/>
             </a:solidFill>
           </a:ln>
           <a:effectLst/>
@@ -5932,9 +6076,11 @@
             <a:r>
               <a:rPr sz="2100" b="1">
                 <a:solidFill>
-                  <a:srgbClr val="8A6326"/>
-                </a:solidFill>
-                <a:latin typeface="Meiryo"/>
+                  <a:srgbClr val="2E5A88"/>
+                </a:solidFill>
+                <a:latin typeface="游ゴシック"/>
+                <a:ea typeface="游ゴシック"/>
+                <a:cs typeface="游ゴシック"/>
               </a:rPr>
               <a:t>Claude Cowork</a:t>
             </a:r>
@@ -5974,9 +6120,11 @@
             <a:r>
               <a:rPr sz="1300" b="0">
                 <a:solidFill>
-                  <a:srgbClr val="6F7683"/>
-                </a:solidFill>
-                <a:latin typeface="Meiryo"/>
+                  <a:srgbClr val="5B6670"/>
+                </a:solidFill>
+                <a:latin typeface="游ゴシック"/>
+                <a:ea typeface="游ゴシック"/>
+                <a:cs typeface="游ゴシック"/>
               </a:rPr>
               <a:t>ターミナル不要の業務エージェント</a:t>
             </a:r>
@@ -6016,18 +6164,22 @@
             <a:r>
               <a:rPr sz="1300" b="1">
                 <a:solidFill>
-                  <a:srgbClr val="A97C37"/>
-                </a:solidFill>
-                <a:latin typeface="Meiryo"/>
+                  <a:srgbClr val="2E5A88"/>
+                </a:solidFill>
+                <a:latin typeface="游ゴシック"/>
+                <a:ea typeface="游ゴシック"/>
+                <a:cs typeface="游ゴシック"/>
               </a:rPr>
               <a:t>•  </a:t>
             </a:r>
             <a:r>
               <a:rPr sz="1300" b="0">
                 <a:solidFill>
-                  <a:srgbClr val="232830"/>
-                </a:solidFill>
-                <a:latin typeface="Meiryo"/>
+                  <a:srgbClr val="1E2832"/>
+                </a:solidFill>
+                <a:latin typeface="游ゴシック"/>
+                <a:ea typeface="游ゴシック"/>
+                <a:cs typeface="游ゴシック"/>
               </a:rPr>
               <a:t>コーディング不要。主に業務ユーザー向け</a:t>
             </a:r>
@@ -6044,18 +6196,22 @@
             <a:r>
               <a:rPr sz="1300" b="1">
                 <a:solidFill>
-                  <a:srgbClr val="A97C37"/>
-                </a:solidFill>
-                <a:latin typeface="Meiryo"/>
+                  <a:srgbClr val="2E5A88"/>
+                </a:solidFill>
+                <a:latin typeface="游ゴシック"/>
+                <a:ea typeface="游ゴシック"/>
+                <a:cs typeface="游ゴシック"/>
               </a:rPr>
               <a:t>•  </a:t>
             </a:r>
             <a:r>
               <a:rPr sz="1300" b="0">
                 <a:solidFill>
-                  <a:srgbClr val="232830"/>
-                </a:solidFill>
-                <a:latin typeface="Meiryo"/>
+                  <a:srgbClr val="1E2832"/>
+                </a:solidFill>
+                <a:latin typeface="游ゴシック"/>
+                <a:ea typeface="游ゴシック"/>
+                <a:cs typeface="游ゴシック"/>
               </a:rPr>
               <a:t>文書・スライド・表・レポートを作成</a:t>
             </a:r>
@@ -6072,18 +6228,22 @@
             <a:r>
               <a:rPr sz="1300" b="1">
                 <a:solidFill>
-                  <a:srgbClr val="A97C37"/>
-                </a:solidFill>
-                <a:latin typeface="Meiryo"/>
+                  <a:srgbClr val="2E5A88"/>
+                </a:solidFill>
+                <a:latin typeface="游ゴシック"/>
+                <a:ea typeface="游ゴシック"/>
+                <a:cs typeface="游ゴシック"/>
               </a:rPr>
               <a:t>•  </a:t>
             </a:r>
             <a:r>
               <a:rPr sz="1300" b="0">
                 <a:solidFill>
-                  <a:srgbClr val="232830"/>
-                </a:solidFill>
-                <a:latin typeface="Meiryo"/>
+                  <a:srgbClr val="1E2832"/>
+                </a:solidFill>
+                <a:latin typeface="游ゴシック"/>
+                <a:ea typeface="游ゴシック"/>
+                <a:cs typeface="游ゴシック"/>
               </a:rPr>
               <a:t>選んだフォルダのファイル＋Web＋MCP</a:t>
             </a:r>
@@ -6100,18 +6260,22 @@
             <a:r>
               <a:rPr sz="1300" b="1">
                 <a:solidFill>
-                  <a:srgbClr val="A97C37"/>
-                </a:solidFill>
-                <a:latin typeface="Meiryo"/>
+                  <a:srgbClr val="2E5A88"/>
+                </a:solidFill>
+                <a:latin typeface="游ゴシック"/>
+                <a:ea typeface="游ゴシック"/>
+                <a:cs typeface="游ゴシック"/>
               </a:rPr>
               <a:t>•  </a:t>
             </a:r>
             <a:r>
               <a:rPr sz="1300" b="0">
                 <a:solidFill>
-                  <a:srgbClr val="232830"/>
-                </a:solidFill>
-                <a:latin typeface="Meiryo"/>
+                  <a:srgbClr val="1E2832"/>
+                </a:solidFill>
+                <a:latin typeface="游ゴシック"/>
+                <a:ea typeface="游ゴシック"/>
+                <a:cs typeface="游ゴシック"/>
               </a:rPr>
               <a:t>調査・資料づくり・データ整理を任せる</a:t>
             </a:r>
@@ -6139,7 +6303,7 @@
           </a:solidFill>
           <a:ln w="12700">
             <a:solidFill>
-              <a:srgbClr val="E7DECE"/>
+              <a:srgbClr val="D8DEE4"/>
             </a:solidFill>
           </a:ln>
           <a:effectLst/>
@@ -6199,9 +6363,11 @@
             <a:r>
               <a:rPr sz="2100" b="1">
                 <a:solidFill>
-                  <a:srgbClr val="8A6326"/>
-                </a:solidFill>
-                <a:latin typeface="Meiryo"/>
+                  <a:srgbClr val="2E5A88"/>
+                </a:solidFill>
+                <a:latin typeface="游ゴシック"/>
+                <a:ea typeface="游ゴシック"/>
+                <a:cs typeface="游ゴシック"/>
               </a:rPr>
               <a:t>Claude Code</a:t>
             </a:r>
@@ -6241,9 +6407,11 @@
             <a:r>
               <a:rPr sz="1300" b="0">
                 <a:solidFill>
-                  <a:srgbClr val="6F7683"/>
-                </a:solidFill>
-                <a:latin typeface="Meiryo"/>
+                  <a:srgbClr val="5B6670"/>
+                </a:solidFill>
+                <a:latin typeface="游ゴシック"/>
+                <a:ea typeface="游ゴシック"/>
+                <a:cs typeface="游ゴシック"/>
               </a:rPr>
               <a:t>開発者グレードの作業エージェント</a:t>
             </a:r>
@@ -6283,18 +6451,22 @@
             <a:r>
               <a:rPr sz="1300" b="1">
                 <a:solidFill>
-                  <a:srgbClr val="A97C37"/>
-                </a:solidFill>
-                <a:latin typeface="Meiryo"/>
+                  <a:srgbClr val="2E5A88"/>
+                </a:solidFill>
+                <a:latin typeface="游ゴシック"/>
+                <a:ea typeface="游ゴシック"/>
+                <a:cs typeface="游ゴシック"/>
               </a:rPr>
               <a:t>•  </a:t>
             </a:r>
             <a:r>
               <a:rPr sz="1300" b="0">
                 <a:solidFill>
-                  <a:srgbClr val="232830"/>
-                </a:solidFill>
-                <a:latin typeface="Meiryo"/>
+                  <a:srgbClr val="1E2832"/>
+                </a:solidFill>
+                <a:latin typeface="游ゴシック"/>
+                <a:ea typeface="游ゴシック"/>
+                <a:cs typeface="游ゴシック"/>
               </a:rPr>
               <a:t>ターミナル/CLI・プロジェクト単位</a:t>
             </a:r>
@@ -6311,18 +6483,22 @@
             <a:r>
               <a:rPr sz="1300" b="1">
                 <a:solidFill>
-                  <a:srgbClr val="A97C37"/>
-                </a:solidFill>
-                <a:latin typeface="Meiryo"/>
+                  <a:srgbClr val="2E5A88"/>
+                </a:solidFill>
+                <a:latin typeface="游ゴシック"/>
+                <a:ea typeface="游ゴシック"/>
+                <a:cs typeface="游ゴシック"/>
               </a:rPr>
               <a:t>•  </a:t>
             </a:r>
             <a:r>
               <a:rPr sz="1300" b="0">
                 <a:solidFill>
-                  <a:srgbClr val="232830"/>
-                </a:solidFill>
-                <a:latin typeface="Meiryo"/>
+                  <a:srgbClr val="1E2832"/>
+                </a:solidFill>
+                <a:latin typeface="游ゴシック"/>
+                <a:ea typeface="游ゴシック"/>
+                <a:cs typeface="游ゴシック"/>
               </a:rPr>
               <a:t>コード・リポジトリ・ファイルを操作</a:t>
             </a:r>
@@ -6339,18 +6515,22 @@
             <a:r>
               <a:rPr sz="1300" b="1">
                 <a:solidFill>
-                  <a:srgbClr val="A97C37"/>
-                </a:solidFill>
-                <a:latin typeface="Meiryo"/>
+                  <a:srgbClr val="2E5A88"/>
+                </a:solidFill>
+                <a:latin typeface="游ゴシック"/>
+                <a:ea typeface="游ゴシック"/>
+                <a:cs typeface="游ゴシック"/>
               </a:rPr>
               <a:t>•  </a:t>
             </a:r>
             <a:r>
               <a:rPr sz="1300" b="0">
                 <a:solidFill>
-                  <a:srgbClr val="232830"/>
-                </a:solidFill>
-                <a:latin typeface="Meiryo"/>
+                  <a:srgbClr val="1E2832"/>
+                </a:solidFill>
+                <a:latin typeface="游ゴシック"/>
+                <a:ea typeface="游ゴシック"/>
+                <a:cs typeface="游ゴシック"/>
               </a:rPr>
               <a:t>スクリプト/パイプライン等で作り込み・自動化</a:t>
             </a:r>
@@ -6367,20 +6547,24 @@
             <a:r>
               <a:rPr sz="1300" b="1">
                 <a:solidFill>
-                  <a:srgbClr val="A97C37"/>
-                </a:solidFill>
-                <a:latin typeface="Meiryo"/>
+                  <a:srgbClr val="2E5A88"/>
+                </a:solidFill>
+                <a:latin typeface="游ゴシック"/>
+                <a:ea typeface="游ゴシック"/>
+                <a:cs typeface="游ゴシック"/>
               </a:rPr>
               <a:t>•  </a:t>
             </a:r>
             <a:r>
               <a:rPr sz="1300" b="0">
                 <a:solidFill>
-                  <a:srgbClr val="232830"/>
-                </a:solidFill>
-                <a:latin typeface="Meiryo"/>
-              </a:rPr>
-              <a:t>本件のEDINET→ダッシュボード構築もこちら</a:t>
+                  <a:srgbClr val="1E2832"/>
+                </a:solidFill>
+                <a:latin typeface="游ゴシック"/>
+                <a:ea typeface="游ゴシック"/>
+                <a:cs typeface="游ゴシック"/>
+              </a:rPr>
+              <a:t>データ処理やツールの作り込みはこちら</a:t>
             </a:r>
           </a:p>
         </p:txBody>
@@ -6418,9 +6602,11 @@
             <a:r>
               <a:rPr sz="1500" b="1">
                 <a:solidFill>
-                  <a:srgbClr val="8A6326"/>
-                </a:solidFill>
-                <a:latin typeface="Meiryo"/>
+                  <a:srgbClr val="2E5A88"/>
+                </a:solidFill>
+                <a:latin typeface="游ゴシック"/>
+                <a:ea typeface="游ゴシック"/>
+                <a:cs typeface="游ゴシック"/>
               </a:rPr>
               <a:t>使い分け：</a:t>
             </a:r>
@@ -6437,9 +6623,11 @@
             <a:r>
               <a:rPr sz="1400" b="0">
                 <a:solidFill>
-                  <a:srgbClr val="232830"/>
-                </a:solidFill>
-                <a:latin typeface="Meiryo"/>
+                  <a:srgbClr val="1E2832"/>
+                </a:solidFill>
+                <a:latin typeface="游ゴシック"/>
+                <a:ea typeface="游ゴシック"/>
+                <a:cs typeface="游ゴシック"/>
               </a:rPr>
               <a:t>・コーディング不要で、日常業務のタスク（調査・資料・データ整理）を任せたい → Claude Cowork</a:t>
             </a:r>
@@ -6456,9 +6644,11 @@
             <a:r>
               <a:rPr sz="1400" b="0">
                 <a:solidFill>
-                  <a:srgbClr val="232830"/>
-                </a:solidFill>
-                <a:latin typeface="Meiryo"/>
+                  <a:srgbClr val="1E2832"/>
+                </a:solidFill>
+                <a:latin typeface="游ゴシック"/>
+                <a:ea typeface="游ゴシック"/>
+                <a:cs typeface="游ゴシック"/>
               </a:rPr>
               <a:t>・コードやCLIで作り込み・自動化・リポジトリ操作をしたい → Claude Code</a:t>
             </a:r>
@@ -6498,9 +6688,11 @@
             <a:r>
               <a:rPr sz="1000" b="0">
                 <a:solidFill>
-                  <a:srgbClr val="6F7683"/>
-                </a:solidFill>
-                <a:latin typeface="Meiryo"/>
+                  <a:srgbClr val="5B6670"/>
+                </a:solidFill>
+                <a:latin typeface="游ゴシック"/>
+                <a:ea typeface="游ゴシック"/>
+                <a:cs typeface="游ゴシック"/>
               </a:rPr>
               <a:t>出典：各社公式ドキュメント（Anthropic / Microsoft Learn / OpenAI / Google）・2026-10時点</a:t>
             </a:r>
@@ -6540,7 +6732,7 @@
             <a:avLst/>
           </a:prstGeom>
           <a:solidFill>
-            <a:srgbClr val="232830"/>
+            <a:srgbClr val="1E2832"/>
           </a:solidFill>
           <a:ln>
             <a:noFill/>
@@ -6604,7 +6796,9 @@
                 <a:solidFill>
                   <a:srgbClr val="FFFFFF"/>
                 </a:solidFill>
-                <a:latin typeface="Meiryo"/>
+                <a:latin typeface="游ゴシック"/>
+                <a:ea typeface="游ゴシック"/>
+                <a:cs typeface="游ゴシック"/>
               </a:rPr>
               <a:t>住み分けの一言</a:t>
             </a:r>
@@ -6626,7 +6820,7 @@
             <a:avLst/>
           </a:prstGeom>
           <a:solidFill>
-            <a:srgbClr val="A97C37"/>
+            <a:srgbClr val="7AA7D4"/>
           </a:solidFill>
           <a:ln>
             <a:noFill/>
@@ -6690,16 +6884,20 @@
                 <a:solidFill>
                   <a:srgbClr val="FFFFFF"/>
                 </a:solidFill>
-                <a:latin typeface="Meiryo"/>
+                <a:latin typeface="游ゴシック"/>
+                <a:ea typeface="游ゴシック"/>
+                <a:cs typeface="游ゴシック"/>
               </a:rPr>
               <a:t>既存のMicrosoft世界に根ざし、社内データを自動活用したい　</a:t>
             </a:r>
             <a:r>
               <a:rPr sz="1800" b="0">
                 <a:solidFill>
-                  <a:srgbClr val="D9DDE3"/>
-                </a:solidFill>
-                <a:latin typeface="Meiryo"/>
+                  <a:srgbClr val="C7D0D9"/>
+                </a:solidFill>
+                <a:latin typeface="游ゴシック"/>
+                <a:ea typeface="游ゴシック"/>
+                <a:cs typeface="游ゴシック"/>
               </a:rPr>
               <a:t>→ M365 Copilot</a:t>
             </a:r>
@@ -6721,7 +6919,7 @@
             <a:avLst/>
           </a:prstGeom>
           <a:solidFill>
-            <a:srgbClr val="A97C37"/>
+            <a:srgbClr val="7AA7D4"/>
           </a:solidFill>
           <a:ln>
             <a:noFill/>
@@ -6785,18 +6983,22 @@
                 <a:solidFill>
                   <a:srgbClr val="FFFFFF"/>
                 </a:solidFill>
-                <a:latin typeface="Meiryo"/>
+                <a:latin typeface="游ゴシック"/>
+                <a:ea typeface="游ゴシック"/>
+                <a:cs typeface="游ゴシック"/>
               </a:rPr>
               <a:t>特定のデータ/外部ツールを、独立した環境で完結させたい　</a:t>
             </a:r>
             <a:r>
               <a:rPr sz="1800" b="0">
                 <a:solidFill>
-                  <a:srgbClr val="D9DDE3"/>
-                </a:solidFill>
-                <a:latin typeface="Meiryo"/>
-              </a:rPr>
-              <a:t>→ Claude Cowork（本件のEDINET→ダッシュボードはこちら）</a:t>
+                  <a:srgbClr val="C7D0D9"/>
+                </a:solidFill>
+                <a:latin typeface="游ゴシック"/>
+                <a:ea typeface="游ゴシック"/>
+                <a:cs typeface="游ゴシック"/>
+              </a:rPr>
+              <a:t>→ Claude Cowork</a:t>
             </a:r>
           </a:p>
         </p:txBody>
@@ -6816,7 +7018,7 @@
             <a:avLst/>
           </a:prstGeom>
           <a:solidFill>
-            <a:srgbClr val="A97C37"/>
+            <a:srgbClr val="7AA7D4"/>
           </a:solidFill>
           <a:ln>
             <a:noFill/>
@@ -6880,16 +7082,20 @@
                 <a:solidFill>
                   <a:srgbClr val="FFFFFF"/>
                 </a:solidFill>
-                <a:latin typeface="Meiryo"/>
+                <a:latin typeface="游ゴシック"/>
+                <a:ea typeface="游ゴシック"/>
+                <a:cs typeface="游ゴシック"/>
               </a:rPr>
               <a:t>コーディングは真っ向勝負　</a:t>
             </a:r>
             <a:r>
               <a:rPr sz="1800" b="0">
                 <a:solidFill>
-                  <a:srgbClr val="D9DDE3"/>
-                </a:solidFill>
-                <a:latin typeface="Meiryo"/>
+                  <a:srgbClr val="C7D0D9"/>
+                </a:solidFill>
+                <a:latin typeface="游ゴシック"/>
+                <a:ea typeface="游ゴシック"/>
+                <a:cs typeface="游ゴシック"/>
               </a:rPr>
               <a:t>→ Claude Code / OpenAI Codex / Gemini CLI から選ぶ</a:t>
             </a:r>
@@ -6929,18 +7135,22 @@
             <a:r>
               <a:rPr sz="1400" b="1">
                 <a:solidFill>
-                  <a:srgbClr val="A97C37"/>
-                </a:solidFill>
-                <a:latin typeface="Meiryo"/>
+                  <a:srgbClr val="7AA7D4"/>
+                </a:solidFill>
+                <a:latin typeface="游ゴシック"/>
+                <a:ea typeface="游ゴシック"/>
+                <a:cs typeface="游ゴシック"/>
               </a:rPr>
               <a:t>注意：</a:t>
             </a:r>
             <a:r>
               <a:rPr sz="1400" b="0">
                 <a:solidFill>
-                  <a:srgbClr val="D9DDE3"/>
-                </a:solidFill>
-                <a:latin typeface="Meiryo"/>
+                  <a:srgbClr val="C7D0D9"/>
+                </a:solidFill>
+                <a:latin typeface="游ゴシック"/>
+                <a:ea typeface="游ゴシック"/>
+                <a:cs typeface="游ゴシック"/>
               </a:rPr>
               <a:t>“Cowork”は両社で使う名称／CopilotもClaude利用可／モデルの差より“どこに根ざすか”で選ぶ。</a:t>
             </a:r>
@@ -6980,9 +7190,11 @@
             <a:r>
               <a:rPr sz="1000" b="0">
                 <a:solidFill>
-                  <a:srgbClr val="6F7683"/>
-                </a:solidFill>
-                <a:latin typeface="Meiryo"/>
+                  <a:srgbClr val="5B6670"/>
+                </a:solidFill>
+                <a:latin typeface="游ゴシック"/>
+                <a:ea typeface="游ゴシック"/>
+                <a:cs typeface="游ゴシック"/>
               </a:rPr>
               <a:t>出典：各社公式ドキュメント（Anthropic / Microsoft Learn / OpenAI / Google）・2026-10時点</a:t>
             </a:r>

--- a/docs/03_参考資料/Copilot_Cowork_競合比較.pptx
+++ b/docs/03_参考資料/Copilot_Cowork_競合比較.pptx
@@ -3172,9 +3172,9 @@
                 <a:solidFill>
                   <a:srgbClr val="7AA7D4"/>
                 </a:solidFill>
-                <a:latin typeface="游ゴシック"/>
-                <a:ea typeface="游ゴシック"/>
-                <a:cs typeface="游ゴシック"/>
+                <a:latin typeface="Meiryo"/>
+                <a:ea typeface="Meiryo"/>
+                <a:cs typeface="Meiryo"/>
               </a:rPr>
               <a:t>AIエージェントの地図</a:t>
             </a:r>
@@ -3216,9 +3216,9 @@
                 <a:solidFill>
                   <a:srgbClr val="FFFFFF"/>
                 </a:solidFill>
-                <a:latin typeface="游ゴシック"/>
-                <a:ea typeface="游ゴシック"/>
-                <a:cs typeface="游ゴシック"/>
+                <a:latin typeface="Meiryo"/>
+                <a:ea typeface="Meiryo"/>
+                <a:cs typeface="Meiryo"/>
               </a:rPr>
               <a:t>Claude Code / Cowork と</a:t>
             </a:r>
@@ -3237,9 +3237,9 @@
                 <a:solidFill>
                   <a:srgbClr val="FFFFFF"/>
                 </a:solidFill>
-                <a:latin typeface="游ゴシック"/>
-                <a:ea typeface="游ゴシック"/>
-                <a:cs typeface="游ゴシック"/>
+                <a:latin typeface="Meiryo"/>
+                <a:ea typeface="Meiryo"/>
+                <a:cs typeface="Meiryo"/>
               </a:rPr>
               <a:t>周辺ツールの位置づけ</a:t>
             </a:r>
@@ -3281,9 +3281,9 @@
                 <a:solidFill>
                   <a:srgbClr val="C7D0D9"/>
                 </a:solidFill>
-                <a:latin typeface="游ゴシック"/>
-                <a:ea typeface="游ゴシック"/>
-                <a:cs typeface="游ゴシック"/>
+                <a:latin typeface="Meiryo"/>
+                <a:ea typeface="Meiryo"/>
+                <a:cs typeface="Meiryo"/>
               </a:rPr>
               <a:t>「純粋な競合（同じ土俵）」と「補完（別エコシステム）」を分けて理解する</a:t>
             </a:r>
@@ -3325,9 +3325,9 @@
                 <a:solidFill>
                   <a:srgbClr val="5B6670"/>
                 </a:solidFill>
-                <a:latin typeface="游ゴシック"/>
-                <a:ea typeface="游ゴシック"/>
-                <a:cs typeface="游ゴシック"/>
+                <a:latin typeface="Meiryo"/>
+                <a:ea typeface="Meiryo"/>
+                <a:cs typeface="Meiryo"/>
               </a:rPr>
               <a:t>出典：各社公式ドキュメント（Anthropic / Microsoft Learn / OpenAI / Google）・2026-10時点</a:t>
             </a:r>
@@ -3431,9 +3431,9 @@
                 <a:solidFill>
                   <a:srgbClr val="1E2832"/>
                 </a:solidFill>
-                <a:latin typeface="游ゴシック"/>
-                <a:ea typeface="游ゴシック"/>
-                <a:cs typeface="游ゴシック"/>
+                <a:latin typeface="Meiryo"/>
+                <a:ea typeface="Meiryo"/>
+                <a:cs typeface="Meiryo"/>
               </a:rPr>
               <a:t>純粋な競合：自律コーディングエージェント</a:t>
             </a:r>
@@ -3448,8 +3448,8 @@
         </p:nvSpPr>
         <p:spPr>
           <a:xfrm>
-            <a:off x="548640" y="1234440"/>
-            <a:ext cx="10972800" cy="457200"/>
+            <a:off x="548640" y="1216152"/>
+            <a:ext cx="10972800" cy="548640"/>
           </a:xfrm>
           <a:prstGeom prst="rect">
             <a:avLst/>
@@ -3471,15 +3471,15 @@
               </a:spcAft>
             </a:pPr>
             <a:r>
-              <a:rPr sz="1500" b="0">
+              <a:rPr sz="1400" b="0">
                 <a:solidFill>
                   <a:srgbClr val="5B6670"/>
                 </a:solidFill>
-                <a:latin typeface="游ゴシック"/>
-                <a:ea typeface="游ゴシック"/>
-                <a:cs typeface="游ゴシック"/>
-              </a:rPr>
-              <a:t>同じ土俵。ターミナル／CLIでリポジトリに対し自律的に作業する系。</a:t>
+                <a:latin typeface="Meiryo"/>
+                <a:ea typeface="Meiryo"/>
+                <a:cs typeface="Meiryo"/>
+              </a:rPr>
+              <a:t>ターミナル(CLI)からコードやファイルを自律的に操作して開発を進めるツールどうしで、用途が重なる直接の競合です。</a:t>
             </a:r>
           </a:p>
         </p:txBody>
@@ -3492,8 +3492,8 @@
         </p:nvSpPr>
         <p:spPr>
           <a:xfrm>
-            <a:off x="548640" y="1920240"/>
-            <a:ext cx="3511296" cy="3566160"/>
+            <a:off x="548640" y="1965960"/>
+            <a:ext cx="3511296" cy="3520440"/>
           </a:xfrm>
           <a:prstGeom prst="roundRect">
             <a:avLst>
@@ -3540,7 +3540,7 @@
         </p:nvSpPr>
         <p:spPr>
           <a:xfrm>
-            <a:off x="822959" y="2176272"/>
+            <a:off x="822959" y="2221991"/>
             <a:ext cx="2962656" cy="457200"/>
           </a:xfrm>
           <a:prstGeom prst="rect">
@@ -3567,9 +3567,9 @@
                 <a:solidFill>
                   <a:srgbClr val="2E5A88"/>
                 </a:solidFill>
-                <a:latin typeface="游ゴシック"/>
-                <a:ea typeface="游ゴシック"/>
-                <a:cs typeface="游ゴシック"/>
+                <a:latin typeface="Meiryo"/>
+                <a:ea typeface="Meiryo"/>
+                <a:cs typeface="Meiryo"/>
               </a:rPr>
               <a:t>Claude Code</a:t>
             </a:r>
@@ -3584,7 +3584,7 @@
         </p:nvSpPr>
         <p:spPr>
           <a:xfrm>
-            <a:off x="822959" y="2633472"/>
+            <a:off x="822959" y="2679191"/>
             <a:ext cx="2962656" cy="320040"/>
           </a:xfrm>
           <a:prstGeom prst="rect">
@@ -3611,9 +3611,9 @@
                 <a:solidFill>
                   <a:srgbClr val="5B6670"/>
                 </a:solidFill>
-                <a:latin typeface="游ゴシック"/>
-                <a:ea typeface="游ゴシック"/>
-                <a:cs typeface="游ゴシック"/>
+                <a:latin typeface="Meiryo"/>
+                <a:ea typeface="Meiryo"/>
+                <a:cs typeface="Meiryo"/>
               </a:rPr>
               <a:t>Anthropic</a:t>
             </a:r>
@@ -3628,8 +3628,8 @@
         </p:nvSpPr>
         <p:spPr>
           <a:xfrm>
-            <a:off x="822959" y="3108960"/>
-            <a:ext cx="2962656" cy="2194560"/>
+            <a:off x="822959" y="3154680"/>
+            <a:ext cx="2962656" cy="2148840"/>
           </a:xfrm>
           <a:prstGeom prst="rect">
             <a:avLst/>
@@ -3647,7 +3647,7 @@
                 <a:spcPts val="0"/>
               </a:spcBef>
               <a:spcAft>
-                <a:spcPts val="900"/>
+                <a:spcPts val="1000"/>
               </a:spcAft>
             </a:pPr>
             <a:r>
@@ -3655,9 +3655,9 @@
                 <a:solidFill>
                   <a:srgbClr val="1E2832"/>
                 </a:solidFill>
-                <a:latin typeface="游ゴシック"/>
-                <a:ea typeface="游ゴシック"/>
-                <a:cs typeface="游ゴシック"/>
+                <a:latin typeface="Meiryo"/>
+                <a:ea typeface="Meiryo"/>
+                <a:cs typeface="Meiryo"/>
               </a:rPr>
               <a:t>形態：</a:t>
             </a:r>
@@ -3666,11 +3666,11 @@
                 <a:solidFill>
                   <a:srgbClr val="1E2832"/>
                 </a:solidFill>
-                <a:latin typeface="游ゴシック"/>
-                <a:ea typeface="游ゴシック"/>
-                <a:cs typeface="游ゴシック"/>
-              </a:rPr>
-              <a:t>CLI＋デスクトップの自律エージェント</a:t>
+                <a:latin typeface="Meiryo"/>
+                <a:ea typeface="Meiryo"/>
+                <a:cs typeface="Meiryo"/>
+              </a:rPr>
+              <a:t>CLI＋デスクトップの自律型</a:t>
             </a:r>
           </a:p>
           <a:p>
@@ -3679,7 +3679,7 @@
                 <a:spcPts val="0"/>
               </a:spcBef>
               <a:spcAft>
-                <a:spcPts val="900"/>
+                <a:spcPts val="1000"/>
               </a:spcAft>
             </a:pPr>
             <a:r>
@@ -3687,9 +3687,9 @@
                 <a:solidFill>
                   <a:srgbClr val="1E2832"/>
                 </a:solidFill>
-                <a:latin typeface="游ゴシック"/>
-                <a:ea typeface="游ゴシック"/>
-                <a:cs typeface="游ゴシック"/>
+                <a:latin typeface="Meiryo"/>
+                <a:ea typeface="Meiryo"/>
+                <a:cs typeface="Meiryo"/>
               </a:rPr>
               <a:t>モデル：</a:t>
             </a:r>
@@ -3698,9 +3698,9 @@
                 <a:solidFill>
                   <a:srgbClr val="1E2832"/>
                 </a:solidFill>
-                <a:latin typeface="游ゴシック"/>
-                <a:ea typeface="游ゴシック"/>
-                <a:cs typeface="游ゴシック"/>
+                <a:latin typeface="Meiryo"/>
+                <a:ea typeface="Meiryo"/>
+                <a:cs typeface="Meiryo"/>
               </a:rPr>
               <a:t>Claude</a:t>
             </a:r>
@@ -3711,7 +3711,7 @@
                 <a:spcPts val="0"/>
               </a:spcBef>
               <a:spcAft>
-                <a:spcPts val="900"/>
+                <a:spcPts val="1000"/>
               </a:spcAft>
             </a:pPr>
             <a:r>
@@ -3719,9 +3719,9 @@
                 <a:solidFill>
                   <a:srgbClr val="1E2832"/>
                 </a:solidFill>
-                <a:latin typeface="游ゴシック"/>
-                <a:ea typeface="游ゴシック"/>
-                <a:cs typeface="游ゴシック"/>
+                <a:latin typeface="Meiryo"/>
+                <a:ea typeface="Meiryo"/>
+                <a:cs typeface="Meiryo"/>
               </a:rPr>
               <a:t>特徴：</a:t>
             </a:r>
@@ -3730,11 +3730,11 @@
                 <a:solidFill>
                   <a:srgbClr val="1E2832"/>
                 </a:solidFill>
-                <a:latin typeface="游ゴシック"/>
-                <a:ea typeface="游ゴシック"/>
-                <a:cs typeface="游ゴシック"/>
-              </a:rPr>
-              <a:t>スキル/MCPで拡張できる</a:t>
+                <a:latin typeface="Meiryo"/>
+                <a:ea typeface="Meiryo"/>
+                <a:cs typeface="Meiryo"/>
+              </a:rPr>
+              <a:t>スキルやMCPで拡張できる</a:t>
             </a:r>
           </a:p>
         </p:txBody>
@@ -3747,8 +3747,8 @@
         </p:nvSpPr>
         <p:spPr>
           <a:xfrm>
-            <a:off x="4334255" y="1920240"/>
-            <a:ext cx="3511296" cy="3566160"/>
+            <a:off x="4334255" y="1965960"/>
+            <a:ext cx="3511296" cy="3520440"/>
           </a:xfrm>
           <a:prstGeom prst="roundRect">
             <a:avLst>
@@ -3795,7 +3795,7 @@
         </p:nvSpPr>
         <p:spPr>
           <a:xfrm>
-            <a:off x="4608575" y="2176272"/>
+            <a:off x="4608575" y="2221991"/>
             <a:ext cx="2962656" cy="457200"/>
           </a:xfrm>
           <a:prstGeom prst="rect">
@@ -3822,9 +3822,9 @@
                 <a:solidFill>
                   <a:srgbClr val="2E5A88"/>
                 </a:solidFill>
-                <a:latin typeface="游ゴシック"/>
-                <a:ea typeface="游ゴシック"/>
-                <a:cs typeface="游ゴシック"/>
+                <a:latin typeface="Meiryo"/>
+                <a:ea typeface="Meiryo"/>
+                <a:cs typeface="Meiryo"/>
               </a:rPr>
               <a:t>OpenAI Codex</a:t>
             </a:r>
@@ -3839,7 +3839,7 @@
         </p:nvSpPr>
         <p:spPr>
           <a:xfrm>
-            <a:off x="4608575" y="2633472"/>
+            <a:off x="4608575" y="2679191"/>
             <a:ext cx="2962656" cy="320040"/>
           </a:xfrm>
           <a:prstGeom prst="rect">
@@ -3866,9 +3866,9 @@
                 <a:solidFill>
                   <a:srgbClr val="5B6670"/>
                 </a:solidFill>
-                <a:latin typeface="游ゴシック"/>
-                <a:ea typeface="游ゴシック"/>
-                <a:cs typeface="游ゴシック"/>
+                <a:latin typeface="Meiryo"/>
+                <a:ea typeface="Meiryo"/>
+                <a:cs typeface="Meiryo"/>
               </a:rPr>
               <a:t>OpenAI</a:t>
             </a:r>
@@ -3883,8 +3883,8 @@
         </p:nvSpPr>
         <p:spPr>
           <a:xfrm>
-            <a:off x="4608575" y="3108960"/>
-            <a:ext cx="2962656" cy="2194560"/>
+            <a:off x="4608575" y="3154680"/>
+            <a:ext cx="2962656" cy="2148840"/>
           </a:xfrm>
           <a:prstGeom prst="rect">
             <a:avLst/>
@@ -3902,7 +3902,7 @@
                 <a:spcPts val="0"/>
               </a:spcBef>
               <a:spcAft>
-                <a:spcPts val="900"/>
+                <a:spcPts val="1000"/>
               </a:spcAft>
             </a:pPr>
             <a:r>
@@ -3910,9 +3910,9 @@
                 <a:solidFill>
                   <a:srgbClr val="1E2832"/>
                 </a:solidFill>
-                <a:latin typeface="游ゴシック"/>
-                <a:ea typeface="游ゴシック"/>
-                <a:cs typeface="游ゴシック"/>
+                <a:latin typeface="Meiryo"/>
+                <a:ea typeface="Meiryo"/>
+                <a:cs typeface="Meiryo"/>
               </a:rPr>
               <a:t>形態：</a:t>
             </a:r>
@@ -3921,11 +3921,11 @@
                 <a:solidFill>
                   <a:srgbClr val="1E2832"/>
                 </a:solidFill>
-                <a:latin typeface="游ゴシック"/>
-                <a:ea typeface="游ゴシック"/>
-                <a:cs typeface="游ゴシック"/>
-              </a:rPr>
-              <a:t>Codex CLI(OSS)＋Cloud＋IDE拡張＋SDK</a:t>
+                <a:latin typeface="Meiryo"/>
+                <a:ea typeface="Meiryo"/>
+                <a:cs typeface="Meiryo"/>
+              </a:rPr>
+              <a:t>CLI(OSS)＋クラウド＋IDE拡張</a:t>
             </a:r>
           </a:p>
           <a:p>
@@ -3934,7 +3934,7 @@
                 <a:spcPts val="0"/>
               </a:spcBef>
               <a:spcAft>
-                <a:spcPts val="900"/>
+                <a:spcPts val="1000"/>
               </a:spcAft>
             </a:pPr>
             <a:r>
@@ -3942,9 +3942,9 @@
                 <a:solidFill>
                   <a:srgbClr val="1E2832"/>
                 </a:solidFill>
-                <a:latin typeface="游ゴシック"/>
-                <a:ea typeface="游ゴシック"/>
-                <a:cs typeface="游ゴシック"/>
+                <a:latin typeface="Meiryo"/>
+                <a:ea typeface="Meiryo"/>
+                <a:cs typeface="Meiryo"/>
               </a:rPr>
               <a:t>モデル：</a:t>
             </a:r>
@@ -3953,9 +3953,9 @@
                 <a:solidFill>
                   <a:srgbClr val="1E2832"/>
                 </a:solidFill>
-                <a:latin typeface="游ゴシック"/>
-                <a:ea typeface="游ゴシック"/>
-                <a:cs typeface="游ゴシック"/>
+                <a:latin typeface="Meiryo"/>
+                <a:ea typeface="Meiryo"/>
+                <a:cs typeface="Meiryo"/>
               </a:rPr>
               <a:t>GPT‑5‑codex 系</a:t>
             </a:r>
@@ -3966,7 +3966,7 @@
                 <a:spcPts val="0"/>
               </a:spcBef>
               <a:spcAft>
-                <a:spcPts val="900"/>
+                <a:spcPts val="1000"/>
               </a:spcAft>
             </a:pPr>
             <a:r>
@@ -3974,9 +3974,9 @@
                 <a:solidFill>
                   <a:srgbClr val="1E2832"/>
                 </a:solidFill>
-                <a:latin typeface="游ゴシック"/>
-                <a:ea typeface="游ゴシック"/>
-                <a:cs typeface="游ゴシック"/>
+                <a:latin typeface="Meiryo"/>
+                <a:ea typeface="Meiryo"/>
+                <a:cs typeface="Meiryo"/>
               </a:rPr>
               <a:t>特徴：</a:t>
             </a:r>
@@ -3985,11 +3985,11 @@
                 <a:solidFill>
                   <a:srgbClr val="1E2832"/>
                 </a:solidFill>
-                <a:latin typeface="游ゴシック"/>
-                <a:ea typeface="游ゴシック"/>
-                <a:cs typeface="游ゴシック"/>
-              </a:rPr>
-              <a:t>ローカルとクラウドsandboxを行き来</a:t>
+                <a:latin typeface="Meiryo"/>
+                <a:ea typeface="Meiryo"/>
+                <a:cs typeface="Meiryo"/>
+              </a:rPr>
+              <a:t>ローカルとクラウドを行き来</a:t>
             </a:r>
           </a:p>
         </p:txBody>
@@ -4002,8 +4002,8 @@
         </p:nvSpPr>
         <p:spPr>
           <a:xfrm>
-            <a:off x="8119871" y="1920240"/>
-            <a:ext cx="3511296" cy="3566160"/>
+            <a:off x="8119871" y="1965960"/>
+            <a:ext cx="3511296" cy="3520440"/>
           </a:xfrm>
           <a:prstGeom prst="roundRect">
             <a:avLst>
@@ -4050,7 +4050,7 @@
         </p:nvSpPr>
         <p:spPr>
           <a:xfrm>
-            <a:off x="8394192" y="2176272"/>
+            <a:off x="8394192" y="2221991"/>
             <a:ext cx="2962656" cy="457200"/>
           </a:xfrm>
           <a:prstGeom prst="rect">
@@ -4077,9 +4077,9 @@
                 <a:solidFill>
                   <a:srgbClr val="2E5A88"/>
                 </a:solidFill>
-                <a:latin typeface="游ゴシック"/>
-                <a:ea typeface="游ゴシック"/>
-                <a:cs typeface="游ゴシック"/>
+                <a:latin typeface="Meiryo"/>
+                <a:ea typeface="Meiryo"/>
+                <a:cs typeface="Meiryo"/>
               </a:rPr>
               <a:t>Gemini CLI</a:t>
             </a:r>
@@ -4094,7 +4094,7 @@
         </p:nvSpPr>
         <p:spPr>
           <a:xfrm>
-            <a:off x="8394192" y="2633472"/>
+            <a:off x="8394192" y="2679191"/>
             <a:ext cx="2962656" cy="320040"/>
           </a:xfrm>
           <a:prstGeom prst="rect">
@@ -4121,9 +4121,9 @@
                 <a:solidFill>
                   <a:srgbClr val="5B6670"/>
                 </a:solidFill>
-                <a:latin typeface="游ゴシック"/>
-                <a:ea typeface="游ゴシック"/>
-                <a:cs typeface="游ゴシック"/>
+                <a:latin typeface="Meiryo"/>
+                <a:ea typeface="Meiryo"/>
+                <a:cs typeface="Meiryo"/>
               </a:rPr>
               <a:t>Google</a:t>
             </a:r>
@@ -4138,8 +4138,8 @@
         </p:nvSpPr>
         <p:spPr>
           <a:xfrm>
-            <a:off x="8394192" y="3108960"/>
-            <a:ext cx="2962656" cy="2194560"/>
+            <a:off x="8394192" y="3154680"/>
+            <a:ext cx="2962656" cy="2148840"/>
           </a:xfrm>
           <a:prstGeom prst="rect">
             <a:avLst/>
@@ -4157,7 +4157,7 @@
                 <a:spcPts val="0"/>
               </a:spcBef>
               <a:spcAft>
-                <a:spcPts val="900"/>
+                <a:spcPts val="1000"/>
               </a:spcAft>
             </a:pPr>
             <a:r>
@@ -4165,9 +4165,9 @@
                 <a:solidFill>
                   <a:srgbClr val="1E2832"/>
                 </a:solidFill>
-                <a:latin typeface="游ゴシック"/>
-                <a:ea typeface="游ゴシック"/>
-                <a:cs typeface="游ゴシック"/>
+                <a:latin typeface="Meiryo"/>
+                <a:ea typeface="Meiryo"/>
+                <a:cs typeface="Meiryo"/>
               </a:rPr>
               <a:t>形態：</a:t>
             </a:r>
@@ -4176,11 +4176,11 @@
                 <a:solidFill>
                   <a:srgbClr val="1E2832"/>
                 </a:solidFill>
-                <a:latin typeface="游ゴシック"/>
-                <a:ea typeface="游ゴシック"/>
-                <a:cs typeface="游ゴシック"/>
-              </a:rPr>
-              <a:t>OSSターミナルエージェント（ReAct＋MCP）</a:t>
+                <a:latin typeface="Meiryo"/>
+                <a:ea typeface="Meiryo"/>
+                <a:cs typeface="Meiryo"/>
+              </a:rPr>
+              <a:t>OSSのターミナル型エージェント</a:t>
             </a:r>
           </a:p>
           <a:p>
@@ -4189,7 +4189,7 @@
                 <a:spcPts val="0"/>
               </a:spcBef>
               <a:spcAft>
-                <a:spcPts val="900"/>
+                <a:spcPts val="1000"/>
               </a:spcAft>
             </a:pPr>
             <a:r>
@@ -4197,9 +4197,9 @@
                 <a:solidFill>
                   <a:srgbClr val="1E2832"/>
                 </a:solidFill>
-                <a:latin typeface="游ゴシック"/>
-                <a:ea typeface="游ゴシック"/>
-                <a:cs typeface="游ゴシック"/>
+                <a:latin typeface="Meiryo"/>
+                <a:ea typeface="Meiryo"/>
+                <a:cs typeface="Meiryo"/>
               </a:rPr>
               <a:t>モデル：</a:t>
             </a:r>
@@ -4208,9 +4208,9 @@
                 <a:solidFill>
                   <a:srgbClr val="1E2832"/>
                 </a:solidFill>
-                <a:latin typeface="游ゴシック"/>
-                <a:ea typeface="游ゴシック"/>
-                <a:cs typeface="游ゴシック"/>
+                <a:latin typeface="Meiryo"/>
+                <a:ea typeface="Meiryo"/>
+                <a:cs typeface="Meiryo"/>
               </a:rPr>
               <a:t>Gemini</a:t>
             </a:r>
@@ -4221,7 +4221,7 @@
                 <a:spcPts val="0"/>
               </a:spcBef>
               <a:spcAft>
-                <a:spcPts val="900"/>
+                <a:spcPts val="1000"/>
               </a:spcAft>
             </a:pPr>
             <a:r>
@@ -4229,9 +4229,9 @@
                 <a:solidFill>
                   <a:srgbClr val="1E2832"/>
                 </a:solidFill>
-                <a:latin typeface="游ゴシック"/>
-                <a:ea typeface="游ゴシック"/>
-                <a:cs typeface="游ゴシック"/>
+                <a:latin typeface="Meiryo"/>
+                <a:ea typeface="Meiryo"/>
+                <a:cs typeface="Meiryo"/>
               </a:rPr>
               <a:t>特徴：</a:t>
             </a:r>
@@ -4240,11 +4240,11 @@
                 <a:solidFill>
                   <a:srgbClr val="1E2832"/>
                 </a:solidFill>
-                <a:latin typeface="游ゴシック"/>
-                <a:ea typeface="游ゴシック"/>
-                <a:cs typeface="游ゴシック"/>
-              </a:rPr>
-              <a:t>Antigravity CLI へ移行中（2026-06）</a:t>
+                <a:latin typeface="Meiryo"/>
+                <a:ea typeface="Meiryo"/>
+                <a:cs typeface="Meiryo"/>
+              </a:rPr>
+              <a:t>後継のAntigravity CLIへ移行中</a:t>
             </a:r>
           </a:p>
         </p:txBody>
@@ -4258,7 +4258,7 @@
         <p:spPr>
           <a:xfrm>
             <a:off x="548640" y="5715000"/>
-            <a:ext cx="10972800" cy="822960"/>
+            <a:ext cx="10972800" cy="640080"/>
           </a:xfrm>
           <a:prstGeom prst="rect">
             <a:avLst/>
@@ -4284,9 +4284,9 @@
                 <a:solidFill>
                   <a:srgbClr val="2E5A88"/>
                 </a:solidFill>
-                <a:latin typeface="游ゴシック"/>
-                <a:ea typeface="游ゴシック"/>
-                <a:cs typeface="游ゴシック"/>
+                <a:latin typeface="Meiryo"/>
+                <a:ea typeface="Meiryo"/>
+                <a:cs typeface="Meiryo"/>
               </a:rPr>
               <a:t>選ぶ基準：</a:t>
             </a:r>
@@ -4295,11 +4295,11 @@
                 <a:solidFill>
                   <a:srgbClr val="1E2832"/>
                 </a:solidFill>
-                <a:latin typeface="游ゴシック"/>
-                <a:ea typeface="游ゴシック"/>
-                <a:cs typeface="游ゴシック"/>
-              </a:rPr>
-              <a:t>モデル品質・既存エコシステム・社内方針。ここは真っ向勝負で、1つを選ぶ領域。</a:t>
+                <a:latin typeface="Meiryo"/>
+                <a:ea typeface="Meiryo"/>
+                <a:cs typeface="Meiryo"/>
+              </a:rPr>
+              <a:t>モデル品質・既存エコシステム・社内方針で決めます。用途が重なるため、基本はどれか1つを選びます。</a:t>
             </a:r>
           </a:p>
         </p:txBody>
@@ -4312,7 +4312,7 @@
         </p:nvSpPr>
         <p:spPr>
           <a:xfrm>
-            <a:off x="548640" y="6355080"/>
+            <a:off x="548640" y="6382512"/>
             <a:ext cx="10972800" cy="320040"/>
           </a:xfrm>
           <a:prstGeom prst="rect">
@@ -4339,9 +4339,9 @@
                 <a:solidFill>
                   <a:srgbClr val="5B6670"/>
                 </a:solidFill>
-                <a:latin typeface="游ゴシック"/>
-                <a:ea typeface="游ゴシック"/>
-                <a:cs typeface="游ゴシック"/>
+                <a:latin typeface="Meiryo"/>
+                <a:ea typeface="Meiryo"/>
+                <a:cs typeface="Meiryo"/>
               </a:rPr>
               <a:t>出典：各社公式ドキュメント（Anthropic / Microsoft Learn / OpenAI / Google）・2026-10時点</a:t>
             </a:r>
@@ -4445,9 +4445,9 @@
                 <a:solidFill>
                   <a:srgbClr val="1E2832"/>
                 </a:solidFill>
-                <a:latin typeface="游ゴシック"/>
-                <a:ea typeface="游ゴシック"/>
-                <a:cs typeface="游ゴシック"/>
+                <a:latin typeface="Meiryo"/>
+                <a:ea typeface="Meiryo"/>
+                <a:cs typeface="Meiryo"/>
               </a:rPr>
               <a:t>補完：組織AI vs 独立エージェント</a:t>
             </a:r>
@@ -4462,8 +4462,8 @@
         </p:nvSpPr>
         <p:spPr>
           <a:xfrm>
-            <a:off x="548640" y="1234440"/>
-            <a:ext cx="10972800" cy="457200"/>
+            <a:off x="548640" y="1216152"/>
+            <a:ext cx="10972800" cy="548640"/>
           </a:xfrm>
           <a:prstGeom prst="rect">
             <a:avLst/>
@@ -4485,15 +4485,15 @@
               </a:spcAft>
             </a:pPr>
             <a:r>
-              <a:rPr sz="1500" b="0">
+              <a:rPr sz="1400" b="0">
                 <a:solidFill>
                   <a:srgbClr val="5B6670"/>
                 </a:solidFill>
-                <a:latin typeface="游ゴシック"/>
-                <a:ea typeface="游ゴシック"/>
-                <a:cs typeface="游ゴシック"/>
-              </a:rPr>
-              <a:t>競合というより住み分け。何に根ざし、どう統治されるかで分かれる。</a:t>
+                <a:latin typeface="Meiryo"/>
+                <a:ea typeface="Meiryo"/>
+                <a:cs typeface="Meiryo"/>
+              </a:rPr>
+              <a:t>両者は競合というより役割が異なります。どのデータに基づき、どんな統治の下で動くかで使い分けます。</a:t>
             </a:r>
           </a:p>
         </p:txBody>
@@ -4507,8 +4507,8 @@
           <p:nvPr/>
         </p:nvGraphicFramePr>
         <p:xfrm>
-          <a:off x="548640" y="1874519"/>
-          <a:ext cx="11091672" cy="3291840"/>
+          <a:off x="548640" y="1920240"/>
+          <a:ext cx="11091672" cy="3246120"/>
         </p:xfrm>
         <a:graphic>
           <a:graphicData uri="http://schemas.openxmlformats.org/drawingml/2006/table">
@@ -4521,7 +4521,7 @@
                 <a:gridCol w="4663440"/>
                 <a:gridCol w="4416552"/>
               </a:tblGrid>
-              <a:tr h="548640">
+              <a:tr h="541020">
                 <a:tc>
                   <a:txBody>
                     <a:bodyPr wrap="square"/>
@@ -4532,9 +4532,9 @@
                           <a:solidFill>
                             <a:srgbClr val="FFFFFF"/>
                           </a:solidFill>
-                          <a:latin typeface="游ゴシック"/>
-                          <a:ea typeface="游ゴシック"/>
-                          <a:cs typeface="游ゴシック"/>
+                          <a:latin typeface="Meiryo"/>
+                          <a:ea typeface="Meiryo"/>
+                          <a:cs typeface="Meiryo"/>
                         </a:rPr>
                         <a:t>観点</a:t>
                       </a:r>
@@ -4556,9 +4556,9 @@
                           <a:solidFill>
                             <a:srgbClr val="FFFFFF"/>
                           </a:solidFill>
-                          <a:latin typeface="游ゴシック"/>
-                          <a:ea typeface="游ゴシック"/>
-                          <a:cs typeface="游ゴシック"/>
+                          <a:latin typeface="Meiryo"/>
+                          <a:ea typeface="Meiryo"/>
+                          <a:cs typeface="Meiryo"/>
                         </a:rPr>
                         <a:t>Microsoft 365 Copilot（自社Cowork/Code含む）</a:t>
                       </a:r>
@@ -4580,9 +4580,9 @@
                           <a:solidFill>
                             <a:srgbClr val="FFFFFF"/>
                           </a:solidFill>
-                          <a:latin typeface="游ゴシック"/>
-                          <a:ea typeface="游ゴシック"/>
-                          <a:cs typeface="游ゴシック"/>
+                          <a:latin typeface="Meiryo"/>
+                          <a:ea typeface="Meiryo"/>
+                          <a:cs typeface="Meiryo"/>
                         </a:rPr>
                         <a:t>Claude Cowork</a:t>
                       </a:r>
@@ -4595,7 +4595,7 @@
                   </a:tcPr>
                 </a:tc>
               </a:tr>
-              <a:tr h="548640">
+              <a:tr h="541020">
                 <a:tc>
                   <a:txBody>
                     <a:bodyPr wrap="square"/>
@@ -4606,9 +4606,9 @@
                           <a:solidFill>
                             <a:srgbClr val="1E2832"/>
                           </a:solidFill>
-                          <a:latin typeface="游ゴシック"/>
-                          <a:ea typeface="游ゴシック"/>
-                          <a:cs typeface="游ゴシック"/>
+                          <a:latin typeface="Meiryo"/>
+                          <a:ea typeface="Meiryo"/>
+                          <a:cs typeface="Meiryo"/>
                         </a:rPr>
                         <a:t>立ち位置</a:t>
                       </a:r>
@@ -4630,9 +4630,9 @@
                           <a:solidFill>
                             <a:srgbClr val="1E2832"/>
                           </a:solidFill>
-                          <a:latin typeface="游ゴシック"/>
-                          <a:ea typeface="游ゴシック"/>
-                          <a:cs typeface="游ゴシック"/>
+                          <a:latin typeface="Meiryo"/>
+                          <a:ea typeface="Meiryo"/>
+                          <a:cs typeface="Meiryo"/>
                         </a:rPr>
                         <a:t>Microsoftエコシステムに内蔵</a:t>
                       </a:r>
@@ -4654,9 +4654,9 @@
                           <a:solidFill>
                             <a:srgbClr val="1E2832"/>
                           </a:solidFill>
-                          <a:latin typeface="游ゴシック"/>
-                          <a:ea typeface="游ゴシック"/>
-                          <a:cs typeface="游ゴシック"/>
+                          <a:latin typeface="Meiryo"/>
+                          <a:ea typeface="Meiryo"/>
+                          <a:cs typeface="Meiryo"/>
                         </a:rPr>
                         <a:t>独立した作業エージェント</a:t>
                       </a:r>
@@ -4669,7 +4669,7 @@
                   </a:tcPr>
                 </a:tc>
               </a:tr>
-              <a:tr h="548640">
+              <a:tr h="541020">
                 <a:tc>
                   <a:txBody>
                     <a:bodyPr wrap="square"/>
@@ -4680,9 +4680,9 @@
                           <a:solidFill>
                             <a:srgbClr val="1E2832"/>
                           </a:solidFill>
-                          <a:latin typeface="游ゴシック"/>
-                          <a:ea typeface="游ゴシック"/>
-                          <a:cs typeface="游ゴシック"/>
+                          <a:latin typeface="Meiryo"/>
+                          <a:ea typeface="Meiryo"/>
+                          <a:cs typeface="Meiryo"/>
                         </a:rPr>
                         <a:t>根ざすデータ</a:t>
                       </a:r>
@@ -4704,11 +4704,11 @@
                           <a:solidFill>
                             <a:srgbClr val="1E2832"/>
                           </a:solidFill>
-                          <a:latin typeface="游ゴシック"/>
-                          <a:ea typeface="游ゴシック"/>
-                          <a:cs typeface="游ゴシック"/>
+                          <a:latin typeface="Meiryo"/>
+                          <a:ea typeface="Meiryo"/>
+                          <a:cs typeface="Meiryo"/>
                         </a:rPr>
-                        <a:t>自社テナント（Microsoft Graph / Work IQ）を権限内で自動参照</a:t>
+                        <a:t>自社テナント(Graph / Work IQ)を権限内で自動参照</a:t>
                       </a:r>
                     </a:p>
                   </a:txBody>
@@ -4728,11 +4728,11 @@
                           <a:solidFill>
                             <a:srgbClr val="1E2832"/>
                           </a:solidFill>
-                          <a:latin typeface="游ゴシック"/>
-                          <a:ea typeface="游ゴシック"/>
-                          <a:cs typeface="游ゴシック"/>
+                          <a:latin typeface="Meiryo"/>
+                          <a:ea typeface="Meiryo"/>
+                          <a:cs typeface="Meiryo"/>
                         </a:rPr>
-                        <a:t>渡したフォルダ＋Web＋外部ツール(MCP)。テナント連携しない</a:t>
+                        <a:t>渡したフォルダ＋Web＋外部ツール(MCP)が対象</a:t>
                       </a:r>
                     </a:p>
                   </a:txBody>
@@ -4743,7 +4743,7 @@
                   </a:tcPr>
                 </a:tc>
               </a:tr>
-              <a:tr h="548640">
+              <a:tr h="541020">
                 <a:tc>
                   <a:txBody>
                     <a:bodyPr wrap="square"/>
@@ -4754,9 +4754,9 @@
                           <a:solidFill>
                             <a:srgbClr val="1E2832"/>
                           </a:solidFill>
-                          <a:latin typeface="游ゴシック"/>
-                          <a:ea typeface="游ゴシック"/>
-                          <a:cs typeface="游ゴシック"/>
+                          <a:latin typeface="Meiryo"/>
+                          <a:ea typeface="Meiryo"/>
+                          <a:cs typeface="Meiryo"/>
                         </a:rPr>
                         <a:t>自律エージェント</a:t>
                       </a:r>
@@ -4778,11 +4778,11 @@
                           <a:solidFill>
                             <a:srgbClr val="1E2832"/>
                           </a:solidFill>
-                          <a:latin typeface="游ゴシック"/>
-                          <a:ea typeface="游ゴシック"/>
-                          <a:cs typeface="游ゴシック"/>
+                          <a:latin typeface="Meiryo"/>
+                          <a:ea typeface="Meiryo"/>
+                          <a:cs typeface="Meiryo"/>
                         </a:rPr>
-                        <a:t>あり（Copilot Studio／Copilot Cowork・Code）</a:t>
+                        <a:t>あり（Copilot Studio/Copilot Cowork・Code）</a:t>
                       </a:r>
                     </a:p>
                   </a:txBody>
@@ -4802,11 +4802,11 @@
                           <a:solidFill>
                             <a:srgbClr val="1E2832"/>
                           </a:solidFill>
-                          <a:latin typeface="游ゴシック"/>
-                          <a:ea typeface="游ゴシック"/>
-                          <a:cs typeface="游ゴシック"/>
+                          <a:latin typeface="Meiryo"/>
+                          <a:ea typeface="Meiryo"/>
+                          <a:cs typeface="Meiryo"/>
                         </a:rPr>
-                        <a:t>あり（Claude Codeと同一アーキテクチャ・ターミナル不要）</a:t>
+                        <a:t>あり（Claude Codeと同じ基盤。ターミナル不要）</a:t>
                       </a:r>
                     </a:p>
                   </a:txBody>
@@ -4817,7 +4817,7 @@
                   </a:tcPr>
                 </a:tc>
               </a:tr>
-              <a:tr h="548640">
+              <a:tr h="541020">
                 <a:tc>
                   <a:txBody>
                     <a:bodyPr wrap="square"/>
@@ -4828,9 +4828,9 @@
                           <a:solidFill>
                             <a:srgbClr val="1E2832"/>
                           </a:solidFill>
-                          <a:latin typeface="游ゴシック"/>
-                          <a:ea typeface="游ゴシック"/>
-                          <a:cs typeface="游ゴシック"/>
+                          <a:latin typeface="Meiryo"/>
+                          <a:ea typeface="Meiryo"/>
+                          <a:cs typeface="Meiryo"/>
                         </a:rPr>
                         <a:t>使うモデル</a:t>
                       </a:r>
@@ -4852,9 +4852,9 @@
                           <a:solidFill>
                             <a:srgbClr val="1E2832"/>
                           </a:solidFill>
-                          <a:latin typeface="游ゴシック"/>
-                          <a:ea typeface="游ゴシック"/>
-                          <a:cs typeface="游ゴシック"/>
+                          <a:latin typeface="Meiryo"/>
+                          <a:ea typeface="Meiryo"/>
+                          <a:cs typeface="Meiryo"/>
                         </a:rPr>
                         <a:t>自動ルーター（Anthropic含む複数）</a:t>
                       </a:r>
@@ -4876,9 +4876,9 @@
                           <a:solidFill>
                             <a:srgbClr val="1E2832"/>
                           </a:solidFill>
-                          <a:latin typeface="游ゴシック"/>
-                          <a:ea typeface="游ゴシック"/>
-                          <a:cs typeface="游ゴシック"/>
+                          <a:latin typeface="Meiryo"/>
+                          <a:ea typeface="Meiryo"/>
+                          <a:cs typeface="Meiryo"/>
                         </a:rPr>
                         <a:t>Claude</a:t>
                       </a:r>
@@ -4891,7 +4891,7 @@
                   </a:tcPr>
                 </a:tc>
               </a:tr>
-              <a:tr h="548640">
+              <a:tr h="541020">
                 <a:tc>
                   <a:txBody>
                     <a:bodyPr wrap="square"/>
@@ -4902,11 +4902,11 @@
                           <a:solidFill>
                             <a:srgbClr val="1E2832"/>
                           </a:solidFill>
-                          <a:latin typeface="游ゴシック"/>
-                          <a:ea typeface="游ゴシック"/>
-                          <a:cs typeface="游ゴシック"/>
+                          <a:latin typeface="Meiryo"/>
+                          <a:ea typeface="Meiryo"/>
+                          <a:cs typeface="Meiryo"/>
                         </a:rPr>
-                        <a:t>統治／境界</a:t>
+                        <a:t>統治/境界</a:t>
                       </a:r>
                     </a:p>
                   </a:txBody>
@@ -4926,9 +4926,9 @@
                           <a:solidFill>
                             <a:srgbClr val="1E2832"/>
                           </a:solidFill>
-                          <a:latin typeface="游ゴシック"/>
-                          <a:ea typeface="游ゴシック"/>
-                          <a:cs typeface="游ゴシック"/>
+                          <a:latin typeface="Meiryo"/>
+                          <a:ea typeface="Meiryo"/>
+                          <a:cs typeface="Meiryo"/>
                         </a:rPr>
                         <a:t>M365コンプライアンス（EDP / Purview / EUDB）</a:t>
                       </a:r>
@@ -4950,11 +4950,11 @@
                           <a:solidFill>
                             <a:srgbClr val="1E2832"/>
                           </a:solidFill>
-                          <a:latin typeface="游ゴシック"/>
-                          <a:ea typeface="游ゴシック"/>
-                          <a:cs typeface="游ゴシック"/>
+                          <a:latin typeface="Meiryo"/>
+                          <a:ea typeface="Meiryo"/>
+                          <a:cs typeface="Meiryo"/>
                         </a:rPr>
-                        <a:t>権限確認・フォルダ単位のアクセス制限（Bedrock等のクラウドでも導入可）</a:t>
+                        <a:t>権限確認・フォルダ単位の制限（Bedrock等で導入可）</a:t>
                       </a:r>
                     </a:p>
                   </a:txBody>
@@ -5004,9 +5004,9 @@
                 <a:solidFill>
                   <a:srgbClr val="2E5A88"/>
                 </a:solidFill>
-                <a:latin typeface="游ゴシック"/>
-                <a:ea typeface="游ゴシック"/>
-                <a:cs typeface="游ゴシック"/>
+                <a:latin typeface="Meiryo"/>
+                <a:ea typeface="Meiryo"/>
+                <a:cs typeface="Meiryo"/>
               </a:rPr>
               <a:t>注意：</a:t>
             </a:r>
@@ -5015,11 +5015,11 @@
                 <a:solidFill>
                   <a:srgbClr val="1E2832"/>
                 </a:solidFill>
-                <a:latin typeface="游ゴシック"/>
-                <a:ea typeface="游ゴシック"/>
-                <a:cs typeface="游ゴシック"/>
-              </a:rPr>
-              <a:t>「Cowork」は両社が使う名称（必ず社名を冠す）。Copilotも内部でClaudeを利用可＝モデルは差別化軸にならない。</a:t>
+                <a:latin typeface="Meiryo"/>
+                <a:ea typeface="Meiryo"/>
+                <a:cs typeface="Meiryo"/>
+              </a:rPr>
+              <a:t>「Cowork」は両社が使う名称なので社名を冠して区別します。Copilotも内部でClaudeを利用できるため、モデルの違いは選択の決め手になりません。</a:t>
             </a:r>
           </a:p>
         </p:txBody>
@@ -5032,7 +5032,7 @@
         </p:nvSpPr>
         <p:spPr>
           <a:xfrm>
-            <a:off x="548640" y="6355080"/>
+            <a:off x="548640" y="6382512"/>
             <a:ext cx="10972800" cy="320040"/>
           </a:xfrm>
           <a:prstGeom prst="rect">
@@ -5059,9 +5059,9 @@
                 <a:solidFill>
                   <a:srgbClr val="5B6670"/>
                 </a:solidFill>
-                <a:latin typeface="游ゴシック"/>
-                <a:ea typeface="游ゴシック"/>
-                <a:cs typeface="游ゴシック"/>
+                <a:latin typeface="Meiryo"/>
+                <a:ea typeface="Meiryo"/>
+                <a:cs typeface="Meiryo"/>
               </a:rPr>
               <a:t>出典：各社公式ドキュメント（Anthropic / Microsoft Learn / OpenAI / Google）・2026-10時点</a:t>
             </a:r>
@@ -5165,9 +5165,9 @@
                 <a:solidFill>
                   <a:srgbClr val="1E2832"/>
                 </a:solidFill>
-                <a:latin typeface="游ゴシック"/>
-                <a:ea typeface="游ゴシック"/>
-                <a:cs typeface="游ゴシック"/>
+                <a:latin typeface="Meiryo"/>
+                <a:ea typeface="Meiryo"/>
+                <a:cs typeface="Meiryo"/>
               </a:rPr>
               <a:t>Copilotを使っている人が Claude Cowork を足す理由</a:t>
             </a:r>
@@ -5183,7 +5183,7 @@
         <p:spPr>
           <a:xfrm>
             <a:off x="548640" y="1188720"/>
-            <a:ext cx="10972800" cy="457200"/>
+            <a:ext cx="10972800" cy="548640"/>
           </a:xfrm>
           <a:prstGeom prst="rect">
             <a:avLst/>
@@ -5205,15 +5205,15 @@
               </a:spcAft>
             </a:pPr>
             <a:r>
-              <a:rPr sz="1500" b="0">
+              <a:rPr sz="1400" b="0">
                 <a:solidFill>
                   <a:srgbClr val="5B6670"/>
                 </a:solidFill>
-                <a:latin typeface="游ゴシック"/>
-                <a:ea typeface="游ゴシック"/>
-                <a:cs typeface="游ゴシック"/>
-              </a:rPr>
-              <a:t>置き換えではなく、Copilotが届きにくい“外側”を埋める（補完）。</a:t>
+                <a:latin typeface="Meiryo"/>
+                <a:ea typeface="Meiryo"/>
+                <a:cs typeface="Meiryo"/>
+              </a:rPr>
+              <a:t>置き換えではなく役割分担です。CopilotだけではカバーしにくいデータやタスクをClaude Coworkが担います。</a:t>
             </a:r>
           </a:p>
         </p:txBody>
@@ -5297,9 +5297,9 @@
                 <a:solidFill>
                   <a:srgbClr val="2E5A88"/>
                 </a:solidFill>
-                <a:latin typeface="游ゴシック"/>
-                <a:ea typeface="游ゴシック"/>
-                <a:cs typeface="游ゴシック"/>
+                <a:latin typeface="Meiryo"/>
+                <a:ea typeface="Meiryo"/>
+                <a:cs typeface="Meiryo"/>
               </a:rPr>
               <a:t>社外・非Officeのデータも扱える</a:t>
             </a:r>
@@ -5315,7 +5315,7 @@
         <p:spPr>
           <a:xfrm>
             <a:off x="1005840" y="2286000"/>
-            <a:ext cx="10332720" cy="457200"/>
+            <a:ext cx="10424160" cy="457200"/>
           </a:xfrm>
           <a:prstGeom prst="rect">
             <a:avLst/>
@@ -5341,11 +5341,11 @@
                 <a:solidFill>
                   <a:srgbClr val="1E2832"/>
                 </a:solidFill>
-                <a:latin typeface="游ゴシック"/>
-                <a:ea typeface="游ゴシック"/>
-                <a:cs typeface="游ゴシック"/>
-              </a:rPr>
-              <a:t>M365テナント外のデータや形式（社外の公開データ・他システムのCSV等）を直接処理できる。</a:t>
+                <a:latin typeface="Meiryo"/>
+                <a:ea typeface="Meiryo"/>
+                <a:cs typeface="Meiryo"/>
+              </a:rPr>
+              <a:t>M365テナントの外にあるデータや形式（社外の公開データ・他システムのCSVなど）も直接処理できます。</a:t>
             </a:r>
           </a:p>
         </p:txBody>
@@ -5429,9 +5429,9 @@
                 <a:solidFill>
                   <a:srgbClr val="2E5A88"/>
                 </a:solidFill>
-                <a:latin typeface="游ゴシック"/>
-                <a:ea typeface="游ゴシック"/>
-                <a:cs typeface="游ゴシック"/>
+                <a:latin typeface="Meiryo"/>
+                <a:ea typeface="Meiryo"/>
+                <a:cs typeface="Meiryo"/>
               </a:rPr>
               <a:t>成果物の自由度が高い</a:t>
             </a:r>
@@ -5447,7 +5447,7 @@
         <p:spPr>
           <a:xfrm>
             <a:off x="1005840" y="3200400"/>
-            <a:ext cx="10332720" cy="457200"/>
+            <a:ext cx="10424160" cy="457200"/>
           </a:xfrm>
           <a:prstGeom prst="rect">
             <a:avLst/>
@@ -5473,11 +5473,11 @@
                 <a:solidFill>
                   <a:srgbClr val="1E2832"/>
                 </a:solidFill>
-                <a:latin typeface="游ゴシック"/>
-                <a:ea typeface="游ゴシック"/>
-                <a:cs typeface="游ゴシック"/>
-              </a:rPr>
-              <a:t>Office文書に限らず、独自ツールやHTMLダッシュボード等を生成できる。</a:t>
+                <a:latin typeface="Meiryo"/>
+                <a:ea typeface="Meiryo"/>
+                <a:cs typeface="Meiryo"/>
+              </a:rPr>
+              <a:t>Office文書に限らず、独自のツールやHTMLダッシュボードなどを生成できます。</a:t>
             </a:r>
           </a:p>
         </p:txBody>
@@ -5561,9 +5561,9 @@
                 <a:solidFill>
                   <a:srgbClr val="2E5A88"/>
                 </a:solidFill>
-                <a:latin typeface="游ゴシック"/>
-                <a:ea typeface="游ゴシック"/>
-                <a:cs typeface="游ゴシック"/>
+                <a:latin typeface="Meiryo"/>
+                <a:ea typeface="Meiryo"/>
+                <a:cs typeface="Meiryo"/>
               </a:rPr>
               <a:t>タスクを丸ごと自律実行</a:t>
             </a:r>
@@ -5579,7 +5579,7 @@
         <p:spPr>
           <a:xfrm>
             <a:off x="1005840" y="4114800"/>
-            <a:ext cx="10332720" cy="457200"/>
+            <a:ext cx="10424160" cy="457200"/>
           </a:xfrm>
           <a:prstGeom prst="rect">
             <a:avLst/>
@@ -5605,11 +5605,11 @@
                 <a:solidFill>
                   <a:srgbClr val="1E2832"/>
                 </a:solidFill>
-                <a:latin typeface="游ゴシック"/>
-                <a:ea typeface="游ゴシック"/>
-                <a:cs typeface="游ゴシック"/>
-              </a:rPr>
-              <a:t>複数ステップを計画→実行。外部ツール(MCP)やコード実行まで任せられる。</a:t>
+                <a:latin typeface="Meiryo"/>
+                <a:ea typeface="Meiryo"/>
+                <a:cs typeface="Meiryo"/>
+              </a:rPr>
+              <a:t>複数ステップを計画して実行し、外部ツール(MCP)やコード実行まで任せられます。</a:t>
             </a:r>
           </a:p>
         </p:txBody>
@@ -5693,9 +5693,9 @@
                 <a:solidFill>
                   <a:srgbClr val="2E5A88"/>
                 </a:solidFill>
-                <a:latin typeface="游ゴシック"/>
-                <a:ea typeface="游ゴシック"/>
-                <a:cs typeface="游ゴシック"/>
+                <a:latin typeface="Meiryo"/>
+                <a:ea typeface="Meiryo"/>
+                <a:cs typeface="Meiryo"/>
               </a:rPr>
               <a:t>範囲を絞って導入できる</a:t>
             </a:r>
@@ -5711,7 +5711,7 @@
         <p:spPr>
           <a:xfrm>
             <a:off x="1005840" y="5029200"/>
-            <a:ext cx="10332720" cy="457200"/>
+            <a:ext cx="10424160" cy="457200"/>
           </a:xfrm>
           <a:prstGeom prst="rect">
             <a:avLst/>
@@ -5737,11 +5737,11 @@
                 <a:solidFill>
                   <a:srgbClr val="1E2832"/>
                 </a:solidFill>
-                <a:latin typeface="游ゴシック"/>
-                <a:ea typeface="游ゴシック"/>
-                <a:cs typeface="游ゴシック"/>
-              </a:rPr>
-              <a:t>フォルダ制限・権限確認で、使える範囲を限定して統治できる（Bedrock等のクラウドにも対応）。</a:t>
+                <a:latin typeface="Meiryo"/>
+                <a:ea typeface="Meiryo"/>
+                <a:cs typeface="Meiryo"/>
+              </a:rPr>
+              <a:t>フォルダ制限や権限確認で、使える範囲を限定して導入できます（Bedrock等のクラウドにも対応）。</a:t>
             </a:r>
           </a:p>
         </p:txBody>
@@ -5754,8 +5754,8 @@
         </p:nvSpPr>
         <p:spPr>
           <a:xfrm>
-            <a:off x="548640" y="5715000"/>
-            <a:ext cx="10972800" cy="548640"/>
+            <a:off x="548640" y="5669280"/>
+            <a:ext cx="10972800" cy="640080"/>
           </a:xfrm>
           <a:prstGeom prst="rect">
             <a:avLst/>
@@ -5781,22 +5781,22 @@
                 <a:solidFill>
                   <a:srgbClr val="2E5A88"/>
                 </a:solidFill>
-                <a:latin typeface="游ゴシック"/>
-                <a:ea typeface="游ゴシック"/>
-                <a:cs typeface="游ゴシック"/>
-              </a:rPr>
-              <a:t>要は：</a:t>
+                <a:latin typeface="Meiryo"/>
+                <a:ea typeface="Meiryo"/>
+                <a:cs typeface="Meiryo"/>
+              </a:rPr>
+              <a:t>ポイント：</a:t>
             </a:r>
             <a:r>
               <a:rPr sz="1500" b="0">
                 <a:solidFill>
                   <a:srgbClr val="1E2832"/>
                 </a:solidFill>
-                <a:latin typeface="游ゴシック"/>
-                <a:ea typeface="游ゴシック"/>
-                <a:cs typeface="游ゴシック"/>
-              </a:rPr>
-              <a:t>Copilotは“Officeの中×自社データ”が強い。Coworkはその外側を埋める＝競合ではなく補完。</a:t>
+                <a:latin typeface="Meiryo"/>
+                <a:ea typeface="Meiryo"/>
+                <a:cs typeface="Meiryo"/>
+              </a:rPr>
+              <a:t>CopilotはOfficeの中と自社データに強く、Coworkはその範囲外のデータやタスクを担当します（補完の関係）。</a:t>
             </a:r>
           </a:p>
         </p:txBody>
@@ -5809,7 +5809,7 @@
         </p:nvSpPr>
         <p:spPr>
           <a:xfrm>
-            <a:off x="548640" y="6355080"/>
+            <a:off x="548640" y="6382512"/>
             <a:ext cx="10972800" cy="320040"/>
           </a:xfrm>
           <a:prstGeom prst="rect">
@@ -5836,9 +5836,9 @@
                 <a:solidFill>
                   <a:srgbClr val="5B6670"/>
                 </a:solidFill>
-                <a:latin typeface="游ゴシック"/>
-                <a:ea typeface="游ゴシック"/>
-                <a:cs typeface="游ゴシック"/>
+                <a:latin typeface="Meiryo"/>
+                <a:ea typeface="Meiryo"/>
+                <a:cs typeface="Meiryo"/>
               </a:rPr>
               <a:t>出典：各社公式ドキュメント（Anthropic / Microsoft Learn / OpenAI / Google）・2026-10時点</a:t>
             </a:r>
@@ -5942,9 +5942,9 @@
                 <a:solidFill>
                   <a:srgbClr val="1E2832"/>
                 </a:solidFill>
-                <a:latin typeface="游ゴシック"/>
-                <a:ea typeface="游ゴシック"/>
-                <a:cs typeface="游ゴシック"/>
+                <a:latin typeface="Meiryo"/>
+                <a:ea typeface="Meiryo"/>
+                <a:cs typeface="Meiryo"/>
               </a:rPr>
               <a:t>Claude Cowork と Claude Code：同じ頭脳、入り口が違う</a:t>
             </a:r>
@@ -5960,7 +5960,7 @@
         <p:spPr>
           <a:xfrm>
             <a:off x="548640" y="1188720"/>
-            <a:ext cx="10972800" cy="457200"/>
+            <a:ext cx="10972800" cy="548640"/>
           </a:xfrm>
           <a:prstGeom prst="rect">
             <a:avLst/>
@@ -5982,15 +5982,15 @@
               </a:spcAft>
             </a:pPr>
             <a:r>
-              <a:rPr sz="1500" b="0">
+              <a:rPr sz="1400" b="0">
                 <a:solidFill>
                   <a:srgbClr val="5B6670"/>
                 </a:solidFill>
-                <a:latin typeface="游ゴシック"/>
-                <a:ea typeface="游ゴシック"/>
-                <a:cs typeface="游ゴシック"/>
-              </a:rPr>
-              <a:t>どちらもClaudeの“同一の自律エージェント基盤”。対象と使う人で選ぶ。</a:t>
+                <a:latin typeface="Meiryo"/>
+                <a:ea typeface="Meiryo"/>
+                <a:cs typeface="Meiryo"/>
+              </a:rPr>
+              <a:t>どちらも同じClaudeのエージェント基盤を使っています。違いは「誰が・何に使うか」で、目的に応じて選びます。</a:t>
             </a:r>
           </a:p>
         </p:txBody>
@@ -6003,8 +6003,8 @@
         </p:nvSpPr>
         <p:spPr>
           <a:xfrm>
-            <a:off x="548640" y="1828800"/>
-            <a:ext cx="5394960" cy="3200400"/>
+            <a:off x="548640" y="1874519"/>
+            <a:ext cx="5394960" cy="3154680"/>
           </a:xfrm>
           <a:prstGeom prst="roundRect">
             <a:avLst>
@@ -6051,7 +6051,7 @@
         </p:nvSpPr>
         <p:spPr>
           <a:xfrm>
-            <a:off x="868680" y="2103120"/>
+            <a:off x="868680" y="2148839"/>
             <a:ext cx="4754880" cy="457200"/>
           </a:xfrm>
           <a:prstGeom prst="rect">
@@ -6078,9 +6078,9 @@
                 <a:solidFill>
                   <a:srgbClr val="2E5A88"/>
                 </a:solidFill>
-                <a:latin typeface="游ゴシック"/>
-                <a:ea typeface="游ゴシック"/>
-                <a:cs typeface="游ゴシック"/>
+                <a:latin typeface="Meiryo"/>
+                <a:ea typeface="Meiryo"/>
+                <a:cs typeface="Meiryo"/>
               </a:rPr>
               <a:t>Claude Cowork</a:t>
             </a:r>
@@ -6095,7 +6095,7 @@
         </p:nvSpPr>
         <p:spPr>
           <a:xfrm>
-            <a:off x="868680" y="2578608"/>
+            <a:off x="868680" y="2624327"/>
             <a:ext cx="4754880" cy="365760"/>
           </a:xfrm>
           <a:prstGeom prst="rect">
@@ -6122,9 +6122,9 @@
                 <a:solidFill>
                   <a:srgbClr val="5B6670"/>
                 </a:solidFill>
-                <a:latin typeface="游ゴシック"/>
-                <a:ea typeface="游ゴシック"/>
-                <a:cs typeface="游ゴシック"/>
+                <a:latin typeface="Meiryo"/>
+                <a:ea typeface="Meiryo"/>
+                <a:cs typeface="Meiryo"/>
               </a:rPr>
               <a:t>ターミナル不要の業務エージェント</a:t>
             </a:r>
@@ -6139,8 +6139,8 @@
         </p:nvSpPr>
         <p:spPr>
           <a:xfrm>
-            <a:off x="868680" y="3017520"/>
-            <a:ext cx="4754880" cy="1920240"/>
+            <a:off x="868680" y="3063239"/>
+            <a:ext cx="4754880" cy="1874520"/>
           </a:xfrm>
           <a:prstGeom prst="rect">
             <a:avLst/>
@@ -6166,9 +6166,9 @@
                 <a:solidFill>
                   <a:srgbClr val="2E5A88"/>
                 </a:solidFill>
-                <a:latin typeface="游ゴシック"/>
-                <a:ea typeface="游ゴシック"/>
-                <a:cs typeface="游ゴシック"/>
+                <a:latin typeface="Meiryo"/>
+                <a:ea typeface="Meiryo"/>
+                <a:cs typeface="Meiryo"/>
               </a:rPr>
               <a:t>•  </a:t>
             </a:r>
@@ -6177,11 +6177,11 @@
                 <a:solidFill>
                   <a:srgbClr val="1E2832"/>
                 </a:solidFill>
-                <a:latin typeface="游ゴシック"/>
-                <a:ea typeface="游ゴシック"/>
-                <a:cs typeface="游ゴシック"/>
-              </a:rPr>
-              <a:t>コーディング不要。主に業務ユーザー向け</a:t>
+                <a:latin typeface="Meiryo"/>
+                <a:ea typeface="Meiryo"/>
+                <a:cs typeface="Meiryo"/>
+              </a:rPr>
+              <a:t>コーディング不要で、主に業務ユーザー向け</a:t>
             </a:r>
           </a:p>
           <a:p>
@@ -6198,9 +6198,9 @@
                 <a:solidFill>
                   <a:srgbClr val="2E5A88"/>
                 </a:solidFill>
-                <a:latin typeface="游ゴシック"/>
-                <a:ea typeface="游ゴシック"/>
-                <a:cs typeface="游ゴシック"/>
+                <a:latin typeface="Meiryo"/>
+                <a:ea typeface="Meiryo"/>
+                <a:cs typeface="Meiryo"/>
               </a:rPr>
               <a:t>•  </a:t>
             </a:r>
@@ -6209,9 +6209,9 @@
                 <a:solidFill>
                   <a:srgbClr val="1E2832"/>
                 </a:solidFill>
-                <a:latin typeface="游ゴシック"/>
-                <a:ea typeface="游ゴシック"/>
-                <a:cs typeface="游ゴシック"/>
+                <a:latin typeface="Meiryo"/>
+                <a:ea typeface="Meiryo"/>
+                <a:cs typeface="Meiryo"/>
               </a:rPr>
               <a:t>文書・スライド・表・レポートを作成</a:t>
             </a:r>
@@ -6230,9 +6230,9 @@
                 <a:solidFill>
                   <a:srgbClr val="2E5A88"/>
                 </a:solidFill>
-                <a:latin typeface="游ゴシック"/>
-                <a:ea typeface="游ゴシック"/>
-                <a:cs typeface="游ゴシック"/>
+                <a:latin typeface="Meiryo"/>
+                <a:ea typeface="Meiryo"/>
+                <a:cs typeface="Meiryo"/>
               </a:rPr>
               <a:t>•  </a:t>
             </a:r>
@@ -6241,9 +6241,9 @@
                 <a:solidFill>
                   <a:srgbClr val="1E2832"/>
                 </a:solidFill>
-                <a:latin typeface="游ゴシック"/>
-                <a:ea typeface="游ゴシック"/>
-                <a:cs typeface="游ゴシック"/>
+                <a:latin typeface="Meiryo"/>
+                <a:ea typeface="Meiryo"/>
+                <a:cs typeface="Meiryo"/>
               </a:rPr>
               <a:t>選んだフォルダのファイル＋Web＋MCP</a:t>
             </a:r>
@@ -6262,9 +6262,9 @@
                 <a:solidFill>
                   <a:srgbClr val="2E5A88"/>
                 </a:solidFill>
-                <a:latin typeface="游ゴシック"/>
-                <a:ea typeface="游ゴシック"/>
-                <a:cs typeface="游ゴシック"/>
+                <a:latin typeface="Meiryo"/>
+                <a:ea typeface="Meiryo"/>
+                <a:cs typeface="Meiryo"/>
               </a:rPr>
               <a:t>•  </a:t>
             </a:r>
@@ -6273,9 +6273,9 @@
                 <a:solidFill>
                   <a:srgbClr val="1E2832"/>
                 </a:solidFill>
-                <a:latin typeface="游ゴシック"/>
-                <a:ea typeface="游ゴシック"/>
-                <a:cs typeface="游ゴシック"/>
+                <a:latin typeface="Meiryo"/>
+                <a:ea typeface="Meiryo"/>
+                <a:cs typeface="Meiryo"/>
               </a:rPr>
               <a:t>調査・資料づくり・データ整理を任せる</a:t>
             </a:r>
@@ -6290,8 +6290,8 @@
         </p:nvSpPr>
         <p:spPr>
           <a:xfrm>
-            <a:off x="6245352" y="1828800"/>
-            <a:ext cx="5394960" cy="3200400"/>
+            <a:off x="6245352" y="1874519"/>
+            <a:ext cx="5394960" cy="3154680"/>
           </a:xfrm>
           <a:prstGeom prst="roundRect">
             <a:avLst>
@@ -6338,7 +6338,7 @@
         </p:nvSpPr>
         <p:spPr>
           <a:xfrm>
-            <a:off x="6565392" y="2103120"/>
+            <a:off x="6565392" y="2148839"/>
             <a:ext cx="4754880" cy="457200"/>
           </a:xfrm>
           <a:prstGeom prst="rect">
@@ -6365,9 +6365,9 @@
                 <a:solidFill>
                   <a:srgbClr val="2E5A88"/>
                 </a:solidFill>
-                <a:latin typeface="游ゴシック"/>
-                <a:ea typeface="游ゴシック"/>
-                <a:cs typeface="游ゴシック"/>
+                <a:latin typeface="Meiryo"/>
+                <a:ea typeface="Meiryo"/>
+                <a:cs typeface="Meiryo"/>
               </a:rPr>
               <a:t>Claude Code</a:t>
             </a:r>
@@ -6382,7 +6382,7 @@
         </p:nvSpPr>
         <p:spPr>
           <a:xfrm>
-            <a:off x="6565392" y="2578608"/>
+            <a:off x="6565392" y="2624327"/>
             <a:ext cx="4754880" cy="365760"/>
           </a:xfrm>
           <a:prstGeom prst="rect">
@@ -6409,9 +6409,9 @@
                 <a:solidFill>
                   <a:srgbClr val="5B6670"/>
                 </a:solidFill>
-                <a:latin typeface="游ゴシック"/>
-                <a:ea typeface="游ゴシック"/>
-                <a:cs typeface="游ゴシック"/>
+                <a:latin typeface="Meiryo"/>
+                <a:ea typeface="Meiryo"/>
+                <a:cs typeface="Meiryo"/>
               </a:rPr>
               <a:t>開発者グレードの作業エージェント</a:t>
             </a:r>
@@ -6426,8 +6426,8 @@
         </p:nvSpPr>
         <p:spPr>
           <a:xfrm>
-            <a:off x="6565392" y="3017520"/>
-            <a:ext cx="4754880" cy="1920240"/>
+            <a:off x="6565392" y="3063239"/>
+            <a:ext cx="4754880" cy="1874520"/>
           </a:xfrm>
           <a:prstGeom prst="rect">
             <a:avLst/>
@@ -6453,9 +6453,9 @@
                 <a:solidFill>
                   <a:srgbClr val="2E5A88"/>
                 </a:solidFill>
-                <a:latin typeface="游ゴシック"/>
-                <a:ea typeface="游ゴシック"/>
-                <a:cs typeface="游ゴシック"/>
+                <a:latin typeface="Meiryo"/>
+                <a:ea typeface="Meiryo"/>
+                <a:cs typeface="Meiryo"/>
               </a:rPr>
               <a:t>•  </a:t>
             </a:r>
@@ -6464,11 +6464,11 @@
                 <a:solidFill>
                   <a:srgbClr val="1E2832"/>
                 </a:solidFill>
-                <a:latin typeface="游ゴシック"/>
-                <a:ea typeface="游ゴシック"/>
-                <a:cs typeface="游ゴシック"/>
-              </a:rPr>
-              <a:t>ターミナル/CLI・プロジェクト単位</a:t>
+                <a:latin typeface="Meiryo"/>
+                <a:ea typeface="Meiryo"/>
+                <a:cs typeface="Meiryo"/>
+              </a:rPr>
+              <a:t>ターミナル(CLI)・プロジェクト単位</a:t>
             </a:r>
           </a:p>
           <a:p>
@@ -6485,9 +6485,9 @@
                 <a:solidFill>
                   <a:srgbClr val="2E5A88"/>
                 </a:solidFill>
-                <a:latin typeface="游ゴシック"/>
-                <a:ea typeface="游ゴシック"/>
-                <a:cs typeface="游ゴシック"/>
+                <a:latin typeface="Meiryo"/>
+                <a:ea typeface="Meiryo"/>
+                <a:cs typeface="Meiryo"/>
               </a:rPr>
               <a:t>•  </a:t>
             </a:r>
@@ -6496,9 +6496,9 @@
                 <a:solidFill>
                   <a:srgbClr val="1E2832"/>
                 </a:solidFill>
-                <a:latin typeface="游ゴシック"/>
-                <a:ea typeface="游ゴシック"/>
-                <a:cs typeface="游ゴシック"/>
+                <a:latin typeface="Meiryo"/>
+                <a:ea typeface="Meiryo"/>
+                <a:cs typeface="Meiryo"/>
               </a:rPr>
               <a:t>コード・リポジトリ・ファイルを操作</a:t>
             </a:r>
@@ -6517,9 +6517,9 @@
                 <a:solidFill>
                   <a:srgbClr val="2E5A88"/>
                 </a:solidFill>
-                <a:latin typeface="游ゴシック"/>
-                <a:ea typeface="游ゴシック"/>
-                <a:cs typeface="游ゴシック"/>
+                <a:latin typeface="Meiryo"/>
+                <a:ea typeface="Meiryo"/>
+                <a:cs typeface="Meiryo"/>
               </a:rPr>
               <a:t>•  </a:t>
             </a:r>
@@ -6528,11 +6528,11 @@
                 <a:solidFill>
                   <a:srgbClr val="1E2832"/>
                 </a:solidFill>
-                <a:latin typeface="游ゴシック"/>
-                <a:ea typeface="游ゴシック"/>
-                <a:cs typeface="游ゴシック"/>
-              </a:rPr>
-              <a:t>スクリプト/パイプライン等で作り込み・自動化</a:t>
+                <a:latin typeface="Meiryo"/>
+                <a:ea typeface="Meiryo"/>
+                <a:cs typeface="Meiryo"/>
+              </a:rPr>
+              <a:t>スクリプトやパイプラインで作り込み・自動化</a:t>
             </a:r>
           </a:p>
           <a:p>
@@ -6549,9 +6549,9 @@
                 <a:solidFill>
                   <a:srgbClr val="2E5A88"/>
                 </a:solidFill>
-                <a:latin typeface="游ゴシック"/>
-                <a:ea typeface="游ゴシック"/>
-                <a:cs typeface="游ゴシック"/>
+                <a:latin typeface="Meiryo"/>
+                <a:ea typeface="Meiryo"/>
+                <a:cs typeface="Meiryo"/>
               </a:rPr>
               <a:t>•  </a:t>
             </a:r>
@@ -6560,9 +6560,9 @@
                 <a:solidFill>
                   <a:srgbClr val="1E2832"/>
                 </a:solidFill>
-                <a:latin typeface="游ゴシック"/>
-                <a:ea typeface="游ゴシック"/>
-                <a:cs typeface="游ゴシック"/>
+                <a:latin typeface="Meiryo"/>
+                <a:ea typeface="Meiryo"/>
+                <a:cs typeface="Meiryo"/>
               </a:rPr>
               <a:t>データ処理やツールの作り込みはこちら</a:t>
             </a:r>
@@ -6604,9 +6604,9 @@
                 <a:solidFill>
                   <a:srgbClr val="2E5A88"/>
                 </a:solidFill>
-                <a:latin typeface="游ゴシック"/>
-                <a:ea typeface="游ゴシック"/>
-                <a:cs typeface="游ゴシック"/>
+                <a:latin typeface="Meiryo"/>
+                <a:ea typeface="Meiryo"/>
+                <a:cs typeface="Meiryo"/>
               </a:rPr>
               <a:t>使い分け：</a:t>
             </a:r>
@@ -6625,11 +6625,11 @@
                 <a:solidFill>
                   <a:srgbClr val="1E2832"/>
                 </a:solidFill>
-                <a:latin typeface="游ゴシック"/>
-                <a:ea typeface="游ゴシック"/>
-                <a:cs typeface="游ゴシック"/>
-              </a:rPr>
-              <a:t>・コーディング不要で、日常業務のタスク（調査・資料・データ整理）を任せたい → Claude Cowork</a:t>
+                <a:latin typeface="Meiryo"/>
+                <a:ea typeface="Meiryo"/>
+                <a:cs typeface="Meiryo"/>
+              </a:rPr>
+              <a:t>・コーディングは不要で、日常業務のタスク（調査・資料・データ整理）を任せたいとき → Claude Cowork</a:t>
             </a:r>
           </a:p>
           <a:p>
@@ -6646,11 +6646,11 @@
                 <a:solidFill>
                   <a:srgbClr val="1E2832"/>
                 </a:solidFill>
-                <a:latin typeface="游ゴシック"/>
-                <a:ea typeface="游ゴシック"/>
-                <a:cs typeface="游ゴシック"/>
-              </a:rPr>
-              <a:t>・コードやCLIで作り込み・自動化・リポジトリ操作をしたい → Claude Code</a:t>
+                <a:latin typeface="Meiryo"/>
+                <a:ea typeface="Meiryo"/>
+                <a:cs typeface="Meiryo"/>
+              </a:rPr>
+              <a:t>・コードやCLIで作り込み・自動化・リポジトリ操作をしたいとき → Claude Code</a:t>
             </a:r>
           </a:p>
         </p:txBody>
@@ -6663,7 +6663,7 @@
         </p:nvSpPr>
         <p:spPr>
           <a:xfrm>
-            <a:off x="548640" y="6355080"/>
+            <a:off x="548640" y="6382512"/>
             <a:ext cx="10972800" cy="320040"/>
           </a:xfrm>
           <a:prstGeom prst="rect">
@@ -6690,9 +6690,9 @@
                 <a:solidFill>
                   <a:srgbClr val="5B6670"/>
                 </a:solidFill>
-                <a:latin typeface="游ゴシック"/>
-                <a:ea typeface="游ゴシック"/>
-                <a:cs typeface="游ゴシック"/>
+                <a:latin typeface="Meiryo"/>
+                <a:ea typeface="Meiryo"/>
+                <a:cs typeface="Meiryo"/>
               </a:rPr>
               <a:t>出典：各社公式ドキュメント（Anthropic / Microsoft Learn / OpenAI / Google）・2026-10時点</a:t>
             </a:r>
@@ -6796,9 +6796,9 @@
                 <a:solidFill>
                   <a:srgbClr val="FFFFFF"/>
                 </a:solidFill>
-                <a:latin typeface="游ゴシック"/>
-                <a:ea typeface="游ゴシック"/>
-                <a:cs typeface="游ゴシック"/>
+                <a:latin typeface="Meiryo"/>
+                <a:ea typeface="Meiryo"/>
+                <a:cs typeface="Meiryo"/>
               </a:rPr>
               <a:t>住み分けの一言</a:t>
             </a:r>
@@ -6858,7 +6858,7 @@
         <p:spPr>
           <a:xfrm>
             <a:off x="1188720" y="1828800"/>
-            <a:ext cx="10058400" cy="822960"/>
+            <a:ext cx="10241280" cy="822960"/>
           </a:xfrm>
           <a:prstGeom prst="rect">
             <a:avLst/>
@@ -6876,28 +6876,38 @@
                 <a:spcPts val="0"/>
               </a:spcBef>
               <a:spcAft>
-                <a:spcPts val="400"/>
+                <a:spcPts val="300"/>
               </a:spcAft>
             </a:pPr>
             <a:r>
-              <a:rPr sz="1900" b="1">
+              <a:rPr sz="1800" b="1">
                 <a:solidFill>
                   <a:srgbClr val="FFFFFF"/>
                 </a:solidFill>
-                <a:latin typeface="游ゴシック"/>
-                <a:ea typeface="游ゴシック"/>
-                <a:cs typeface="游ゴシック"/>
-              </a:rPr>
-              <a:t>既存のMicrosoft世界に根ざし、社内データを自動活用したい　</a:t>
-            </a:r>
-            <a:r>
-              <a:rPr sz="1800" b="0">
+                <a:latin typeface="Meiryo"/>
+                <a:ea typeface="Meiryo"/>
+                <a:cs typeface="Meiryo"/>
+              </a:rPr>
+              <a:t>既存のMicrosoft世界に根ざし、社内データを自動で活用したいとき</a:t>
+            </a:r>
+          </a:p>
+          <a:p>
+            <a:pPr algn="l">
+              <a:spcBef>
+                <a:spcPts val="0"/>
+              </a:spcBef>
+              <a:spcAft>
+                <a:spcPts val="300"/>
+              </a:spcAft>
+            </a:pPr>
+            <a:r>
+              <a:rPr sz="1700" b="0">
                 <a:solidFill>
                   <a:srgbClr val="C7D0D9"/>
                 </a:solidFill>
-                <a:latin typeface="游ゴシック"/>
-                <a:ea typeface="游ゴシック"/>
-                <a:cs typeface="游ゴシック"/>
+                <a:latin typeface="Meiryo"/>
+                <a:ea typeface="Meiryo"/>
+                <a:cs typeface="Meiryo"/>
               </a:rPr>
               <a:t>→ M365 Copilot</a:t>
             </a:r>
@@ -6912,7 +6922,7 @@
         </p:nvSpPr>
         <p:spPr>
           <a:xfrm>
-            <a:off x="822960" y="2962656"/>
+            <a:off x="822960" y="3008376"/>
             <a:ext cx="146304" cy="146304"/>
           </a:xfrm>
           <a:prstGeom prst="rect">
@@ -6956,8 +6966,8 @@
         </p:nvSpPr>
         <p:spPr>
           <a:xfrm>
-            <a:off x="1188720" y="2880360"/>
-            <a:ext cx="10058400" cy="822960"/>
+            <a:off x="1188720" y="2926080"/>
+            <a:ext cx="10241280" cy="822960"/>
           </a:xfrm>
           <a:prstGeom prst="rect">
             <a:avLst/>
@@ -6975,28 +6985,38 @@
                 <a:spcPts val="0"/>
               </a:spcBef>
               <a:spcAft>
-                <a:spcPts val="400"/>
+                <a:spcPts val="300"/>
               </a:spcAft>
             </a:pPr>
             <a:r>
-              <a:rPr sz="1900" b="1">
+              <a:rPr sz="1800" b="1">
                 <a:solidFill>
                   <a:srgbClr val="FFFFFF"/>
                 </a:solidFill>
-                <a:latin typeface="游ゴシック"/>
-                <a:ea typeface="游ゴシック"/>
-                <a:cs typeface="游ゴシック"/>
-              </a:rPr>
-              <a:t>特定のデータ/外部ツールを、独立した環境で完結させたい　</a:t>
-            </a:r>
-            <a:r>
-              <a:rPr sz="1800" b="0">
+                <a:latin typeface="Meiryo"/>
+                <a:ea typeface="Meiryo"/>
+                <a:cs typeface="Meiryo"/>
+              </a:rPr>
+              <a:t>特定のデータや外部ツールを、独立した環境で完結させたいとき</a:t>
+            </a:r>
+          </a:p>
+          <a:p>
+            <a:pPr algn="l">
+              <a:spcBef>
+                <a:spcPts val="0"/>
+              </a:spcBef>
+              <a:spcAft>
+                <a:spcPts val="300"/>
+              </a:spcAft>
+            </a:pPr>
+            <a:r>
+              <a:rPr sz="1700" b="0">
                 <a:solidFill>
                   <a:srgbClr val="C7D0D9"/>
                 </a:solidFill>
-                <a:latin typeface="游ゴシック"/>
-                <a:ea typeface="游ゴシック"/>
-                <a:cs typeface="游ゴシック"/>
+                <a:latin typeface="Meiryo"/>
+                <a:ea typeface="Meiryo"/>
+                <a:cs typeface="Meiryo"/>
               </a:rPr>
               <a:t>→ Claude Cowork</a:t>
             </a:r>
@@ -7011,7 +7031,7 @@
         </p:nvSpPr>
         <p:spPr>
           <a:xfrm>
-            <a:off x="822960" y="4014215"/>
+            <a:off x="822960" y="4105656"/>
             <a:ext cx="146304" cy="146304"/>
           </a:xfrm>
           <a:prstGeom prst="rect">
@@ -7055,8 +7075,73 @@
         </p:nvSpPr>
         <p:spPr>
           <a:xfrm>
-            <a:off x="1188720" y="3931920"/>
-            <a:ext cx="10058400" cy="822960"/>
+            <a:off x="1188720" y="4023360"/>
+            <a:ext cx="10241280" cy="822960"/>
+          </a:xfrm>
+          <a:prstGeom prst="rect">
+            <a:avLst/>
+          </a:prstGeom>
+          <a:noFill/>
+        </p:spPr>
+        <p:txBody>
+          <a:bodyPr wrap="square" anchor="t" lIns="0" rIns="0" tIns="0" bIns="0">
+            <a:spAutoFit/>
+          </a:bodyPr>
+          <a:lstStyle/>
+          <a:p>
+            <a:pPr algn="l">
+              <a:spcBef>
+                <a:spcPts val="0"/>
+              </a:spcBef>
+              <a:spcAft>
+                <a:spcPts val="300"/>
+              </a:spcAft>
+            </a:pPr>
+            <a:r>
+              <a:rPr sz="1800" b="1">
+                <a:solidFill>
+                  <a:srgbClr val="FFFFFF"/>
+                </a:solidFill>
+                <a:latin typeface="Meiryo"/>
+                <a:ea typeface="Meiryo"/>
+                <a:cs typeface="Meiryo"/>
+              </a:rPr>
+              <a:t>コードを書く・自動化するなど開発そのものを任せたいとき</a:t>
+            </a:r>
+          </a:p>
+          <a:p>
+            <a:pPr algn="l">
+              <a:spcBef>
+                <a:spcPts val="0"/>
+              </a:spcBef>
+              <a:spcAft>
+                <a:spcPts val="300"/>
+              </a:spcAft>
+            </a:pPr>
+            <a:r>
+              <a:rPr sz="1700" b="0">
+                <a:solidFill>
+                  <a:srgbClr val="C7D0D9"/>
+                </a:solidFill>
+                <a:latin typeface="Meiryo"/>
+                <a:ea typeface="Meiryo"/>
+                <a:cs typeface="Meiryo"/>
+              </a:rPr>
+              <a:t>→ Claude Code / OpenAI Codex / Gemini CLI</a:t>
+            </a:r>
+          </a:p>
+        </p:txBody>
+      </p:sp>
+      <p:sp>
+        <p:nvSpPr>
+          <p:cNvPr id="10" name="TextBox 9"/>
+          <p:cNvSpPr txBox="1"/>
+          <p:nvPr/>
+        </p:nvSpPr>
+        <p:spPr>
+          <a:xfrm>
+            <a:off x="822960" y="5394960"/>
+            <a:ext cx="10515600" cy="822960"/>
           </a:xfrm>
           <a:prstGeom prst="rect">
             <a:avLst/>
@@ -7078,40 +7163,40 @@
               </a:spcAft>
             </a:pPr>
             <a:r>
-              <a:rPr sz="1900" b="1">
-                <a:solidFill>
-                  <a:srgbClr val="FFFFFF"/>
-                </a:solidFill>
-                <a:latin typeface="游ゴシック"/>
-                <a:ea typeface="游ゴシック"/>
-                <a:cs typeface="游ゴシック"/>
-              </a:rPr>
-              <a:t>コーディングは真っ向勝負　</a:t>
-            </a:r>
-            <a:r>
-              <a:rPr sz="1800" b="0">
+              <a:rPr sz="1400" b="1">
+                <a:solidFill>
+                  <a:srgbClr val="7AA7D4"/>
+                </a:solidFill>
+                <a:latin typeface="Meiryo"/>
+                <a:ea typeface="Meiryo"/>
+                <a:cs typeface="Meiryo"/>
+              </a:rPr>
+              <a:t>注意：</a:t>
+            </a:r>
+            <a:r>
+              <a:rPr sz="1400" b="0">
                 <a:solidFill>
                   <a:srgbClr val="C7D0D9"/>
                 </a:solidFill>
-                <a:latin typeface="游ゴシック"/>
-                <a:ea typeface="游ゴシック"/>
-                <a:cs typeface="游ゴシック"/>
-              </a:rPr>
-              <a:t>→ Claude Code / OpenAI Codex / Gemini CLI から選ぶ</a:t>
-            </a:r>
-          </a:p>
-        </p:txBody>
-      </p:sp>
-      <p:sp>
-        <p:nvSpPr>
-          <p:cNvPr id="10" name="TextBox 9"/>
+                <a:latin typeface="Meiryo"/>
+                <a:ea typeface="Meiryo"/>
+                <a:cs typeface="Meiryo"/>
+              </a:rPr>
+              <a:t>「Cowork」は両社が使う名称です。CopilotもClaudeを利用でき、モデルの違いより「どこに根ざすか」で選びます。</a:t>
+            </a:r>
+          </a:p>
+        </p:txBody>
+      </p:sp>
+      <p:sp>
+        <p:nvSpPr>
+          <p:cNvPr id="11" name="TextBox 10"/>
           <p:cNvSpPr txBox="1"/>
           <p:nvPr/>
         </p:nvSpPr>
         <p:spPr>
           <a:xfrm>
-            <a:off x="822960" y="5257800"/>
-            <a:ext cx="10515600" cy="822960"/>
+            <a:off x="822960" y="6355080"/>
+            <a:ext cx="10515600" cy="365760"/>
           </a:xfrm>
           <a:prstGeom prst="rect">
             <a:avLst/>
@@ -7133,68 +7218,13 @@
               </a:spcAft>
             </a:pPr>
             <a:r>
-              <a:rPr sz="1400" b="1">
-                <a:solidFill>
-                  <a:srgbClr val="7AA7D4"/>
-                </a:solidFill>
-                <a:latin typeface="游ゴシック"/>
-                <a:ea typeface="游ゴシック"/>
-                <a:cs typeface="游ゴシック"/>
-              </a:rPr>
-              <a:t>注意：</a:t>
-            </a:r>
-            <a:r>
-              <a:rPr sz="1400" b="0">
-                <a:solidFill>
-                  <a:srgbClr val="C7D0D9"/>
-                </a:solidFill>
-                <a:latin typeface="游ゴシック"/>
-                <a:ea typeface="游ゴシック"/>
-                <a:cs typeface="游ゴシック"/>
-              </a:rPr>
-              <a:t>“Cowork”は両社で使う名称／CopilotもClaude利用可／モデルの差より“どこに根ざすか”で選ぶ。</a:t>
-            </a:r>
-          </a:p>
-        </p:txBody>
-      </p:sp>
-      <p:sp>
-        <p:nvSpPr>
-          <p:cNvPr id="11" name="TextBox 10"/>
-          <p:cNvSpPr txBox="1"/>
-          <p:nvPr/>
-        </p:nvSpPr>
-        <p:spPr>
-          <a:xfrm>
-            <a:off x="822960" y="6309360"/>
-            <a:ext cx="10515600" cy="365760"/>
-          </a:xfrm>
-          <a:prstGeom prst="rect">
-            <a:avLst/>
-          </a:prstGeom>
-          <a:noFill/>
-        </p:spPr>
-        <p:txBody>
-          <a:bodyPr wrap="square" anchor="t" lIns="0" rIns="0" tIns="0" bIns="0">
-            <a:spAutoFit/>
-          </a:bodyPr>
-          <a:lstStyle/>
-          <a:p>
-            <a:pPr algn="l">
-              <a:spcBef>
-                <a:spcPts val="0"/>
-              </a:spcBef>
-              <a:spcAft>
-                <a:spcPts val="400"/>
-              </a:spcAft>
-            </a:pPr>
-            <a:r>
               <a:rPr sz="1000" b="0">
                 <a:solidFill>
                   <a:srgbClr val="5B6670"/>
                 </a:solidFill>
-                <a:latin typeface="游ゴシック"/>
-                <a:ea typeface="游ゴシック"/>
-                <a:cs typeface="游ゴシック"/>
+                <a:latin typeface="Meiryo"/>
+                <a:ea typeface="Meiryo"/>
+                <a:cs typeface="Meiryo"/>
               </a:rPr>
               <a:t>出典：各社公式ドキュメント（Anthropic / Microsoft Learn / OpenAI / Google）・2026-10時点</a:t>
             </a:r>

--- a/docs/03_参考資料/Copilot_Cowork_競合比較.pptx
+++ b/docs/03_参考資料/Copilot_Cowork_競合比較.pptx
@@ -3255,7 +3255,7 @@
         <p:spPr>
           <a:xfrm>
             <a:off x="822960" y="4297680"/>
-            <a:ext cx="10515600" cy="731520"/>
+            <a:ext cx="10515600" cy="914400"/>
           </a:xfrm>
           <a:prstGeom prst="rect">
             <a:avLst/>
@@ -3285,7 +3285,28 @@
                 <a:ea typeface="Meiryo"/>
                 <a:cs typeface="Meiryo"/>
               </a:rPr>
-              <a:t>「純粋な競合（同じ土俵）」と「補完（別エコシステム）」を分けて理解する</a:t>
+              <a:t>Microsoft 365 Copilot との補完から、Claude Cowork と Claude Code の</a:t>
+            </a:r>
+          </a:p>
+          <a:p>
+            <a:pPr algn="l">
+              <a:spcBef>
+                <a:spcPts val="0"/>
+              </a:spcBef>
+              <a:spcAft>
+                <a:spcPts val="400"/>
+              </a:spcAft>
+            </a:pPr>
+            <a:r>
+              <a:rPr sz="1800" b="0">
+                <a:solidFill>
+                  <a:srgbClr val="C7D0D9"/>
+                </a:solidFill>
+                <a:latin typeface="Meiryo"/>
+                <a:ea typeface="Meiryo"/>
+                <a:cs typeface="Meiryo"/>
+              </a:rPr>
+              <a:t>使い分けへ。競合ツールは参考として整理します。</a:t>
             </a:r>
           </a:p>
         </p:txBody>
@@ -3427,7 +3448,7 @@
               </a:spcAft>
             </a:pPr>
             <a:r>
-              <a:rPr sz="3200" b="1">
+              <a:rPr sz="3000" b="1">
                 <a:solidFill>
                   <a:srgbClr val="1E2832"/>
                 </a:solidFill>
@@ -3435,1021 +3456,7 @@
                 <a:ea typeface="Meiryo"/>
                 <a:cs typeface="Meiryo"/>
               </a:rPr>
-              <a:t>純粋な競合：自律コーディングエージェント</a:t>
-            </a:r>
-          </a:p>
-        </p:txBody>
-      </p:sp>
-      <p:sp>
-        <p:nvSpPr>
-          <p:cNvPr id="4" name="TextBox 3"/>
-          <p:cNvSpPr txBox="1"/>
-          <p:nvPr/>
-        </p:nvSpPr>
-        <p:spPr>
-          <a:xfrm>
-            <a:off x="548640" y="1216152"/>
-            <a:ext cx="10972800" cy="548640"/>
-          </a:xfrm>
-          <a:prstGeom prst="rect">
-            <a:avLst/>
-          </a:prstGeom>
-          <a:noFill/>
-        </p:spPr>
-        <p:txBody>
-          <a:bodyPr wrap="square" anchor="t" lIns="0" rIns="0" tIns="0" bIns="0">
-            <a:spAutoFit/>
-          </a:bodyPr>
-          <a:lstStyle/>
-          <a:p>
-            <a:pPr algn="l">
-              <a:spcBef>
-                <a:spcPts val="0"/>
-              </a:spcBef>
-              <a:spcAft>
-                <a:spcPts val="400"/>
-              </a:spcAft>
-            </a:pPr>
-            <a:r>
-              <a:rPr sz="1400" b="0">
-                <a:solidFill>
-                  <a:srgbClr val="5B6670"/>
-                </a:solidFill>
-                <a:latin typeface="Meiryo"/>
-                <a:ea typeface="Meiryo"/>
-                <a:cs typeface="Meiryo"/>
-              </a:rPr>
-              <a:t>ターミナル(CLI)からコードやファイルを自律的に操作して開発を進めるツールどうしで、用途が重なる直接の競合です。</a:t>
-            </a:r>
-          </a:p>
-        </p:txBody>
-      </p:sp>
-      <p:sp>
-        <p:nvSpPr>
-          <p:cNvPr id="5" name="Rounded Rectangle 4"/>
-          <p:cNvSpPr/>
-          <p:nvPr/>
-        </p:nvSpPr>
-        <p:spPr>
-          <a:xfrm>
-            <a:off x="548640" y="1965960"/>
-            <a:ext cx="3511296" cy="3520440"/>
-          </a:xfrm>
-          <a:prstGeom prst="roundRect">
-            <a:avLst>
-              <a:gd name="adj" fmla="val 6000"/>
-            </a:avLst>
-          </a:prstGeom>
-          <a:solidFill>
-            <a:srgbClr val="FFFFFF"/>
-          </a:solidFill>
-          <a:ln w="12700">
-            <a:solidFill>
-              <a:srgbClr val="D8DEE4"/>
-            </a:solidFill>
-          </a:ln>
-          <a:effectLst/>
-        </p:spPr>
-        <p:style>
-          <a:lnRef idx="1">
-            <a:schemeClr val="accent1"/>
-          </a:lnRef>
-          <a:fillRef idx="3">
-            <a:schemeClr val="accent1"/>
-          </a:fillRef>
-          <a:effectRef idx="2">
-            <a:schemeClr val="accent1"/>
-          </a:effectRef>
-          <a:fontRef idx="minor">
-            <a:schemeClr val="lt1"/>
-          </a:fontRef>
-        </p:style>
-        <p:txBody>
-          <a:bodyPr rtlCol="0" anchor="ctr"/>
-          <a:lstStyle/>
-          <a:p>
-            <a:pPr algn="ctr"/>
-          </a:p>
-        </p:txBody>
-      </p:sp>
-      <p:sp>
-        <p:nvSpPr>
-          <p:cNvPr id="6" name="TextBox 5"/>
-          <p:cNvSpPr txBox="1"/>
-          <p:nvPr/>
-        </p:nvSpPr>
-        <p:spPr>
-          <a:xfrm>
-            <a:off x="822959" y="2221991"/>
-            <a:ext cx="2962656" cy="457200"/>
-          </a:xfrm>
-          <a:prstGeom prst="rect">
-            <a:avLst/>
-          </a:prstGeom>
-          <a:noFill/>
-        </p:spPr>
-        <p:txBody>
-          <a:bodyPr wrap="square" anchor="t" lIns="0" rIns="0" tIns="0" bIns="0">
-            <a:spAutoFit/>
-          </a:bodyPr>
-          <a:lstStyle/>
-          <a:p>
-            <a:pPr algn="l">
-              <a:spcBef>
-                <a:spcPts val="0"/>
-              </a:spcBef>
-              <a:spcAft>
-                <a:spcPts val="400"/>
-              </a:spcAft>
-            </a:pPr>
-            <a:r>
-              <a:rPr sz="2000" b="1">
-                <a:solidFill>
-                  <a:srgbClr val="2E5A88"/>
-                </a:solidFill>
-                <a:latin typeface="Meiryo"/>
-                <a:ea typeface="Meiryo"/>
-                <a:cs typeface="Meiryo"/>
-              </a:rPr>
-              <a:t>Claude Code</a:t>
-            </a:r>
-          </a:p>
-        </p:txBody>
-      </p:sp>
-      <p:sp>
-        <p:nvSpPr>
-          <p:cNvPr id="7" name="TextBox 6"/>
-          <p:cNvSpPr txBox="1"/>
-          <p:nvPr/>
-        </p:nvSpPr>
-        <p:spPr>
-          <a:xfrm>
-            <a:off x="822959" y="2679191"/>
-            <a:ext cx="2962656" cy="320040"/>
-          </a:xfrm>
-          <a:prstGeom prst="rect">
-            <a:avLst/>
-          </a:prstGeom>
-          <a:noFill/>
-        </p:spPr>
-        <p:txBody>
-          <a:bodyPr wrap="square" anchor="t" lIns="0" rIns="0" tIns="0" bIns="0">
-            <a:spAutoFit/>
-          </a:bodyPr>
-          <a:lstStyle/>
-          <a:p>
-            <a:pPr algn="l">
-              <a:spcBef>
-                <a:spcPts val="0"/>
-              </a:spcBef>
-              <a:spcAft>
-                <a:spcPts val="400"/>
-              </a:spcAft>
-            </a:pPr>
-            <a:r>
-              <a:rPr sz="1200" b="0">
-                <a:solidFill>
-                  <a:srgbClr val="5B6670"/>
-                </a:solidFill>
-                <a:latin typeface="Meiryo"/>
-                <a:ea typeface="Meiryo"/>
-                <a:cs typeface="Meiryo"/>
-              </a:rPr>
-              <a:t>Anthropic</a:t>
-            </a:r>
-          </a:p>
-        </p:txBody>
-      </p:sp>
-      <p:sp>
-        <p:nvSpPr>
-          <p:cNvPr id="8" name="TextBox 7"/>
-          <p:cNvSpPr txBox="1"/>
-          <p:nvPr/>
-        </p:nvSpPr>
-        <p:spPr>
-          <a:xfrm>
-            <a:off x="822959" y="3154680"/>
-            <a:ext cx="2962656" cy="2148840"/>
-          </a:xfrm>
-          <a:prstGeom prst="rect">
-            <a:avLst/>
-          </a:prstGeom>
-          <a:noFill/>
-        </p:spPr>
-        <p:txBody>
-          <a:bodyPr wrap="square" anchor="t" lIns="0" rIns="0" tIns="0" bIns="0">
-            <a:spAutoFit/>
-          </a:bodyPr>
-          <a:lstStyle/>
-          <a:p>
-            <a:pPr algn="l">
-              <a:spcBef>
-                <a:spcPts val="0"/>
-              </a:spcBef>
-              <a:spcAft>
-                <a:spcPts val="1000"/>
-              </a:spcAft>
-            </a:pPr>
-            <a:r>
-              <a:rPr sz="1200" b="1">
-                <a:solidFill>
-                  <a:srgbClr val="1E2832"/>
-                </a:solidFill>
-                <a:latin typeface="Meiryo"/>
-                <a:ea typeface="Meiryo"/>
-                <a:cs typeface="Meiryo"/>
-              </a:rPr>
-              <a:t>形態：</a:t>
-            </a:r>
-            <a:r>
-              <a:rPr sz="1200" b="0">
-                <a:solidFill>
-                  <a:srgbClr val="1E2832"/>
-                </a:solidFill>
-                <a:latin typeface="Meiryo"/>
-                <a:ea typeface="Meiryo"/>
-                <a:cs typeface="Meiryo"/>
-              </a:rPr>
-              <a:t>CLI＋デスクトップの自律型</a:t>
-            </a:r>
-          </a:p>
-          <a:p>
-            <a:pPr algn="l">
-              <a:spcBef>
-                <a:spcPts val="0"/>
-              </a:spcBef>
-              <a:spcAft>
-                <a:spcPts val="1000"/>
-              </a:spcAft>
-            </a:pPr>
-            <a:r>
-              <a:rPr sz="1200" b="1">
-                <a:solidFill>
-                  <a:srgbClr val="1E2832"/>
-                </a:solidFill>
-                <a:latin typeface="Meiryo"/>
-                <a:ea typeface="Meiryo"/>
-                <a:cs typeface="Meiryo"/>
-              </a:rPr>
-              <a:t>モデル：</a:t>
-            </a:r>
-            <a:r>
-              <a:rPr sz="1200" b="0">
-                <a:solidFill>
-                  <a:srgbClr val="1E2832"/>
-                </a:solidFill>
-                <a:latin typeface="Meiryo"/>
-                <a:ea typeface="Meiryo"/>
-                <a:cs typeface="Meiryo"/>
-              </a:rPr>
-              <a:t>Claude</a:t>
-            </a:r>
-          </a:p>
-          <a:p>
-            <a:pPr algn="l">
-              <a:spcBef>
-                <a:spcPts val="0"/>
-              </a:spcBef>
-              <a:spcAft>
-                <a:spcPts val="1000"/>
-              </a:spcAft>
-            </a:pPr>
-            <a:r>
-              <a:rPr sz="1200" b="1">
-                <a:solidFill>
-                  <a:srgbClr val="1E2832"/>
-                </a:solidFill>
-                <a:latin typeface="Meiryo"/>
-                <a:ea typeface="Meiryo"/>
-                <a:cs typeface="Meiryo"/>
-              </a:rPr>
-              <a:t>特徴：</a:t>
-            </a:r>
-            <a:r>
-              <a:rPr sz="1200" b="0">
-                <a:solidFill>
-                  <a:srgbClr val="1E2832"/>
-                </a:solidFill>
-                <a:latin typeface="Meiryo"/>
-                <a:ea typeface="Meiryo"/>
-                <a:cs typeface="Meiryo"/>
-              </a:rPr>
-              <a:t>スキルやMCPで拡張できる</a:t>
-            </a:r>
-          </a:p>
-        </p:txBody>
-      </p:sp>
-      <p:sp>
-        <p:nvSpPr>
-          <p:cNvPr id="9" name="Rounded Rectangle 8"/>
-          <p:cNvSpPr/>
-          <p:nvPr/>
-        </p:nvSpPr>
-        <p:spPr>
-          <a:xfrm>
-            <a:off x="4334255" y="1965960"/>
-            <a:ext cx="3511296" cy="3520440"/>
-          </a:xfrm>
-          <a:prstGeom prst="roundRect">
-            <a:avLst>
-              <a:gd name="adj" fmla="val 6000"/>
-            </a:avLst>
-          </a:prstGeom>
-          <a:solidFill>
-            <a:srgbClr val="FFFFFF"/>
-          </a:solidFill>
-          <a:ln w="12700">
-            <a:solidFill>
-              <a:srgbClr val="D8DEE4"/>
-            </a:solidFill>
-          </a:ln>
-          <a:effectLst/>
-        </p:spPr>
-        <p:style>
-          <a:lnRef idx="1">
-            <a:schemeClr val="accent1"/>
-          </a:lnRef>
-          <a:fillRef idx="3">
-            <a:schemeClr val="accent1"/>
-          </a:fillRef>
-          <a:effectRef idx="2">
-            <a:schemeClr val="accent1"/>
-          </a:effectRef>
-          <a:fontRef idx="minor">
-            <a:schemeClr val="lt1"/>
-          </a:fontRef>
-        </p:style>
-        <p:txBody>
-          <a:bodyPr rtlCol="0" anchor="ctr"/>
-          <a:lstStyle/>
-          <a:p>
-            <a:pPr algn="ctr"/>
-          </a:p>
-        </p:txBody>
-      </p:sp>
-      <p:sp>
-        <p:nvSpPr>
-          <p:cNvPr id="10" name="TextBox 9"/>
-          <p:cNvSpPr txBox="1"/>
-          <p:nvPr/>
-        </p:nvSpPr>
-        <p:spPr>
-          <a:xfrm>
-            <a:off x="4608575" y="2221991"/>
-            <a:ext cx="2962656" cy="457200"/>
-          </a:xfrm>
-          <a:prstGeom prst="rect">
-            <a:avLst/>
-          </a:prstGeom>
-          <a:noFill/>
-        </p:spPr>
-        <p:txBody>
-          <a:bodyPr wrap="square" anchor="t" lIns="0" rIns="0" tIns="0" bIns="0">
-            <a:spAutoFit/>
-          </a:bodyPr>
-          <a:lstStyle/>
-          <a:p>
-            <a:pPr algn="l">
-              <a:spcBef>
-                <a:spcPts val="0"/>
-              </a:spcBef>
-              <a:spcAft>
-                <a:spcPts val="400"/>
-              </a:spcAft>
-            </a:pPr>
-            <a:r>
-              <a:rPr sz="2000" b="1">
-                <a:solidFill>
-                  <a:srgbClr val="2E5A88"/>
-                </a:solidFill>
-                <a:latin typeface="Meiryo"/>
-                <a:ea typeface="Meiryo"/>
-                <a:cs typeface="Meiryo"/>
-              </a:rPr>
-              <a:t>OpenAI Codex</a:t>
-            </a:r>
-          </a:p>
-        </p:txBody>
-      </p:sp>
-      <p:sp>
-        <p:nvSpPr>
-          <p:cNvPr id="11" name="TextBox 10"/>
-          <p:cNvSpPr txBox="1"/>
-          <p:nvPr/>
-        </p:nvSpPr>
-        <p:spPr>
-          <a:xfrm>
-            <a:off x="4608575" y="2679191"/>
-            <a:ext cx="2962656" cy="320040"/>
-          </a:xfrm>
-          <a:prstGeom prst="rect">
-            <a:avLst/>
-          </a:prstGeom>
-          <a:noFill/>
-        </p:spPr>
-        <p:txBody>
-          <a:bodyPr wrap="square" anchor="t" lIns="0" rIns="0" tIns="0" bIns="0">
-            <a:spAutoFit/>
-          </a:bodyPr>
-          <a:lstStyle/>
-          <a:p>
-            <a:pPr algn="l">
-              <a:spcBef>
-                <a:spcPts val="0"/>
-              </a:spcBef>
-              <a:spcAft>
-                <a:spcPts val="400"/>
-              </a:spcAft>
-            </a:pPr>
-            <a:r>
-              <a:rPr sz="1200" b="0">
-                <a:solidFill>
-                  <a:srgbClr val="5B6670"/>
-                </a:solidFill>
-                <a:latin typeface="Meiryo"/>
-                <a:ea typeface="Meiryo"/>
-                <a:cs typeface="Meiryo"/>
-              </a:rPr>
-              <a:t>OpenAI</a:t>
-            </a:r>
-          </a:p>
-        </p:txBody>
-      </p:sp>
-      <p:sp>
-        <p:nvSpPr>
-          <p:cNvPr id="12" name="TextBox 11"/>
-          <p:cNvSpPr txBox="1"/>
-          <p:nvPr/>
-        </p:nvSpPr>
-        <p:spPr>
-          <a:xfrm>
-            <a:off x="4608575" y="3154680"/>
-            <a:ext cx="2962656" cy="2148840"/>
-          </a:xfrm>
-          <a:prstGeom prst="rect">
-            <a:avLst/>
-          </a:prstGeom>
-          <a:noFill/>
-        </p:spPr>
-        <p:txBody>
-          <a:bodyPr wrap="square" anchor="t" lIns="0" rIns="0" tIns="0" bIns="0">
-            <a:spAutoFit/>
-          </a:bodyPr>
-          <a:lstStyle/>
-          <a:p>
-            <a:pPr algn="l">
-              <a:spcBef>
-                <a:spcPts val="0"/>
-              </a:spcBef>
-              <a:spcAft>
-                <a:spcPts val="1000"/>
-              </a:spcAft>
-            </a:pPr>
-            <a:r>
-              <a:rPr sz="1200" b="1">
-                <a:solidFill>
-                  <a:srgbClr val="1E2832"/>
-                </a:solidFill>
-                <a:latin typeface="Meiryo"/>
-                <a:ea typeface="Meiryo"/>
-                <a:cs typeface="Meiryo"/>
-              </a:rPr>
-              <a:t>形態：</a:t>
-            </a:r>
-            <a:r>
-              <a:rPr sz="1200" b="0">
-                <a:solidFill>
-                  <a:srgbClr val="1E2832"/>
-                </a:solidFill>
-                <a:latin typeface="Meiryo"/>
-                <a:ea typeface="Meiryo"/>
-                <a:cs typeface="Meiryo"/>
-              </a:rPr>
-              <a:t>CLI(OSS)＋クラウド＋IDE拡張</a:t>
-            </a:r>
-          </a:p>
-          <a:p>
-            <a:pPr algn="l">
-              <a:spcBef>
-                <a:spcPts val="0"/>
-              </a:spcBef>
-              <a:spcAft>
-                <a:spcPts val="1000"/>
-              </a:spcAft>
-            </a:pPr>
-            <a:r>
-              <a:rPr sz="1200" b="1">
-                <a:solidFill>
-                  <a:srgbClr val="1E2832"/>
-                </a:solidFill>
-                <a:latin typeface="Meiryo"/>
-                <a:ea typeface="Meiryo"/>
-                <a:cs typeface="Meiryo"/>
-              </a:rPr>
-              <a:t>モデル：</a:t>
-            </a:r>
-            <a:r>
-              <a:rPr sz="1200" b="0">
-                <a:solidFill>
-                  <a:srgbClr val="1E2832"/>
-                </a:solidFill>
-                <a:latin typeface="Meiryo"/>
-                <a:ea typeface="Meiryo"/>
-                <a:cs typeface="Meiryo"/>
-              </a:rPr>
-              <a:t>GPT‑5‑codex 系</a:t>
-            </a:r>
-          </a:p>
-          <a:p>
-            <a:pPr algn="l">
-              <a:spcBef>
-                <a:spcPts val="0"/>
-              </a:spcBef>
-              <a:spcAft>
-                <a:spcPts val="1000"/>
-              </a:spcAft>
-            </a:pPr>
-            <a:r>
-              <a:rPr sz="1200" b="1">
-                <a:solidFill>
-                  <a:srgbClr val="1E2832"/>
-                </a:solidFill>
-                <a:latin typeface="Meiryo"/>
-                <a:ea typeface="Meiryo"/>
-                <a:cs typeface="Meiryo"/>
-              </a:rPr>
-              <a:t>特徴：</a:t>
-            </a:r>
-            <a:r>
-              <a:rPr sz="1200" b="0">
-                <a:solidFill>
-                  <a:srgbClr val="1E2832"/>
-                </a:solidFill>
-                <a:latin typeface="Meiryo"/>
-                <a:ea typeface="Meiryo"/>
-                <a:cs typeface="Meiryo"/>
-              </a:rPr>
-              <a:t>ローカルとクラウドを行き来</a:t>
-            </a:r>
-          </a:p>
-        </p:txBody>
-      </p:sp>
-      <p:sp>
-        <p:nvSpPr>
-          <p:cNvPr id="13" name="Rounded Rectangle 12"/>
-          <p:cNvSpPr/>
-          <p:nvPr/>
-        </p:nvSpPr>
-        <p:spPr>
-          <a:xfrm>
-            <a:off x="8119871" y="1965960"/>
-            <a:ext cx="3511296" cy="3520440"/>
-          </a:xfrm>
-          <a:prstGeom prst="roundRect">
-            <a:avLst>
-              <a:gd name="adj" fmla="val 6000"/>
-            </a:avLst>
-          </a:prstGeom>
-          <a:solidFill>
-            <a:srgbClr val="FFFFFF"/>
-          </a:solidFill>
-          <a:ln w="12700">
-            <a:solidFill>
-              <a:srgbClr val="D8DEE4"/>
-            </a:solidFill>
-          </a:ln>
-          <a:effectLst/>
-        </p:spPr>
-        <p:style>
-          <a:lnRef idx="1">
-            <a:schemeClr val="accent1"/>
-          </a:lnRef>
-          <a:fillRef idx="3">
-            <a:schemeClr val="accent1"/>
-          </a:fillRef>
-          <a:effectRef idx="2">
-            <a:schemeClr val="accent1"/>
-          </a:effectRef>
-          <a:fontRef idx="minor">
-            <a:schemeClr val="lt1"/>
-          </a:fontRef>
-        </p:style>
-        <p:txBody>
-          <a:bodyPr rtlCol="0" anchor="ctr"/>
-          <a:lstStyle/>
-          <a:p>
-            <a:pPr algn="ctr"/>
-          </a:p>
-        </p:txBody>
-      </p:sp>
-      <p:sp>
-        <p:nvSpPr>
-          <p:cNvPr id="14" name="TextBox 13"/>
-          <p:cNvSpPr txBox="1"/>
-          <p:nvPr/>
-        </p:nvSpPr>
-        <p:spPr>
-          <a:xfrm>
-            <a:off x="8394192" y="2221991"/>
-            <a:ext cx="2962656" cy="457200"/>
-          </a:xfrm>
-          <a:prstGeom prst="rect">
-            <a:avLst/>
-          </a:prstGeom>
-          <a:noFill/>
-        </p:spPr>
-        <p:txBody>
-          <a:bodyPr wrap="square" anchor="t" lIns="0" rIns="0" tIns="0" bIns="0">
-            <a:spAutoFit/>
-          </a:bodyPr>
-          <a:lstStyle/>
-          <a:p>
-            <a:pPr algn="l">
-              <a:spcBef>
-                <a:spcPts val="0"/>
-              </a:spcBef>
-              <a:spcAft>
-                <a:spcPts val="400"/>
-              </a:spcAft>
-            </a:pPr>
-            <a:r>
-              <a:rPr sz="2000" b="1">
-                <a:solidFill>
-                  <a:srgbClr val="2E5A88"/>
-                </a:solidFill>
-                <a:latin typeface="Meiryo"/>
-                <a:ea typeface="Meiryo"/>
-                <a:cs typeface="Meiryo"/>
-              </a:rPr>
-              <a:t>Gemini CLI</a:t>
-            </a:r>
-          </a:p>
-        </p:txBody>
-      </p:sp>
-      <p:sp>
-        <p:nvSpPr>
-          <p:cNvPr id="15" name="TextBox 14"/>
-          <p:cNvSpPr txBox="1"/>
-          <p:nvPr/>
-        </p:nvSpPr>
-        <p:spPr>
-          <a:xfrm>
-            <a:off x="8394192" y="2679191"/>
-            <a:ext cx="2962656" cy="320040"/>
-          </a:xfrm>
-          <a:prstGeom prst="rect">
-            <a:avLst/>
-          </a:prstGeom>
-          <a:noFill/>
-        </p:spPr>
-        <p:txBody>
-          <a:bodyPr wrap="square" anchor="t" lIns="0" rIns="0" tIns="0" bIns="0">
-            <a:spAutoFit/>
-          </a:bodyPr>
-          <a:lstStyle/>
-          <a:p>
-            <a:pPr algn="l">
-              <a:spcBef>
-                <a:spcPts val="0"/>
-              </a:spcBef>
-              <a:spcAft>
-                <a:spcPts val="400"/>
-              </a:spcAft>
-            </a:pPr>
-            <a:r>
-              <a:rPr sz="1200" b="0">
-                <a:solidFill>
-                  <a:srgbClr val="5B6670"/>
-                </a:solidFill>
-                <a:latin typeface="Meiryo"/>
-                <a:ea typeface="Meiryo"/>
-                <a:cs typeface="Meiryo"/>
-              </a:rPr>
-              <a:t>Google</a:t>
-            </a:r>
-          </a:p>
-        </p:txBody>
-      </p:sp>
-      <p:sp>
-        <p:nvSpPr>
-          <p:cNvPr id="16" name="TextBox 15"/>
-          <p:cNvSpPr txBox="1"/>
-          <p:nvPr/>
-        </p:nvSpPr>
-        <p:spPr>
-          <a:xfrm>
-            <a:off x="8394192" y="3154680"/>
-            <a:ext cx="2962656" cy="2148840"/>
-          </a:xfrm>
-          <a:prstGeom prst="rect">
-            <a:avLst/>
-          </a:prstGeom>
-          <a:noFill/>
-        </p:spPr>
-        <p:txBody>
-          <a:bodyPr wrap="square" anchor="t" lIns="0" rIns="0" tIns="0" bIns="0">
-            <a:spAutoFit/>
-          </a:bodyPr>
-          <a:lstStyle/>
-          <a:p>
-            <a:pPr algn="l">
-              <a:spcBef>
-                <a:spcPts val="0"/>
-              </a:spcBef>
-              <a:spcAft>
-                <a:spcPts val="1000"/>
-              </a:spcAft>
-            </a:pPr>
-            <a:r>
-              <a:rPr sz="1200" b="1">
-                <a:solidFill>
-                  <a:srgbClr val="1E2832"/>
-                </a:solidFill>
-                <a:latin typeface="Meiryo"/>
-                <a:ea typeface="Meiryo"/>
-                <a:cs typeface="Meiryo"/>
-              </a:rPr>
-              <a:t>形態：</a:t>
-            </a:r>
-            <a:r>
-              <a:rPr sz="1200" b="0">
-                <a:solidFill>
-                  <a:srgbClr val="1E2832"/>
-                </a:solidFill>
-                <a:latin typeface="Meiryo"/>
-                <a:ea typeface="Meiryo"/>
-                <a:cs typeface="Meiryo"/>
-              </a:rPr>
-              <a:t>OSSのターミナル型エージェント</a:t>
-            </a:r>
-          </a:p>
-          <a:p>
-            <a:pPr algn="l">
-              <a:spcBef>
-                <a:spcPts val="0"/>
-              </a:spcBef>
-              <a:spcAft>
-                <a:spcPts val="1000"/>
-              </a:spcAft>
-            </a:pPr>
-            <a:r>
-              <a:rPr sz="1200" b="1">
-                <a:solidFill>
-                  <a:srgbClr val="1E2832"/>
-                </a:solidFill>
-                <a:latin typeface="Meiryo"/>
-                <a:ea typeface="Meiryo"/>
-                <a:cs typeface="Meiryo"/>
-              </a:rPr>
-              <a:t>モデル：</a:t>
-            </a:r>
-            <a:r>
-              <a:rPr sz="1200" b="0">
-                <a:solidFill>
-                  <a:srgbClr val="1E2832"/>
-                </a:solidFill>
-                <a:latin typeface="Meiryo"/>
-                <a:ea typeface="Meiryo"/>
-                <a:cs typeface="Meiryo"/>
-              </a:rPr>
-              <a:t>Gemini</a:t>
-            </a:r>
-          </a:p>
-          <a:p>
-            <a:pPr algn="l">
-              <a:spcBef>
-                <a:spcPts val="0"/>
-              </a:spcBef>
-              <a:spcAft>
-                <a:spcPts val="1000"/>
-              </a:spcAft>
-            </a:pPr>
-            <a:r>
-              <a:rPr sz="1200" b="1">
-                <a:solidFill>
-                  <a:srgbClr val="1E2832"/>
-                </a:solidFill>
-                <a:latin typeface="Meiryo"/>
-                <a:ea typeface="Meiryo"/>
-                <a:cs typeface="Meiryo"/>
-              </a:rPr>
-              <a:t>特徴：</a:t>
-            </a:r>
-            <a:r>
-              <a:rPr sz="1200" b="0">
-                <a:solidFill>
-                  <a:srgbClr val="1E2832"/>
-                </a:solidFill>
-                <a:latin typeface="Meiryo"/>
-                <a:ea typeface="Meiryo"/>
-                <a:cs typeface="Meiryo"/>
-              </a:rPr>
-              <a:t>後継のAntigravity CLIへ移行中</a:t>
-            </a:r>
-          </a:p>
-        </p:txBody>
-      </p:sp>
-      <p:sp>
-        <p:nvSpPr>
-          <p:cNvPr id="17" name="TextBox 16"/>
-          <p:cNvSpPr txBox="1"/>
-          <p:nvPr/>
-        </p:nvSpPr>
-        <p:spPr>
-          <a:xfrm>
-            <a:off x="548640" y="5715000"/>
-            <a:ext cx="10972800" cy="640080"/>
-          </a:xfrm>
-          <a:prstGeom prst="rect">
-            <a:avLst/>
-          </a:prstGeom>
-          <a:noFill/>
-        </p:spPr>
-        <p:txBody>
-          <a:bodyPr wrap="square" anchor="t" lIns="0" rIns="0" tIns="0" bIns="0">
-            <a:spAutoFit/>
-          </a:bodyPr>
-          <a:lstStyle/>
-          <a:p>
-            <a:pPr algn="l">
-              <a:spcBef>
-                <a:spcPts val="0"/>
-              </a:spcBef>
-              <a:spcAft>
-                <a:spcPts val="400"/>
-              </a:spcAft>
-            </a:pPr>
-            <a:r>
-              <a:rPr sz="1500" b="1">
-                <a:solidFill>
-                  <a:srgbClr val="2E5A88"/>
-                </a:solidFill>
-                <a:latin typeface="Meiryo"/>
-                <a:ea typeface="Meiryo"/>
-                <a:cs typeface="Meiryo"/>
-              </a:rPr>
-              <a:t>選ぶ基準：</a:t>
-            </a:r>
-            <a:r>
-              <a:rPr sz="1500" b="0">
-                <a:solidFill>
-                  <a:srgbClr val="1E2832"/>
-                </a:solidFill>
-                <a:latin typeface="Meiryo"/>
-                <a:ea typeface="Meiryo"/>
-                <a:cs typeface="Meiryo"/>
-              </a:rPr>
-              <a:t>モデル品質・既存エコシステム・社内方針で決めます。用途が重なるため、基本はどれか1つを選びます。</a:t>
-            </a:r>
-          </a:p>
-        </p:txBody>
-      </p:sp>
-      <p:sp>
-        <p:nvSpPr>
-          <p:cNvPr id="18" name="TextBox 17"/>
-          <p:cNvSpPr txBox="1"/>
-          <p:nvPr/>
-        </p:nvSpPr>
-        <p:spPr>
-          <a:xfrm>
-            <a:off x="548640" y="6382512"/>
-            <a:ext cx="10972800" cy="320040"/>
-          </a:xfrm>
-          <a:prstGeom prst="rect">
-            <a:avLst/>
-          </a:prstGeom>
-          <a:noFill/>
-        </p:spPr>
-        <p:txBody>
-          <a:bodyPr wrap="square" anchor="t" lIns="0" rIns="0" tIns="0" bIns="0">
-            <a:spAutoFit/>
-          </a:bodyPr>
-          <a:lstStyle/>
-          <a:p>
-            <a:pPr algn="l">
-              <a:spcBef>
-                <a:spcPts val="0"/>
-              </a:spcBef>
-              <a:spcAft>
-                <a:spcPts val="400"/>
-              </a:spcAft>
-            </a:pPr>
-            <a:r>
-              <a:rPr sz="1000" b="0">
-                <a:solidFill>
-                  <a:srgbClr val="5B6670"/>
-                </a:solidFill>
-                <a:latin typeface="Meiryo"/>
-                <a:ea typeface="Meiryo"/>
-                <a:cs typeface="Meiryo"/>
-              </a:rPr>
-              <a:t>出典：各社公式ドキュメント（Anthropic / Microsoft Learn / OpenAI / Google）・2026-10時点</a:t>
-            </a:r>
-          </a:p>
-        </p:txBody>
-      </p:sp>
-    </p:spTree>
-  </p:cSld>
-  <p:clrMapOvr>
-    <a:masterClrMapping/>
-  </p:clrMapOvr>
-</p:sld>
-</file>
-
-<file path=ppt/slides/slide3.xml><?xml version="1.0" encoding="utf-8"?>
-<p:sld xmlns:a="http://schemas.openxmlformats.org/drawingml/2006/main" xmlns:p="http://schemas.openxmlformats.org/presentationml/2006/main" xmlns:r="http://schemas.openxmlformats.org/officeDocument/2006/relationships">
-  <p:cSld>
-    <p:spTree>
-      <p:nvGrpSpPr>
-        <p:cNvPr id="1" name=""/>
-        <p:cNvGrpSpPr/>
-        <p:nvPr/>
-      </p:nvGrpSpPr>
-      <p:grpSpPr/>
-      <p:sp>
-        <p:nvSpPr>
-          <p:cNvPr id="2" name="Rectangle 1"/>
-          <p:cNvSpPr/>
-          <p:nvPr/>
-        </p:nvSpPr>
-        <p:spPr>
-          <a:xfrm>
-            <a:off x="0" y="0"/>
-            <a:ext cx="12191695" cy="6858000"/>
-          </a:xfrm>
-          <a:prstGeom prst="rect">
-            <a:avLst/>
-          </a:prstGeom>
-          <a:solidFill>
-            <a:srgbClr val="FFFFFF"/>
-          </a:solidFill>
-          <a:ln>
-            <a:noFill/>
-          </a:ln>
-          <a:effectLst/>
-        </p:spPr>
-        <p:style>
-          <a:lnRef idx="1">
-            <a:schemeClr val="accent1"/>
-          </a:lnRef>
-          <a:fillRef idx="3">
-            <a:schemeClr val="accent1"/>
-          </a:fillRef>
-          <a:effectRef idx="2">
-            <a:schemeClr val="accent1"/>
-          </a:effectRef>
-          <a:fontRef idx="minor">
-            <a:schemeClr val="lt1"/>
-          </a:fontRef>
-        </p:style>
-        <p:txBody>
-          <a:bodyPr rtlCol="0" anchor="ctr"/>
-          <a:lstStyle/>
-          <a:p>
-            <a:pPr algn="ctr"/>
-          </a:p>
-        </p:txBody>
-      </p:sp>
-      <p:sp>
-        <p:nvSpPr>
-          <p:cNvPr id="3" name="TextBox 2"/>
-          <p:cNvSpPr txBox="1"/>
-          <p:nvPr/>
-        </p:nvSpPr>
-        <p:spPr>
-          <a:xfrm>
-            <a:off x="548640" y="502920"/>
-            <a:ext cx="10972800" cy="731520"/>
-          </a:xfrm>
-          <a:prstGeom prst="rect">
-            <a:avLst/>
-          </a:prstGeom>
-          <a:noFill/>
-        </p:spPr>
-        <p:txBody>
-          <a:bodyPr wrap="square" anchor="t" lIns="0" rIns="0" tIns="0" bIns="0">
-            <a:spAutoFit/>
-          </a:bodyPr>
-          <a:lstStyle/>
-          <a:p>
-            <a:pPr algn="l">
-              <a:spcBef>
-                <a:spcPts val="0"/>
-              </a:spcBef>
-              <a:spcAft>
-                <a:spcPts val="400"/>
-              </a:spcAft>
-            </a:pPr>
-            <a:r>
-              <a:rPr sz="3200" b="1">
-                <a:solidFill>
-                  <a:srgbClr val="1E2832"/>
-                </a:solidFill>
-                <a:latin typeface="Meiryo"/>
-                <a:ea typeface="Meiryo"/>
-                <a:cs typeface="Meiryo"/>
-              </a:rPr>
-              <a:t>補完：組織AI vs 独立エージェント</a:t>
+              <a:t>Microsoft 365 Copilot と Claude Cowork の住み分け</a:t>
             </a:r>
           </a:p>
         </p:txBody>
@@ -5076,7 +4083,7 @@
 </p:sld>
 </file>
 
-<file path=ppt/slides/slide4.xml><?xml version="1.0" encoding="utf-8"?>
+<file path=ppt/slides/slide3.xml><?xml version="1.0" encoding="utf-8"?>
 <p:sld xmlns:a="http://schemas.openxmlformats.org/drawingml/2006/main" xmlns:p="http://schemas.openxmlformats.org/presentationml/2006/main" xmlns:r="http://schemas.openxmlformats.org/officeDocument/2006/relationships">
   <p:cSld>
     <p:spTree>
@@ -5804,6 +4811,860 @@
       <p:sp>
         <p:nvSpPr>
           <p:cNvPr id="18" name="TextBox 17"/>
+          <p:cNvSpPr txBox="1"/>
+          <p:nvPr/>
+        </p:nvSpPr>
+        <p:spPr>
+          <a:xfrm>
+            <a:off x="548640" y="6382512"/>
+            <a:ext cx="10972800" cy="320040"/>
+          </a:xfrm>
+          <a:prstGeom prst="rect">
+            <a:avLst/>
+          </a:prstGeom>
+          <a:noFill/>
+        </p:spPr>
+        <p:txBody>
+          <a:bodyPr wrap="square" anchor="t" lIns="0" rIns="0" tIns="0" bIns="0">
+            <a:spAutoFit/>
+          </a:bodyPr>
+          <a:lstStyle/>
+          <a:p>
+            <a:pPr algn="l">
+              <a:spcBef>
+                <a:spcPts val="0"/>
+              </a:spcBef>
+              <a:spcAft>
+                <a:spcPts val="400"/>
+              </a:spcAft>
+            </a:pPr>
+            <a:r>
+              <a:rPr sz="1000" b="0">
+                <a:solidFill>
+                  <a:srgbClr val="5B6670"/>
+                </a:solidFill>
+                <a:latin typeface="Meiryo"/>
+                <a:ea typeface="Meiryo"/>
+                <a:cs typeface="Meiryo"/>
+              </a:rPr>
+              <a:t>出典：各社公式ドキュメント（Anthropic / Microsoft Learn / OpenAI / Google）・2026-10時点</a:t>
+            </a:r>
+          </a:p>
+        </p:txBody>
+      </p:sp>
+    </p:spTree>
+  </p:cSld>
+  <p:clrMapOvr>
+    <a:masterClrMapping/>
+  </p:clrMapOvr>
+</p:sld>
+</file>
+
+<file path=ppt/slides/slide4.xml><?xml version="1.0" encoding="utf-8"?>
+<p:sld xmlns:a="http://schemas.openxmlformats.org/drawingml/2006/main" xmlns:p="http://schemas.openxmlformats.org/presentationml/2006/main" xmlns:r="http://schemas.openxmlformats.org/officeDocument/2006/relationships">
+  <p:cSld>
+    <p:spTree>
+      <p:nvGrpSpPr>
+        <p:cNvPr id="1" name=""/>
+        <p:cNvGrpSpPr/>
+        <p:nvPr/>
+      </p:nvGrpSpPr>
+      <p:grpSpPr/>
+      <p:sp>
+        <p:nvSpPr>
+          <p:cNvPr id="2" name="Rectangle 1"/>
+          <p:cNvSpPr/>
+          <p:nvPr/>
+        </p:nvSpPr>
+        <p:spPr>
+          <a:xfrm>
+            <a:off x="0" y="0"/>
+            <a:ext cx="12191695" cy="6858000"/>
+          </a:xfrm>
+          <a:prstGeom prst="rect">
+            <a:avLst/>
+          </a:prstGeom>
+          <a:solidFill>
+            <a:srgbClr val="FFFFFF"/>
+          </a:solidFill>
+          <a:ln>
+            <a:noFill/>
+          </a:ln>
+          <a:effectLst/>
+        </p:spPr>
+        <p:style>
+          <a:lnRef idx="1">
+            <a:schemeClr val="accent1"/>
+          </a:lnRef>
+          <a:fillRef idx="3">
+            <a:schemeClr val="accent1"/>
+          </a:fillRef>
+          <a:effectRef idx="2">
+            <a:schemeClr val="accent1"/>
+          </a:effectRef>
+          <a:fontRef idx="minor">
+            <a:schemeClr val="lt1"/>
+          </a:fontRef>
+        </p:style>
+        <p:txBody>
+          <a:bodyPr rtlCol="0" anchor="ctr"/>
+          <a:lstStyle/>
+          <a:p>
+            <a:pPr algn="ctr"/>
+          </a:p>
+        </p:txBody>
+      </p:sp>
+      <p:sp>
+        <p:nvSpPr>
+          <p:cNvPr id="3" name="TextBox 2"/>
+          <p:cNvSpPr txBox="1"/>
+          <p:nvPr/>
+        </p:nvSpPr>
+        <p:spPr>
+          <a:xfrm>
+            <a:off x="548640" y="502920"/>
+            <a:ext cx="10972800" cy="731520"/>
+          </a:xfrm>
+          <a:prstGeom prst="rect">
+            <a:avLst/>
+          </a:prstGeom>
+          <a:noFill/>
+        </p:spPr>
+        <p:txBody>
+          <a:bodyPr wrap="square" anchor="t" lIns="0" rIns="0" tIns="0" bIns="0">
+            <a:spAutoFit/>
+          </a:bodyPr>
+          <a:lstStyle/>
+          <a:p>
+            <a:pPr algn="l">
+              <a:spcBef>
+                <a:spcPts val="0"/>
+              </a:spcBef>
+              <a:spcAft>
+                <a:spcPts val="400"/>
+              </a:spcAft>
+            </a:pPr>
+            <a:r>
+              <a:rPr sz="2800" b="1">
+                <a:solidFill>
+                  <a:srgbClr val="1E2832"/>
+                </a:solidFill>
+                <a:latin typeface="Meiryo"/>
+                <a:ea typeface="Meiryo"/>
+                <a:cs typeface="Meiryo"/>
+              </a:rPr>
+              <a:t>Claude Cowork と Claude Code は同じ頭脳で入り口が違う</a:t>
+            </a:r>
+          </a:p>
+        </p:txBody>
+      </p:sp>
+      <p:sp>
+        <p:nvSpPr>
+          <p:cNvPr id="4" name="TextBox 3"/>
+          <p:cNvSpPr txBox="1"/>
+          <p:nvPr/>
+        </p:nvSpPr>
+        <p:spPr>
+          <a:xfrm>
+            <a:off x="548640" y="1188720"/>
+            <a:ext cx="10972800" cy="548640"/>
+          </a:xfrm>
+          <a:prstGeom prst="rect">
+            <a:avLst/>
+          </a:prstGeom>
+          <a:noFill/>
+        </p:spPr>
+        <p:txBody>
+          <a:bodyPr wrap="square" anchor="t" lIns="0" rIns="0" tIns="0" bIns="0">
+            <a:spAutoFit/>
+          </a:bodyPr>
+          <a:lstStyle/>
+          <a:p>
+            <a:pPr algn="l">
+              <a:spcBef>
+                <a:spcPts val="0"/>
+              </a:spcBef>
+              <a:spcAft>
+                <a:spcPts val="400"/>
+              </a:spcAft>
+            </a:pPr>
+            <a:r>
+              <a:rPr sz="1400" b="0">
+                <a:solidFill>
+                  <a:srgbClr val="5B6670"/>
+                </a:solidFill>
+                <a:latin typeface="Meiryo"/>
+                <a:ea typeface="Meiryo"/>
+                <a:cs typeface="Meiryo"/>
+              </a:rPr>
+              <a:t>どちらも同じClaudeのエージェント基盤を使っています。違いは「誰が・何に使うか」で、目的に応じて選びます。</a:t>
+            </a:r>
+          </a:p>
+        </p:txBody>
+      </p:sp>
+      <p:sp>
+        <p:nvSpPr>
+          <p:cNvPr id="5" name="Rounded Rectangle 4"/>
+          <p:cNvSpPr/>
+          <p:nvPr/>
+        </p:nvSpPr>
+        <p:spPr>
+          <a:xfrm>
+            <a:off x="548640" y="1874519"/>
+            <a:ext cx="5394960" cy="3154680"/>
+          </a:xfrm>
+          <a:prstGeom prst="roundRect">
+            <a:avLst>
+              <a:gd name="adj" fmla="val 6000"/>
+            </a:avLst>
+          </a:prstGeom>
+          <a:solidFill>
+            <a:srgbClr val="FFFFFF"/>
+          </a:solidFill>
+          <a:ln w="12700">
+            <a:solidFill>
+              <a:srgbClr val="D8DEE4"/>
+            </a:solidFill>
+          </a:ln>
+          <a:effectLst/>
+        </p:spPr>
+        <p:style>
+          <a:lnRef idx="1">
+            <a:schemeClr val="accent1"/>
+          </a:lnRef>
+          <a:fillRef idx="3">
+            <a:schemeClr val="accent1"/>
+          </a:fillRef>
+          <a:effectRef idx="2">
+            <a:schemeClr val="accent1"/>
+          </a:effectRef>
+          <a:fontRef idx="minor">
+            <a:schemeClr val="lt1"/>
+          </a:fontRef>
+        </p:style>
+        <p:txBody>
+          <a:bodyPr rtlCol="0" anchor="ctr"/>
+          <a:lstStyle/>
+          <a:p>
+            <a:pPr algn="ctr"/>
+          </a:p>
+        </p:txBody>
+      </p:sp>
+      <p:sp>
+        <p:nvSpPr>
+          <p:cNvPr id="6" name="TextBox 5"/>
+          <p:cNvSpPr txBox="1"/>
+          <p:nvPr/>
+        </p:nvSpPr>
+        <p:spPr>
+          <a:xfrm>
+            <a:off x="868680" y="2148839"/>
+            <a:ext cx="4754880" cy="457200"/>
+          </a:xfrm>
+          <a:prstGeom prst="rect">
+            <a:avLst/>
+          </a:prstGeom>
+          <a:noFill/>
+        </p:spPr>
+        <p:txBody>
+          <a:bodyPr wrap="square" anchor="t" lIns="0" rIns="0" tIns="0" bIns="0">
+            <a:spAutoFit/>
+          </a:bodyPr>
+          <a:lstStyle/>
+          <a:p>
+            <a:pPr algn="l">
+              <a:spcBef>
+                <a:spcPts val="0"/>
+              </a:spcBef>
+              <a:spcAft>
+                <a:spcPts val="400"/>
+              </a:spcAft>
+            </a:pPr>
+            <a:r>
+              <a:rPr sz="2100" b="1">
+                <a:solidFill>
+                  <a:srgbClr val="2E5A88"/>
+                </a:solidFill>
+                <a:latin typeface="Meiryo"/>
+                <a:ea typeface="Meiryo"/>
+                <a:cs typeface="Meiryo"/>
+              </a:rPr>
+              <a:t>Claude Cowork</a:t>
+            </a:r>
+          </a:p>
+        </p:txBody>
+      </p:sp>
+      <p:sp>
+        <p:nvSpPr>
+          <p:cNvPr id="7" name="TextBox 6"/>
+          <p:cNvSpPr txBox="1"/>
+          <p:nvPr/>
+        </p:nvSpPr>
+        <p:spPr>
+          <a:xfrm>
+            <a:off x="868680" y="2624327"/>
+            <a:ext cx="4754880" cy="365760"/>
+          </a:xfrm>
+          <a:prstGeom prst="rect">
+            <a:avLst/>
+          </a:prstGeom>
+          <a:noFill/>
+        </p:spPr>
+        <p:txBody>
+          <a:bodyPr wrap="square" anchor="t" lIns="0" rIns="0" tIns="0" bIns="0">
+            <a:spAutoFit/>
+          </a:bodyPr>
+          <a:lstStyle/>
+          <a:p>
+            <a:pPr algn="l">
+              <a:spcBef>
+                <a:spcPts val="0"/>
+              </a:spcBef>
+              <a:spcAft>
+                <a:spcPts val="400"/>
+              </a:spcAft>
+            </a:pPr>
+            <a:r>
+              <a:rPr sz="1300" b="0">
+                <a:solidFill>
+                  <a:srgbClr val="5B6670"/>
+                </a:solidFill>
+                <a:latin typeface="Meiryo"/>
+                <a:ea typeface="Meiryo"/>
+                <a:cs typeface="Meiryo"/>
+              </a:rPr>
+              <a:t>ターミナル不要の業務エージェント</a:t>
+            </a:r>
+          </a:p>
+        </p:txBody>
+      </p:sp>
+      <p:sp>
+        <p:nvSpPr>
+          <p:cNvPr id="8" name="TextBox 7"/>
+          <p:cNvSpPr txBox="1"/>
+          <p:nvPr/>
+        </p:nvSpPr>
+        <p:spPr>
+          <a:xfrm>
+            <a:off x="868680" y="3063239"/>
+            <a:ext cx="4754880" cy="1874520"/>
+          </a:xfrm>
+          <a:prstGeom prst="rect">
+            <a:avLst/>
+          </a:prstGeom>
+          <a:noFill/>
+        </p:spPr>
+        <p:txBody>
+          <a:bodyPr wrap="square" anchor="t" lIns="0" rIns="0" tIns="0" bIns="0">
+            <a:spAutoFit/>
+          </a:bodyPr>
+          <a:lstStyle/>
+          <a:p>
+            <a:pPr algn="l">
+              <a:spcBef>
+                <a:spcPts val="0"/>
+              </a:spcBef>
+              <a:spcAft>
+                <a:spcPts val="900"/>
+              </a:spcAft>
+            </a:pPr>
+            <a:r>
+              <a:rPr sz="1300" b="1">
+                <a:solidFill>
+                  <a:srgbClr val="2E5A88"/>
+                </a:solidFill>
+                <a:latin typeface="Meiryo"/>
+                <a:ea typeface="Meiryo"/>
+                <a:cs typeface="Meiryo"/>
+              </a:rPr>
+              <a:t>•  </a:t>
+            </a:r>
+            <a:r>
+              <a:rPr sz="1300" b="0">
+                <a:solidFill>
+                  <a:srgbClr val="1E2832"/>
+                </a:solidFill>
+                <a:latin typeface="Meiryo"/>
+                <a:ea typeface="Meiryo"/>
+                <a:cs typeface="Meiryo"/>
+              </a:rPr>
+              <a:t>コーディング不要で、主に業務ユーザー向け</a:t>
+            </a:r>
+          </a:p>
+          <a:p>
+            <a:pPr algn="l">
+              <a:spcBef>
+                <a:spcPts val="0"/>
+              </a:spcBef>
+              <a:spcAft>
+                <a:spcPts val="900"/>
+              </a:spcAft>
+            </a:pPr>
+            <a:r>
+              <a:rPr sz="1300" b="1">
+                <a:solidFill>
+                  <a:srgbClr val="2E5A88"/>
+                </a:solidFill>
+                <a:latin typeface="Meiryo"/>
+                <a:ea typeface="Meiryo"/>
+                <a:cs typeface="Meiryo"/>
+              </a:rPr>
+              <a:t>•  </a:t>
+            </a:r>
+            <a:r>
+              <a:rPr sz="1300" b="0">
+                <a:solidFill>
+                  <a:srgbClr val="1E2832"/>
+                </a:solidFill>
+                <a:latin typeface="Meiryo"/>
+                <a:ea typeface="Meiryo"/>
+                <a:cs typeface="Meiryo"/>
+              </a:rPr>
+              <a:t>文書・スライド・表・レポートを作成</a:t>
+            </a:r>
+          </a:p>
+          <a:p>
+            <a:pPr algn="l">
+              <a:spcBef>
+                <a:spcPts val="0"/>
+              </a:spcBef>
+              <a:spcAft>
+                <a:spcPts val="900"/>
+              </a:spcAft>
+            </a:pPr>
+            <a:r>
+              <a:rPr sz="1300" b="1">
+                <a:solidFill>
+                  <a:srgbClr val="2E5A88"/>
+                </a:solidFill>
+                <a:latin typeface="Meiryo"/>
+                <a:ea typeface="Meiryo"/>
+                <a:cs typeface="Meiryo"/>
+              </a:rPr>
+              <a:t>•  </a:t>
+            </a:r>
+            <a:r>
+              <a:rPr sz="1300" b="0">
+                <a:solidFill>
+                  <a:srgbClr val="1E2832"/>
+                </a:solidFill>
+                <a:latin typeface="Meiryo"/>
+                <a:ea typeface="Meiryo"/>
+                <a:cs typeface="Meiryo"/>
+              </a:rPr>
+              <a:t>選んだフォルダのファイル＋Web＋MCP</a:t>
+            </a:r>
+          </a:p>
+          <a:p>
+            <a:pPr algn="l">
+              <a:spcBef>
+                <a:spcPts val="0"/>
+              </a:spcBef>
+              <a:spcAft>
+                <a:spcPts val="900"/>
+              </a:spcAft>
+            </a:pPr>
+            <a:r>
+              <a:rPr sz="1300" b="1">
+                <a:solidFill>
+                  <a:srgbClr val="2E5A88"/>
+                </a:solidFill>
+                <a:latin typeface="Meiryo"/>
+                <a:ea typeface="Meiryo"/>
+                <a:cs typeface="Meiryo"/>
+              </a:rPr>
+              <a:t>•  </a:t>
+            </a:r>
+            <a:r>
+              <a:rPr sz="1300" b="0">
+                <a:solidFill>
+                  <a:srgbClr val="1E2832"/>
+                </a:solidFill>
+                <a:latin typeface="Meiryo"/>
+                <a:ea typeface="Meiryo"/>
+                <a:cs typeface="Meiryo"/>
+              </a:rPr>
+              <a:t>調査・資料づくり・データ整理を任せる</a:t>
+            </a:r>
+          </a:p>
+        </p:txBody>
+      </p:sp>
+      <p:sp>
+        <p:nvSpPr>
+          <p:cNvPr id="9" name="Rounded Rectangle 8"/>
+          <p:cNvSpPr/>
+          <p:nvPr/>
+        </p:nvSpPr>
+        <p:spPr>
+          <a:xfrm>
+            <a:off x="6245352" y="1874519"/>
+            <a:ext cx="5394960" cy="3154680"/>
+          </a:xfrm>
+          <a:prstGeom prst="roundRect">
+            <a:avLst>
+              <a:gd name="adj" fmla="val 6000"/>
+            </a:avLst>
+          </a:prstGeom>
+          <a:solidFill>
+            <a:srgbClr val="FFFFFF"/>
+          </a:solidFill>
+          <a:ln w="12700">
+            <a:solidFill>
+              <a:srgbClr val="D8DEE4"/>
+            </a:solidFill>
+          </a:ln>
+          <a:effectLst/>
+        </p:spPr>
+        <p:style>
+          <a:lnRef idx="1">
+            <a:schemeClr val="accent1"/>
+          </a:lnRef>
+          <a:fillRef idx="3">
+            <a:schemeClr val="accent1"/>
+          </a:fillRef>
+          <a:effectRef idx="2">
+            <a:schemeClr val="accent1"/>
+          </a:effectRef>
+          <a:fontRef idx="minor">
+            <a:schemeClr val="lt1"/>
+          </a:fontRef>
+        </p:style>
+        <p:txBody>
+          <a:bodyPr rtlCol="0" anchor="ctr"/>
+          <a:lstStyle/>
+          <a:p>
+            <a:pPr algn="ctr"/>
+          </a:p>
+        </p:txBody>
+      </p:sp>
+      <p:sp>
+        <p:nvSpPr>
+          <p:cNvPr id="10" name="TextBox 9"/>
+          <p:cNvSpPr txBox="1"/>
+          <p:nvPr/>
+        </p:nvSpPr>
+        <p:spPr>
+          <a:xfrm>
+            <a:off x="6565392" y="2148839"/>
+            <a:ext cx="4754880" cy="457200"/>
+          </a:xfrm>
+          <a:prstGeom prst="rect">
+            <a:avLst/>
+          </a:prstGeom>
+          <a:noFill/>
+        </p:spPr>
+        <p:txBody>
+          <a:bodyPr wrap="square" anchor="t" lIns="0" rIns="0" tIns="0" bIns="0">
+            <a:spAutoFit/>
+          </a:bodyPr>
+          <a:lstStyle/>
+          <a:p>
+            <a:pPr algn="l">
+              <a:spcBef>
+                <a:spcPts val="0"/>
+              </a:spcBef>
+              <a:spcAft>
+                <a:spcPts val="400"/>
+              </a:spcAft>
+            </a:pPr>
+            <a:r>
+              <a:rPr sz="2100" b="1">
+                <a:solidFill>
+                  <a:srgbClr val="2E5A88"/>
+                </a:solidFill>
+                <a:latin typeface="Meiryo"/>
+                <a:ea typeface="Meiryo"/>
+                <a:cs typeface="Meiryo"/>
+              </a:rPr>
+              <a:t>Claude Code</a:t>
+            </a:r>
+          </a:p>
+        </p:txBody>
+      </p:sp>
+      <p:sp>
+        <p:nvSpPr>
+          <p:cNvPr id="11" name="TextBox 10"/>
+          <p:cNvSpPr txBox="1"/>
+          <p:nvPr/>
+        </p:nvSpPr>
+        <p:spPr>
+          <a:xfrm>
+            <a:off x="6565392" y="2624327"/>
+            <a:ext cx="4754880" cy="365760"/>
+          </a:xfrm>
+          <a:prstGeom prst="rect">
+            <a:avLst/>
+          </a:prstGeom>
+          <a:noFill/>
+        </p:spPr>
+        <p:txBody>
+          <a:bodyPr wrap="square" anchor="t" lIns="0" rIns="0" tIns="0" bIns="0">
+            <a:spAutoFit/>
+          </a:bodyPr>
+          <a:lstStyle/>
+          <a:p>
+            <a:pPr algn="l">
+              <a:spcBef>
+                <a:spcPts val="0"/>
+              </a:spcBef>
+              <a:spcAft>
+                <a:spcPts val="400"/>
+              </a:spcAft>
+            </a:pPr>
+            <a:r>
+              <a:rPr sz="1300" b="0">
+                <a:solidFill>
+                  <a:srgbClr val="5B6670"/>
+                </a:solidFill>
+                <a:latin typeface="Meiryo"/>
+                <a:ea typeface="Meiryo"/>
+                <a:cs typeface="Meiryo"/>
+              </a:rPr>
+              <a:t>開発者グレードの作業エージェント</a:t>
+            </a:r>
+          </a:p>
+        </p:txBody>
+      </p:sp>
+      <p:sp>
+        <p:nvSpPr>
+          <p:cNvPr id="12" name="TextBox 11"/>
+          <p:cNvSpPr txBox="1"/>
+          <p:nvPr/>
+        </p:nvSpPr>
+        <p:spPr>
+          <a:xfrm>
+            <a:off x="6565392" y="3063239"/>
+            <a:ext cx="4754880" cy="1874520"/>
+          </a:xfrm>
+          <a:prstGeom prst="rect">
+            <a:avLst/>
+          </a:prstGeom>
+          <a:noFill/>
+        </p:spPr>
+        <p:txBody>
+          <a:bodyPr wrap="square" anchor="t" lIns="0" rIns="0" tIns="0" bIns="0">
+            <a:spAutoFit/>
+          </a:bodyPr>
+          <a:lstStyle/>
+          <a:p>
+            <a:pPr algn="l">
+              <a:spcBef>
+                <a:spcPts val="0"/>
+              </a:spcBef>
+              <a:spcAft>
+                <a:spcPts val="900"/>
+              </a:spcAft>
+            </a:pPr>
+            <a:r>
+              <a:rPr sz="1300" b="1">
+                <a:solidFill>
+                  <a:srgbClr val="2E5A88"/>
+                </a:solidFill>
+                <a:latin typeface="Meiryo"/>
+                <a:ea typeface="Meiryo"/>
+                <a:cs typeface="Meiryo"/>
+              </a:rPr>
+              <a:t>•  </a:t>
+            </a:r>
+            <a:r>
+              <a:rPr sz="1300" b="0">
+                <a:solidFill>
+                  <a:srgbClr val="1E2832"/>
+                </a:solidFill>
+                <a:latin typeface="Meiryo"/>
+                <a:ea typeface="Meiryo"/>
+                <a:cs typeface="Meiryo"/>
+              </a:rPr>
+              <a:t>ターミナル(CLI)・プロジェクト単位</a:t>
+            </a:r>
+          </a:p>
+          <a:p>
+            <a:pPr algn="l">
+              <a:spcBef>
+                <a:spcPts val="0"/>
+              </a:spcBef>
+              <a:spcAft>
+                <a:spcPts val="900"/>
+              </a:spcAft>
+            </a:pPr>
+            <a:r>
+              <a:rPr sz="1300" b="1">
+                <a:solidFill>
+                  <a:srgbClr val="2E5A88"/>
+                </a:solidFill>
+                <a:latin typeface="Meiryo"/>
+                <a:ea typeface="Meiryo"/>
+                <a:cs typeface="Meiryo"/>
+              </a:rPr>
+              <a:t>•  </a:t>
+            </a:r>
+            <a:r>
+              <a:rPr sz="1300" b="0">
+                <a:solidFill>
+                  <a:srgbClr val="1E2832"/>
+                </a:solidFill>
+                <a:latin typeface="Meiryo"/>
+                <a:ea typeface="Meiryo"/>
+                <a:cs typeface="Meiryo"/>
+              </a:rPr>
+              <a:t>コード・リポジトリ・ファイルを操作</a:t>
+            </a:r>
+          </a:p>
+          <a:p>
+            <a:pPr algn="l">
+              <a:spcBef>
+                <a:spcPts val="0"/>
+              </a:spcBef>
+              <a:spcAft>
+                <a:spcPts val="900"/>
+              </a:spcAft>
+            </a:pPr>
+            <a:r>
+              <a:rPr sz="1300" b="1">
+                <a:solidFill>
+                  <a:srgbClr val="2E5A88"/>
+                </a:solidFill>
+                <a:latin typeface="Meiryo"/>
+                <a:ea typeface="Meiryo"/>
+                <a:cs typeface="Meiryo"/>
+              </a:rPr>
+              <a:t>•  </a:t>
+            </a:r>
+            <a:r>
+              <a:rPr sz="1300" b="0">
+                <a:solidFill>
+                  <a:srgbClr val="1E2832"/>
+                </a:solidFill>
+                <a:latin typeface="Meiryo"/>
+                <a:ea typeface="Meiryo"/>
+                <a:cs typeface="Meiryo"/>
+              </a:rPr>
+              <a:t>スクリプトやパイプラインで作り込み・自動化</a:t>
+            </a:r>
+          </a:p>
+          <a:p>
+            <a:pPr algn="l">
+              <a:spcBef>
+                <a:spcPts val="0"/>
+              </a:spcBef>
+              <a:spcAft>
+                <a:spcPts val="900"/>
+              </a:spcAft>
+            </a:pPr>
+            <a:r>
+              <a:rPr sz="1300" b="1">
+                <a:solidFill>
+                  <a:srgbClr val="2E5A88"/>
+                </a:solidFill>
+                <a:latin typeface="Meiryo"/>
+                <a:ea typeface="Meiryo"/>
+                <a:cs typeface="Meiryo"/>
+              </a:rPr>
+              <a:t>•  </a:t>
+            </a:r>
+            <a:r>
+              <a:rPr sz="1300" b="0">
+                <a:solidFill>
+                  <a:srgbClr val="1E2832"/>
+                </a:solidFill>
+                <a:latin typeface="Meiryo"/>
+                <a:ea typeface="Meiryo"/>
+                <a:cs typeface="Meiryo"/>
+              </a:rPr>
+              <a:t>データ処理やツールの作り込みはこちら</a:t>
+            </a:r>
+          </a:p>
+        </p:txBody>
+      </p:sp>
+      <p:sp>
+        <p:nvSpPr>
+          <p:cNvPr id="13" name="TextBox 12"/>
+          <p:cNvSpPr txBox="1"/>
+          <p:nvPr/>
+        </p:nvSpPr>
+        <p:spPr>
+          <a:xfrm>
+            <a:off x="548640" y="5257800"/>
+            <a:ext cx="10972800" cy="1005840"/>
+          </a:xfrm>
+          <a:prstGeom prst="rect">
+            <a:avLst/>
+          </a:prstGeom>
+          <a:noFill/>
+        </p:spPr>
+        <p:txBody>
+          <a:bodyPr wrap="square" anchor="t" lIns="0" rIns="0" tIns="0" bIns="0">
+            <a:spAutoFit/>
+          </a:bodyPr>
+          <a:lstStyle/>
+          <a:p>
+            <a:pPr algn="l">
+              <a:spcBef>
+                <a:spcPts val="0"/>
+              </a:spcBef>
+              <a:spcAft>
+                <a:spcPts val="500"/>
+              </a:spcAft>
+            </a:pPr>
+            <a:r>
+              <a:rPr sz="1500" b="1">
+                <a:solidFill>
+                  <a:srgbClr val="2E5A88"/>
+                </a:solidFill>
+                <a:latin typeface="Meiryo"/>
+                <a:ea typeface="Meiryo"/>
+                <a:cs typeface="Meiryo"/>
+              </a:rPr>
+              <a:t>使い分け：</a:t>
+            </a:r>
+          </a:p>
+          <a:p>
+            <a:pPr algn="l">
+              <a:spcBef>
+                <a:spcPts val="0"/>
+              </a:spcBef>
+              <a:spcAft>
+                <a:spcPts val="500"/>
+              </a:spcAft>
+            </a:pPr>
+            <a:r>
+              <a:rPr sz="1400" b="0">
+                <a:solidFill>
+                  <a:srgbClr val="1E2832"/>
+                </a:solidFill>
+                <a:latin typeface="Meiryo"/>
+                <a:ea typeface="Meiryo"/>
+                <a:cs typeface="Meiryo"/>
+              </a:rPr>
+              <a:t>・コーディングは不要で、日常業務のタスク（調査・資料・データ整理）を任せたいとき → Claude Cowork</a:t>
+            </a:r>
+          </a:p>
+          <a:p>
+            <a:pPr algn="l">
+              <a:spcBef>
+                <a:spcPts val="0"/>
+              </a:spcBef>
+              <a:spcAft>
+                <a:spcPts val="500"/>
+              </a:spcAft>
+            </a:pPr>
+            <a:r>
+              <a:rPr sz="1400" b="0">
+                <a:solidFill>
+                  <a:srgbClr val="1E2832"/>
+                </a:solidFill>
+                <a:latin typeface="Meiryo"/>
+                <a:ea typeface="Meiryo"/>
+                <a:cs typeface="Meiryo"/>
+              </a:rPr>
+              <a:t>・コードやCLIで作り込み・自動化・リポジトリ操作をしたいとき → Claude Code</a:t>
+            </a:r>
+          </a:p>
+        </p:txBody>
+      </p:sp>
+      <p:sp>
+        <p:nvSpPr>
+          <p:cNvPr id="14" name="TextBox 13"/>
           <p:cNvSpPr txBox="1"/>
           <p:nvPr/>
         </p:nvSpPr>
@@ -5938,7 +5799,7 @@
               </a:spcAft>
             </a:pPr>
             <a:r>
-              <a:rPr sz="2800" b="1">
+              <a:rPr sz="3000" b="1">
                 <a:solidFill>
                   <a:srgbClr val="1E2832"/>
                 </a:solidFill>
@@ -5946,7 +5807,7 @@
                 <a:ea typeface="Meiryo"/>
                 <a:cs typeface="Meiryo"/>
               </a:rPr>
-              <a:t>Claude Cowork と Claude Code：同じ頭脳、入り口が違う</a:t>
+              <a:t>【参考】Claude Code と同じ土俵の競合ツール</a:t>
             </a:r>
           </a:p>
         </p:txBody>
@@ -5959,7 +5820,7 @@
         </p:nvSpPr>
         <p:spPr>
           <a:xfrm>
-            <a:off x="548640" y="1188720"/>
+            <a:off x="548640" y="1216152"/>
             <a:ext cx="10972800" cy="548640"/>
           </a:xfrm>
           <a:prstGeom prst="rect">
@@ -5990,7 +5851,7 @@
                 <a:ea typeface="Meiryo"/>
                 <a:cs typeface="Meiryo"/>
               </a:rPr>
-              <a:t>どちらも同じClaudeのエージェント基盤を使っています。違いは「誰が・何に使うか」で、目的に応じて選びます。</a:t>
+              <a:t>Claude Code と同じ土俵のツール。ターミナル(CLI)からコードやファイルを自律操作して開発を進めます。</a:t>
             </a:r>
           </a:p>
         </p:txBody>
@@ -6003,8 +5864,8 @@
         </p:nvSpPr>
         <p:spPr>
           <a:xfrm>
-            <a:off x="548640" y="1874519"/>
-            <a:ext cx="5394960" cy="3154680"/>
+            <a:off x="548640" y="1965960"/>
+            <a:ext cx="3511296" cy="3520440"/>
           </a:xfrm>
           <a:prstGeom prst="roundRect">
             <a:avLst>
@@ -6051,8 +5912,8 @@
         </p:nvSpPr>
         <p:spPr>
           <a:xfrm>
-            <a:off x="868680" y="2148839"/>
-            <a:ext cx="4754880" cy="457200"/>
+            <a:off x="822959" y="2221991"/>
+            <a:ext cx="2962656" cy="457200"/>
           </a:xfrm>
           <a:prstGeom prst="rect">
             <a:avLst/>
@@ -6074,7 +5935,7 @@
               </a:spcAft>
             </a:pPr>
             <a:r>
-              <a:rPr sz="2100" b="1">
+              <a:rPr sz="2000" b="1">
                 <a:solidFill>
                   <a:srgbClr val="2E5A88"/>
                 </a:solidFill>
@@ -6082,7 +5943,7 @@
                 <a:ea typeface="Meiryo"/>
                 <a:cs typeface="Meiryo"/>
               </a:rPr>
-              <a:t>Claude Cowork</a:t>
+              <a:t>Claude Code</a:t>
             </a:r>
           </a:p>
         </p:txBody>
@@ -6095,8 +5956,8 @@
         </p:nvSpPr>
         <p:spPr>
           <a:xfrm>
-            <a:off x="868680" y="2624327"/>
-            <a:ext cx="4754880" cy="365760"/>
+            <a:off x="822959" y="2679191"/>
+            <a:ext cx="2962656" cy="320040"/>
           </a:xfrm>
           <a:prstGeom prst="rect">
             <a:avLst/>
@@ -6118,7 +5979,7 @@
               </a:spcAft>
             </a:pPr>
             <a:r>
-              <a:rPr sz="1300" b="0">
+              <a:rPr sz="1200" b="0">
                 <a:solidFill>
                   <a:srgbClr val="5B6670"/>
                 </a:solidFill>
@@ -6126,7 +5987,7 @@
                 <a:ea typeface="Meiryo"/>
                 <a:cs typeface="Meiryo"/>
               </a:rPr>
-              <a:t>ターミナル不要の業務エージェント</a:t>
+              <a:t>Anthropic</a:t>
             </a:r>
           </a:p>
         </p:txBody>
@@ -6139,8 +6000,8 @@
         </p:nvSpPr>
         <p:spPr>
           <a:xfrm>
-            <a:off x="868680" y="3063239"/>
-            <a:ext cx="4754880" cy="1874520"/>
+            <a:off x="822959" y="3154680"/>
+            <a:ext cx="2962656" cy="2148840"/>
           </a:xfrm>
           <a:prstGeom prst="rect">
             <a:avLst/>
@@ -6158,22 +6019,11 @@
                 <a:spcPts val="0"/>
               </a:spcBef>
               <a:spcAft>
-                <a:spcPts val="900"/>
+                <a:spcPts val="1000"/>
               </a:spcAft>
             </a:pPr>
             <a:r>
-              <a:rPr sz="1300" b="1">
-                <a:solidFill>
-                  <a:srgbClr val="2E5A88"/>
-                </a:solidFill>
-                <a:latin typeface="Meiryo"/>
-                <a:ea typeface="Meiryo"/>
-                <a:cs typeface="Meiryo"/>
-              </a:rPr>
-              <a:t>•  </a:t>
-            </a:r>
-            <a:r>
-              <a:rPr sz="1300" b="0">
+              <a:rPr sz="1200" b="1">
                 <a:solidFill>
                   <a:srgbClr val="1E2832"/>
                 </a:solidFill>
@@ -6181,7 +6031,18 @@
                 <a:ea typeface="Meiryo"/>
                 <a:cs typeface="Meiryo"/>
               </a:rPr>
-              <a:t>コーディング不要で、主に業務ユーザー向け</a:t>
+              <a:t>形態：</a:t>
+            </a:r>
+            <a:r>
+              <a:rPr sz="1200" b="0">
+                <a:solidFill>
+                  <a:srgbClr val="1E2832"/>
+                </a:solidFill>
+                <a:latin typeface="Meiryo"/>
+                <a:ea typeface="Meiryo"/>
+                <a:cs typeface="Meiryo"/>
+              </a:rPr>
+              <a:t>CLI＋デスクトップの自律型</a:t>
             </a:r>
           </a:p>
           <a:p>
@@ -6190,22 +6051,11 @@
                 <a:spcPts val="0"/>
               </a:spcBef>
               <a:spcAft>
-                <a:spcPts val="900"/>
+                <a:spcPts val="1000"/>
               </a:spcAft>
             </a:pPr>
             <a:r>
-              <a:rPr sz="1300" b="1">
-                <a:solidFill>
-                  <a:srgbClr val="2E5A88"/>
-                </a:solidFill>
-                <a:latin typeface="Meiryo"/>
-                <a:ea typeface="Meiryo"/>
-                <a:cs typeface="Meiryo"/>
-              </a:rPr>
-              <a:t>•  </a:t>
-            </a:r>
-            <a:r>
-              <a:rPr sz="1300" b="0">
+              <a:rPr sz="1200" b="1">
                 <a:solidFill>
                   <a:srgbClr val="1E2832"/>
                 </a:solidFill>
@@ -6213,7 +6063,18 @@
                 <a:ea typeface="Meiryo"/>
                 <a:cs typeface="Meiryo"/>
               </a:rPr>
-              <a:t>文書・スライド・表・レポートを作成</a:t>
+              <a:t>モデル：</a:t>
+            </a:r>
+            <a:r>
+              <a:rPr sz="1200" b="0">
+                <a:solidFill>
+                  <a:srgbClr val="1E2832"/>
+                </a:solidFill>
+                <a:latin typeface="Meiryo"/>
+                <a:ea typeface="Meiryo"/>
+                <a:cs typeface="Meiryo"/>
+              </a:rPr>
+              <a:t>Claude</a:t>
             </a:r>
           </a:p>
           <a:p>
@@ -6222,22 +6083,11 @@
                 <a:spcPts val="0"/>
               </a:spcBef>
               <a:spcAft>
-                <a:spcPts val="900"/>
+                <a:spcPts val="1000"/>
               </a:spcAft>
             </a:pPr>
             <a:r>
-              <a:rPr sz="1300" b="1">
-                <a:solidFill>
-                  <a:srgbClr val="2E5A88"/>
-                </a:solidFill>
-                <a:latin typeface="Meiryo"/>
-                <a:ea typeface="Meiryo"/>
-                <a:cs typeface="Meiryo"/>
-              </a:rPr>
-              <a:t>•  </a:t>
-            </a:r>
-            <a:r>
-              <a:rPr sz="1300" b="0">
+              <a:rPr sz="1200" b="1">
                 <a:solidFill>
                   <a:srgbClr val="1E2832"/>
                 </a:solidFill>
@@ -6245,31 +6095,10 @@
                 <a:ea typeface="Meiryo"/>
                 <a:cs typeface="Meiryo"/>
               </a:rPr>
-              <a:t>選んだフォルダのファイル＋Web＋MCP</a:t>
-            </a:r>
-          </a:p>
-          <a:p>
-            <a:pPr algn="l">
-              <a:spcBef>
-                <a:spcPts val="0"/>
-              </a:spcBef>
-              <a:spcAft>
-                <a:spcPts val="900"/>
-              </a:spcAft>
-            </a:pPr>
-            <a:r>
-              <a:rPr sz="1300" b="1">
-                <a:solidFill>
-                  <a:srgbClr val="2E5A88"/>
-                </a:solidFill>
-                <a:latin typeface="Meiryo"/>
-                <a:ea typeface="Meiryo"/>
-                <a:cs typeface="Meiryo"/>
-              </a:rPr>
-              <a:t>•  </a:t>
-            </a:r>
-            <a:r>
-              <a:rPr sz="1300" b="0">
+              <a:t>特徴：</a:t>
+            </a:r>
+            <a:r>
+              <a:rPr sz="1200" b="0">
                 <a:solidFill>
                   <a:srgbClr val="1E2832"/>
                 </a:solidFill>
@@ -6277,7 +6106,7 @@
                 <a:ea typeface="Meiryo"/>
                 <a:cs typeface="Meiryo"/>
               </a:rPr>
-              <a:t>調査・資料づくり・データ整理を任せる</a:t>
+              <a:t>スキルやMCPで拡張できる</a:t>
             </a:r>
           </a:p>
         </p:txBody>
@@ -6290,8 +6119,8 @@
         </p:nvSpPr>
         <p:spPr>
           <a:xfrm>
-            <a:off x="6245352" y="1874519"/>
-            <a:ext cx="5394960" cy="3154680"/>
+            <a:off x="4334255" y="1965960"/>
+            <a:ext cx="3511296" cy="3520440"/>
           </a:xfrm>
           <a:prstGeom prst="roundRect">
             <a:avLst>
@@ -6338,8 +6167,8 @@
         </p:nvSpPr>
         <p:spPr>
           <a:xfrm>
-            <a:off x="6565392" y="2148839"/>
-            <a:ext cx="4754880" cy="457200"/>
+            <a:off x="4608575" y="2221991"/>
+            <a:ext cx="2962656" cy="457200"/>
           </a:xfrm>
           <a:prstGeom prst="rect">
             <a:avLst/>
@@ -6361,7 +6190,7 @@
               </a:spcAft>
             </a:pPr>
             <a:r>
-              <a:rPr sz="2100" b="1">
+              <a:rPr sz="2000" b="1">
                 <a:solidFill>
                   <a:srgbClr val="2E5A88"/>
                 </a:solidFill>
@@ -6369,7 +6198,7 @@
                 <a:ea typeface="Meiryo"/>
                 <a:cs typeface="Meiryo"/>
               </a:rPr>
-              <a:t>Claude Code</a:t>
+              <a:t>OpenAI Codex</a:t>
             </a:r>
           </a:p>
         </p:txBody>
@@ -6382,8 +6211,8 @@
         </p:nvSpPr>
         <p:spPr>
           <a:xfrm>
-            <a:off x="6565392" y="2624327"/>
-            <a:ext cx="4754880" cy="365760"/>
+            <a:off x="4608575" y="2679191"/>
+            <a:ext cx="2962656" cy="320040"/>
           </a:xfrm>
           <a:prstGeom prst="rect">
             <a:avLst/>
@@ -6405,7 +6234,7 @@
               </a:spcAft>
             </a:pPr>
             <a:r>
-              <a:rPr sz="1300" b="0">
+              <a:rPr sz="1200" b="0">
                 <a:solidFill>
                   <a:srgbClr val="5B6670"/>
                 </a:solidFill>
@@ -6413,7 +6242,7 @@
                 <a:ea typeface="Meiryo"/>
                 <a:cs typeface="Meiryo"/>
               </a:rPr>
-              <a:t>開発者グレードの作業エージェント</a:t>
+              <a:t>OpenAI</a:t>
             </a:r>
           </a:p>
         </p:txBody>
@@ -6426,8 +6255,8 @@
         </p:nvSpPr>
         <p:spPr>
           <a:xfrm>
-            <a:off x="6565392" y="3063239"/>
-            <a:ext cx="4754880" cy="1874520"/>
+            <a:off x="4608575" y="3154680"/>
+            <a:ext cx="2962656" cy="2148840"/>
           </a:xfrm>
           <a:prstGeom prst="rect">
             <a:avLst/>
@@ -6445,22 +6274,11 @@
                 <a:spcPts val="0"/>
               </a:spcBef>
               <a:spcAft>
-                <a:spcPts val="900"/>
+                <a:spcPts val="1000"/>
               </a:spcAft>
             </a:pPr>
             <a:r>
-              <a:rPr sz="1300" b="1">
-                <a:solidFill>
-                  <a:srgbClr val="2E5A88"/>
-                </a:solidFill>
-                <a:latin typeface="Meiryo"/>
-                <a:ea typeface="Meiryo"/>
-                <a:cs typeface="Meiryo"/>
-              </a:rPr>
-              <a:t>•  </a:t>
-            </a:r>
-            <a:r>
-              <a:rPr sz="1300" b="0">
+              <a:rPr sz="1200" b="1">
                 <a:solidFill>
                   <a:srgbClr val="1E2832"/>
                 </a:solidFill>
@@ -6468,7 +6286,18 @@
                 <a:ea typeface="Meiryo"/>
                 <a:cs typeface="Meiryo"/>
               </a:rPr>
-              <a:t>ターミナル(CLI)・プロジェクト単位</a:t>
+              <a:t>形態：</a:t>
+            </a:r>
+            <a:r>
+              <a:rPr sz="1200" b="0">
+                <a:solidFill>
+                  <a:srgbClr val="1E2832"/>
+                </a:solidFill>
+                <a:latin typeface="Meiryo"/>
+                <a:ea typeface="Meiryo"/>
+                <a:cs typeface="Meiryo"/>
+              </a:rPr>
+              <a:t>CLI(OSS)＋クラウド＋IDE拡張</a:t>
             </a:r>
           </a:p>
           <a:p>
@@ -6477,22 +6306,11 @@
                 <a:spcPts val="0"/>
               </a:spcBef>
               <a:spcAft>
-                <a:spcPts val="900"/>
+                <a:spcPts val="1000"/>
               </a:spcAft>
             </a:pPr>
             <a:r>
-              <a:rPr sz="1300" b="1">
-                <a:solidFill>
-                  <a:srgbClr val="2E5A88"/>
-                </a:solidFill>
-                <a:latin typeface="Meiryo"/>
-                <a:ea typeface="Meiryo"/>
-                <a:cs typeface="Meiryo"/>
-              </a:rPr>
-              <a:t>•  </a:t>
-            </a:r>
-            <a:r>
-              <a:rPr sz="1300" b="0">
+              <a:rPr sz="1200" b="1">
                 <a:solidFill>
                   <a:srgbClr val="1E2832"/>
                 </a:solidFill>
@@ -6500,7 +6318,18 @@
                 <a:ea typeface="Meiryo"/>
                 <a:cs typeface="Meiryo"/>
               </a:rPr>
-              <a:t>コード・リポジトリ・ファイルを操作</a:t>
+              <a:t>モデル：</a:t>
+            </a:r>
+            <a:r>
+              <a:rPr sz="1200" b="0">
+                <a:solidFill>
+                  <a:srgbClr val="1E2832"/>
+                </a:solidFill>
+                <a:latin typeface="Meiryo"/>
+                <a:ea typeface="Meiryo"/>
+                <a:cs typeface="Meiryo"/>
+              </a:rPr>
+              <a:t>GPT-5-codex 系</a:t>
             </a:r>
           </a:p>
           <a:p>
@@ -6509,22 +6338,11 @@
                 <a:spcPts val="0"/>
               </a:spcBef>
               <a:spcAft>
-                <a:spcPts val="900"/>
+                <a:spcPts val="1000"/>
               </a:spcAft>
             </a:pPr>
             <a:r>
-              <a:rPr sz="1300" b="1">
-                <a:solidFill>
-                  <a:srgbClr val="2E5A88"/>
-                </a:solidFill>
-                <a:latin typeface="Meiryo"/>
-                <a:ea typeface="Meiryo"/>
-                <a:cs typeface="Meiryo"/>
-              </a:rPr>
-              <a:t>•  </a:t>
-            </a:r>
-            <a:r>
-              <a:rPr sz="1300" b="0">
+              <a:rPr sz="1200" b="1">
                 <a:solidFill>
                   <a:srgbClr val="1E2832"/>
                 </a:solidFill>
@@ -6532,20 +6350,102 @@
                 <a:ea typeface="Meiryo"/>
                 <a:cs typeface="Meiryo"/>
               </a:rPr>
-              <a:t>スクリプトやパイプラインで作り込み・自動化</a:t>
-            </a:r>
-          </a:p>
+              <a:t>特徴：</a:t>
+            </a:r>
+            <a:r>
+              <a:rPr sz="1200" b="0">
+                <a:solidFill>
+                  <a:srgbClr val="1E2832"/>
+                </a:solidFill>
+                <a:latin typeface="Meiryo"/>
+                <a:ea typeface="Meiryo"/>
+                <a:cs typeface="Meiryo"/>
+              </a:rPr>
+              <a:t>ローカルとクラウドを行き来</a:t>
+            </a:r>
+          </a:p>
+        </p:txBody>
+      </p:sp>
+      <p:sp>
+        <p:nvSpPr>
+          <p:cNvPr id="13" name="Rounded Rectangle 12"/>
+          <p:cNvSpPr/>
+          <p:nvPr/>
+        </p:nvSpPr>
+        <p:spPr>
+          <a:xfrm>
+            <a:off x="8119871" y="1965960"/>
+            <a:ext cx="3511296" cy="3520440"/>
+          </a:xfrm>
+          <a:prstGeom prst="roundRect">
+            <a:avLst>
+              <a:gd name="adj" fmla="val 6000"/>
+            </a:avLst>
+          </a:prstGeom>
+          <a:solidFill>
+            <a:srgbClr val="FFFFFF"/>
+          </a:solidFill>
+          <a:ln w="12700">
+            <a:solidFill>
+              <a:srgbClr val="D8DEE4"/>
+            </a:solidFill>
+          </a:ln>
+          <a:effectLst/>
+        </p:spPr>
+        <p:style>
+          <a:lnRef idx="1">
+            <a:schemeClr val="accent1"/>
+          </a:lnRef>
+          <a:fillRef idx="3">
+            <a:schemeClr val="accent1"/>
+          </a:fillRef>
+          <a:effectRef idx="2">
+            <a:schemeClr val="accent1"/>
+          </a:effectRef>
+          <a:fontRef idx="minor">
+            <a:schemeClr val="lt1"/>
+          </a:fontRef>
+        </p:style>
+        <p:txBody>
+          <a:bodyPr rtlCol="0" anchor="ctr"/>
+          <a:lstStyle/>
+          <a:p>
+            <a:pPr algn="ctr"/>
+          </a:p>
+        </p:txBody>
+      </p:sp>
+      <p:sp>
+        <p:nvSpPr>
+          <p:cNvPr id="14" name="TextBox 13"/>
+          <p:cNvSpPr txBox="1"/>
+          <p:nvPr/>
+        </p:nvSpPr>
+        <p:spPr>
+          <a:xfrm>
+            <a:off x="8394192" y="2221991"/>
+            <a:ext cx="2962656" cy="457200"/>
+          </a:xfrm>
+          <a:prstGeom prst="rect">
+            <a:avLst/>
+          </a:prstGeom>
+          <a:noFill/>
+        </p:spPr>
+        <p:txBody>
+          <a:bodyPr wrap="square" anchor="t" lIns="0" rIns="0" tIns="0" bIns="0">
+            <a:spAutoFit/>
+          </a:bodyPr>
+          <a:lstStyle/>
           <a:p>
             <a:pPr algn="l">
               <a:spcBef>
                 <a:spcPts val="0"/>
               </a:spcBef>
               <a:spcAft>
-                <a:spcPts val="900"/>
+                <a:spcPts val="400"/>
               </a:spcAft>
             </a:pPr>
             <a:r>
-              <a:rPr sz="1300" b="1">
+              <a:rPr sz="2000" b="1">
                 <a:solidFill>
                   <a:srgbClr val="2E5A88"/>
                 </a:solidFill>
@@ -6553,32 +6453,21 @@
                 <a:ea typeface="Meiryo"/>
                 <a:cs typeface="Meiryo"/>
               </a:rPr>
-              <a:t>•  </a:t>
-            </a:r>
-            <a:r>
-              <a:rPr sz="1300" b="0">
-                <a:solidFill>
-                  <a:srgbClr val="1E2832"/>
-                </a:solidFill>
-                <a:latin typeface="Meiryo"/>
-                <a:ea typeface="Meiryo"/>
-                <a:cs typeface="Meiryo"/>
-              </a:rPr>
-              <a:t>データ処理やツールの作り込みはこちら</a:t>
-            </a:r>
-          </a:p>
-        </p:txBody>
-      </p:sp>
-      <p:sp>
-        <p:nvSpPr>
-          <p:cNvPr id="13" name="TextBox 12"/>
+              <a:t>Gemini CLI</a:t>
+            </a:r>
+          </a:p>
+        </p:txBody>
+      </p:sp>
+      <p:sp>
+        <p:nvSpPr>
+          <p:cNvPr id="15" name="TextBox 14"/>
           <p:cNvSpPr txBox="1"/>
           <p:nvPr/>
         </p:nvSpPr>
         <p:spPr>
           <a:xfrm>
-            <a:off x="548640" y="5257800"/>
-            <a:ext cx="10972800" cy="1005840"/>
+            <a:off x="8394192" y="2679191"/>
+            <a:ext cx="2962656" cy="320040"/>
           </a:xfrm>
           <a:prstGeom prst="rect">
             <a:avLst/>
@@ -6596,32 +6485,55 @@
                 <a:spcPts val="0"/>
               </a:spcBef>
               <a:spcAft>
-                <a:spcPts val="500"/>
+                <a:spcPts val="400"/>
               </a:spcAft>
             </a:pPr>
             <a:r>
-              <a:rPr sz="1500" b="1">
-                <a:solidFill>
-                  <a:srgbClr val="2E5A88"/>
-                </a:solidFill>
-                <a:latin typeface="Meiryo"/>
-                <a:ea typeface="Meiryo"/>
-                <a:cs typeface="Meiryo"/>
-              </a:rPr>
-              <a:t>使い分け：</a:t>
-            </a:r>
-          </a:p>
+              <a:rPr sz="1200" b="0">
+                <a:solidFill>
+                  <a:srgbClr val="5B6670"/>
+                </a:solidFill>
+                <a:latin typeface="Meiryo"/>
+                <a:ea typeface="Meiryo"/>
+                <a:cs typeface="Meiryo"/>
+              </a:rPr>
+              <a:t>Google</a:t>
+            </a:r>
+          </a:p>
+        </p:txBody>
+      </p:sp>
+      <p:sp>
+        <p:nvSpPr>
+          <p:cNvPr id="16" name="TextBox 15"/>
+          <p:cNvSpPr txBox="1"/>
+          <p:nvPr/>
+        </p:nvSpPr>
+        <p:spPr>
+          <a:xfrm>
+            <a:off x="8394192" y="3154680"/>
+            <a:ext cx="2962656" cy="2148840"/>
+          </a:xfrm>
+          <a:prstGeom prst="rect">
+            <a:avLst/>
+          </a:prstGeom>
+          <a:noFill/>
+        </p:spPr>
+        <p:txBody>
+          <a:bodyPr wrap="square" anchor="t" lIns="0" rIns="0" tIns="0" bIns="0">
+            <a:spAutoFit/>
+          </a:bodyPr>
+          <a:lstStyle/>
           <a:p>
             <a:pPr algn="l">
               <a:spcBef>
                 <a:spcPts val="0"/>
               </a:spcBef>
               <a:spcAft>
-                <a:spcPts val="500"/>
+                <a:spcPts val="1000"/>
               </a:spcAft>
             </a:pPr>
             <a:r>
-              <a:rPr sz="1400" b="0">
+              <a:rPr sz="1200" b="1">
                 <a:solidFill>
                   <a:srgbClr val="1E2832"/>
                 </a:solidFill>
@@ -6629,7 +6541,18 @@
                 <a:ea typeface="Meiryo"/>
                 <a:cs typeface="Meiryo"/>
               </a:rPr>
-              <a:t>・コーディングは不要で、日常業務のタスク（調査・資料・データ整理）を任せたいとき → Claude Cowork</a:t>
+              <a:t>形態：</a:t>
+            </a:r>
+            <a:r>
+              <a:rPr sz="1200" b="0">
+                <a:solidFill>
+                  <a:srgbClr val="1E2832"/>
+                </a:solidFill>
+                <a:latin typeface="Meiryo"/>
+                <a:ea typeface="Meiryo"/>
+                <a:cs typeface="Meiryo"/>
+              </a:rPr>
+              <a:t>OSSのターミナル型エージェント</a:t>
             </a:r>
           </a:p>
           <a:p>
@@ -6638,11 +6561,11 @@
                 <a:spcPts val="0"/>
               </a:spcBef>
               <a:spcAft>
-                <a:spcPts val="500"/>
+                <a:spcPts val="1000"/>
               </a:spcAft>
             </a:pPr>
             <a:r>
-              <a:rPr sz="1400" b="0">
+              <a:rPr sz="1200" b="1">
                 <a:solidFill>
                   <a:srgbClr val="1E2832"/>
                 </a:solidFill>
@@ -6650,14 +6573,112 @@
                 <a:ea typeface="Meiryo"/>
                 <a:cs typeface="Meiryo"/>
               </a:rPr>
-              <a:t>・コードやCLIで作り込み・自動化・リポジトリ操作をしたいとき → Claude Code</a:t>
-            </a:r>
-          </a:p>
-        </p:txBody>
-      </p:sp>
-      <p:sp>
-        <p:nvSpPr>
-          <p:cNvPr id="14" name="TextBox 13"/>
+              <a:t>モデル：</a:t>
+            </a:r>
+            <a:r>
+              <a:rPr sz="1200" b="0">
+                <a:solidFill>
+                  <a:srgbClr val="1E2832"/>
+                </a:solidFill>
+                <a:latin typeface="Meiryo"/>
+                <a:ea typeface="Meiryo"/>
+                <a:cs typeface="Meiryo"/>
+              </a:rPr>
+              <a:t>Gemini</a:t>
+            </a:r>
+          </a:p>
+          <a:p>
+            <a:pPr algn="l">
+              <a:spcBef>
+                <a:spcPts val="0"/>
+              </a:spcBef>
+              <a:spcAft>
+                <a:spcPts val="1000"/>
+              </a:spcAft>
+            </a:pPr>
+            <a:r>
+              <a:rPr sz="1200" b="1">
+                <a:solidFill>
+                  <a:srgbClr val="1E2832"/>
+                </a:solidFill>
+                <a:latin typeface="Meiryo"/>
+                <a:ea typeface="Meiryo"/>
+                <a:cs typeface="Meiryo"/>
+              </a:rPr>
+              <a:t>特徴：</a:t>
+            </a:r>
+            <a:r>
+              <a:rPr sz="1200" b="0">
+                <a:solidFill>
+                  <a:srgbClr val="1E2832"/>
+                </a:solidFill>
+                <a:latin typeface="Meiryo"/>
+                <a:ea typeface="Meiryo"/>
+                <a:cs typeface="Meiryo"/>
+              </a:rPr>
+              <a:t>後継のAntigravity CLIへ移行中</a:t>
+            </a:r>
+          </a:p>
+        </p:txBody>
+      </p:sp>
+      <p:sp>
+        <p:nvSpPr>
+          <p:cNvPr id="17" name="TextBox 16"/>
+          <p:cNvSpPr txBox="1"/>
+          <p:nvPr/>
+        </p:nvSpPr>
+        <p:spPr>
+          <a:xfrm>
+            <a:off x="548640" y="5715000"/>
+            <a:ext cx="10972800" cy="640080"/>
+          </a:xfrm>
+          <a:prstGeom prst="rect">
+            <a:avLst/>
+          </a:prstGeom>
+          <a:noFill/>
+        </p:spPr>
+        <p:txBody>
+          <a:bodyPr wrap="square" anchor="t" lIns="0" rIns="0" tIns="0" bIns="0">
+            <a:spAutoFit/>
+          </a:bodyPr>
+          <a:lstStyle/>
+          <a:p>
+            <a:pPr algn="l">
+              <a:spcBef>
+                <a:spcPts val="0"/>
+              </a:spcBef>
+              <a:spcAft>
+                <a:spcPts val="400"/>
+              </a:spcAft>
+            </a:pPr>
+            <a:r>
+              <a:rPr sz="1500" b="1">
+                <a:solidFill>
+                  <a:srgbClr val="2E5A88"/>
+                </a:solidFill>
+                <a:latin typeface="Meiryo"/>
+                <a:ea typeface="Meiryo"/>
+                <a:cs typeface="Meiryo"/>
+              </a:rPr>
+              <a:t>選ぶ基準：</a:t>
+            </a:r>
+            <a:r>
+              <a:rPr sz="1500" b="0">
+                <a:solidFill>
+                  <a:srgbClr val="1E2832"/>
+                </a:solidFill>
+                <a:latin typeface="Meiryo"/>
+                <a:ea typeface="Meiryo"/>
+                <a:cs typeface="Meiryo"/>
+              </a:rPr>
+              <a:t>モデル品質・既存エコシステム・社内方針で決めます。用途が重なるため、基本はどれか1つを選びます。</a:t>
+            </a:r>
+          </a:p>
+        </p:txBody>
+      </p:sp>
+      <p:sp>
+        <p:nvSpPr>
+          <p:cNvPr id="18" name="TextBox 17"/>
           <p:cNvSpPr txBox="1"/>
           <p:nvPr/>
         </p:nvSpPr>

--- a/docs/03_参考資料/Copilot_Cowork_競合比較.pptx
+++ b/docs/03_参考資料/Copilot_Cowork_競合比較.pptx
@@ -3500,7 +3500,7 @@
                 <a:ea typeface="Meiryo"/>
                 <a:cs typeface="Meiryo"/>
               </a:rPr>
-              <a:t>両者は競合というより役割が異なります。どのデータに基づき、どんな統治の下で動くかで使い分けます。</a:t>
+              <a:t>似た作業はどちらもできます。差が出るのは、仕事の“難所”がどちらの強みに当たるかです。</a:t>
             </a:r>
           </a:p>
         </p:txBody>
@@ -3617,7 +3617,81 @@
                           <a:ea typeface="Meiryo"/>
                           <a:cs typeface="Meiryo"/>
                         </a:rPr>
-                        <a:t>立ち位置</a:t>
+                        <a:t>得意（強み）</a:t>
+                      </a:r>
+                    </a:p>
+                  </a:txBody>
+                  <a:tcPr marL="109728" marR="109728" marT="54864" marB="54864" anchor="ctr">
+                    <a:solidFill>
+                      <a:srgbClr val="EAF0F6"/>
+                    </a:solidFill>
+                  </a:tcPr>
+                </a:tc>
+                <a:tc>
+                  <a:txBody>
+                    <a:bodyPr wrap="square"/>
+                    <a:lstStyle/>
+                    <a:p>
+                      <a:r>
+                        <a:rPr sz="1200" b="1">
+                          <a:solidFill>
+                            <a:srgbClr val="1E2832"/>
+                          </a:solidFill>
+                          <a:latin typeface="Meiryo"/>
+                          <a:ea typeface="Meiryo"/>
+                          <a:cs typeface="Meiryo"/>
+                        </a:rPr>
+                        <a:t>自社データへの接続・統合</a:t>
+                      </a:r>
+                    </a:p>
+                  </a:txBody>
+                  <a:tcPr marL="109728" marR="109728" marT="54864" marB="54864" anchor="ctr">
+                    <a:solidFill>
+                      <a:srgbClr val="EAF0F6"/>
+                    </a:solidFill>
+                  </a:tcPr>
+                </a:tc>
+                <a:tc>
+                  <a:txBody>
+                    <a:bodyPr wrap="square"/>
+                    <a:lstStyle/>
+                    <a:p>
+                      <a:r>
+                        <a:rPr sz="1200" b="1">
+                          <a:solidFill>
+                            <a:srgbClr val="1E2832"/>
+                          </a:solidFill>
+                          <a:latin typeface="Meiryo"/>
+                          <a:ea typeface="Meiryo"/>
+                          <a:cs typeface="Meiryo"/>
+                        </a:rPr>
+                        <a:t>自律実行の深さと柔軟性</a:t>
+                      </a:r>
+                    </a:p>
+                  </a:txBody>
+                  <a:tcPr marL="109728" marR="109728" marT="54864" marB="54864" anchor="ctr">
+                    <a:solidFill>
+                      <a:srgbClr val="EAF0F6"/>
+                    </a:solidFill>
+                  </a:tcPr>
+                </a:tc>
+              </a:tr>
+              <a:tr h="541020">
+                <a:tc>
+                  <a:txBody>
+                    <a:bodyPr wrap="square"/>
+                    <a:lstStyle/>
+                    <a:p>
+                      <a:r>
+                        <a:rPr sz="1200" b="1">
+                          <a:solidFill>
+                            <a:srgbClr val="1E2832"/>
+                          </a:solidFill>
+                          <a:latin typeface="Meiryo"/>
+                          <a:ea typeface="Meiryo"/>
+                          <a:cs typeface="Meiryo"/>
+                        </a:rPr>
+                        <a:t>向いている仕事</a:t>
                       </a:r>
                     </a:p>
                   </a:txBody>
@@ -3641,7 +3715,7 @@
                           <a:ea typeface="Meiryo"/>
                           <a:cs typeface="Meiryo"/>
                         </a:rPr>
-                        <a:t>Microsoftエコシステムに内蔵</a:t>
+                        <a:t>社内情報を使った要約・下書き・分析</a:t>
                       </a:r>
                     </a:p>
                   </a:txBody>
@@ -3665,7 +3739,7 @@
                           <a:ea typeface="Meiryo"/>
                           <a:cs typeface="Meiryo"/>
                         </a:rPr>
-                        <a:t>独立した作業エージェント</a:t>
+                        <a:t>多段処理・データ加工・独自成果物づくり</a:t>
                       </a:r>
                     </a:p>
                   </a:txBody>
@@ -3691,7 +3765,7 @@
                           <a:ea typeface="Meiryo"/>
                           <a:cs typeface="Meiryo"/>
                         </a:rPr>
-                        <a:t>根ざすデータ</a:t>
+                        <a:t>データへの接続</a:t>
                       </a:r>
                     </a:p>
                   </a:txBody>
@@ -3715,7 +3789,7 @@
                           <a:ea typeface="Meiryo"/>
                           <a:cs typeface="Meiryo"/>
                         </a:rPr>
-                        <a:t>自社テナント(Graph / Work IQ)を権限内で自動参照</a:t>
+                        <a:t>自社テナント(Graph / Work IQ)を自動参照</a:t>
                       </a:r>
                     </a:p>
                   </a:txBody>
@@ -3789,7 +3863,7 @@
                           <a:ea typeface="Meiryo"/>
                           <a:cs typeface="Meiryo"/>
                         </a:rPr>
-                        <a:t>あり（Copilot Studio/Copilot Cowork・Code）</a:t>
+                        <a:t>あり（Copilot Studio等）</a:t>
                       </a:r>
                     </a:p>
                   </a:txBody>
@@ -3813,81 +3887,7 @@
                           <a:ea typeface="Meiryo"/>
                           <a:cs typeface="Meiryo"/>
                         </a:rPr>
-                        <a:t>あり（Claude Codeと同じ基盤。ターミナル不要）</a:t>
-                      </a:r>
-                    </a:p>
-                  </a:txBody>
-                  <a:tcPr marL="109728" marR="109728" marT="54864" marB="54864" anchor="ctr">
-                    <a:solidFill>
-                      <a:srgbClr val="FFFFFF"/>
-                    </a:solidFill>
-                  </a:tcPr>
-                </a:tc>
-              </a:tr>
-              <a:tr h="541020">
-                <a:tc>
-                  <a:txBody>
-                    <a:bodyPr wrap="square"/>
-                    <a:lstStyle/>
-                    <a:p>
-                      <a:r>
-                        <a:rPr sz="1200" b="1">
-                          <a:solidFill>
-                            <a:srgbClr val="1E2832"/>
-                          </a:solidFill>
-                          <a:latin typeface="Meiryo"/>
-                          <a:ea typeface="Meiryo"/>
-                          <a:cs typeface="Meiryo"/>
-                        </a:rPr>
-                        <a:t>使うモデル</a:t>
-                      </a:r>
-                    </a:p>
-                  </a:txBody>
-                  <a:tcPr marL="109728" marR="109728" marT="54864" marB="54864" anchor="ctr">
-                    <a:solidFill>
-                      <a:srgbClr val="F2F5F8"/>
-                    </a:solidFill>
-                  </a:tcPr>
-                </a:tc>
-                <a:tc>
-                  <a:txBody>
-                    <a:bodyPr wrap="square"/>
-                    <a:lstStyle/>
-                    <a:p>
-                      <a:r>
-                        <a:rPr sz="1200" b="0">
-                          <a:solidFill>
-                            <a:srgbClr val="1E2832"/>
-                          </a:solidFill>
-                          <a:latin typeface="Meiryo"/>
-                          <a:ea typeface="Meiryo"/>
-                          <a:cs typeface="Meiryo"/>
-                        </a:rPr>
-                        <a:t>自動ルーター（Anthropic含む複数）</a:t>
-                      </a:r>
-                    </a:p>
-                  </a:txBody>
-                  <a:tcPr marL="109728" marR="109728" marT="54864" marB="54864" anchor="ctr">
-                    <a:solidFill>
-                      <a:srgbClr val="FFFFFF"/>
-                    </a:solidFill>
-                  </a:tcPr>
-                </a:tc>
-                <a:tc>
-                  <a:txBody>
-                    <a:bodyPr wrap="square"/>
-                    <a:lstStyle/>
-                    <a:p>
-                      <a:r>
-                        <a:rPr sz="1200" b="0">
-                          <a:solidFill>
-                            <a:srgbClr val="1E2832"/>
-                          </a:solidFill>
-                          <a:latin typeface="Meiryo"/>
-                          <a:ea typeface="Meiryo"/>
-                          <a:cs typeface="Meiryo"/>
-                        </a:rPr>
-                        <a:t>Claude</a:t>
+                        <a:t>あり（コード実行・任意ツールまで踏み込む）</a:t>
                       </a:r>
                     </a:p>
                   </a:txBody>
@@ -3937,7 +3937,7 @@
                           <a:ea typeface="Meiryo"/>
                           <a:cs typeface="Meiryo"/>
                         </a:rPr>
-                        <a:t>M365コンプライアンス（EDP / Purview / EUDB）</a:t>
+                        <a:t>M365コンプライアンス（EDP / Purview）</a:t>
                       </a:r>
                     </a:p>
                   </a:txBody>
@@ -3961,7 +3961,7 @@
                           <a:ea typeface="Meiryo"/>
                           <a:cs typeface="Meiryo"/>
                         </a:rPr>
-                        <a:t>権限確認・フォルダ単位の制限（Bedrock等で導入可）</a:t>
+                        <a:t>権限確認・フォルダ単位の制限</a:t>
                       </a:r>
                     </a:p>
                   </a:txBody>
@@ -4997,7 +4997,7 @@
                 <a:ea typeface="Meiryo"/>
                 <a:cs typeface="Meiryo"/>
               </a:rPr>
-              <a:t>どちらも同じClaudeのエージェント基盤を使っています。違いは「誰が・何に使うか」で、目的に応じて選びます。</a:t>
+              <a:t>土台は同じClaudeなので、できること自体はほぼ同じ。違いは“得意領域”と“入り口（ターミナルの有無）”です。</a:t>
             </a:r>
           </a:p>
         </p:txBody>
@@ -5125,15 +5125,15 @@
               </a:spcAft>
             </a:pPr>
             <a:r>
-              <a:rPr sz="1300" b="0">
-                <a:solidFill>
-                  <a:srgbClr val="5B6670"/>
-                </a:solidFill>
-                <a:latin typeface="Meiryo"/>
-                <a:ea typeface="Meiryo"/>
-                <a:cs typeface="Meiryo"/>
-              </a:rPr>
-              <a:t>ターミナル不要の業務エージェント</a:t>
+              <a:rPr sz="1300" b="1">
+                <a:solidFill>
+                  <a:srgbClr val="1E2832"/>
+                </a:solidFill>
+                <a:latin typeface="Meiryo"/>
+                <a:ea typeface="Meiryo"/>
+                <a:cs typeface="Meiryo"/>
+              </a:rPr>
+              <a:t>得意＝文書・資料などのビジネス知識労働</a:t>
             </a:r>
           </a:p>
         </p:txBody>
@@ -5412,15 +5412,15 @@
               </a:spcAft>
             </a:pPr>
             <a:r>
-              <a:rPr sz="1300" b="0">
-                <a:solidFill>
-                  <a:srgbClr val="5B6670"/>
-                </a:solidFill>
-                <a:latin typeface="Meiryo"/>
-                <a:ea typeface="Meiryo"/>
-                <a:cs typeface="Meiryo"/>
-              </a:rPr>
-              <a:t>開発者グレードの作業エージェント</a:t>
+              <a:rPr sz="1300" b="1">
+                <a:solidFill>
+                  <a:srgbClr val="1E2832"/>
+                </a:solidFill>
+                <a:latin typeface="Meiryo"/>
+                <a:ea typeface="Meiryo"/>
+                <a:cs typeface="Meiryo"/>
+              </a:rPr>
+              <a:t>得意＝コード・開発などのソフトウェア作業</a:t>
             </a:r>
           </a:p>
         </p:txBody>
@@ -5475,7 +5475,7 @@
                 <a:ea typeface="Meiryo"/>
                 <a:cs typeface="Meiryo"/>
               </a:rPr>
-              <a:t>ターミナル(CLI)・プロジェクト単位</a:t>
+              <a:t>ターミナル(CLI)・プロジェクト単位で深く踏み込む</a:t>
             </a:r>
           </a:p>
           <a:p>

--- a/docs/03_参考資料/Copilot_Cowork_競合比較.pptx
+++ b/docs/03_参考資料/Copilot_Cowork_競合比較.pptx
@@ -3514,8 +3514,8 @@
           <p:nvPr/>
         </p:nvGraphicFramePr>
         <p:xfrm>
-          <a:off x="548640" y="1920240"/>
-          <a:ext cx="11091672" cy="3246120"/>
+          <a:off x="548640" y="1828800"/>
+          <a:ext cx="11091672" cy="2514600"/>
         </p:xfrm>
         <a:graphic>
           <a:graphicData uri="http://schemas.openxmlformats.org/drawingml/2006/table">
@@ -3528,7 +3528,7 @@
                 <a:gridCol w="4663440"/>
                 <a:gridCol w="4416552"/>
               </a:tblGrid>
-              <a:tr h="541020">
+              <a:tr h="502920">
                 <a:tc>
                   <a:txBody>
                     <a:bodyPr wrap="square"/>
@@ -3602,7 +3602,7 @@
                   </a:tcPr>
                 </a:tc>
               </a:tr>
-              <a:tr h="541020">
+              <a:tr h="502920">
                 <a:tc>
                   <a:txBody>
                     <a:bodyPr wrap="square"/>
@@ -3676,7 +3676,155 @@
                   </a:tcPr>
                 </a:tc>
               </a:tr>
-              <a:tr h="541020">
+              <a:tr h="502920">
+                <a:tc>
+                  <a:txBody>
+                    <a:bodyPr wrap="square"/>
+                    <a:lstStyle/>
+                    <a:p>
+                      <a:r>
+                        <a:rPr sz="1200" b="1">
+                          <a:solidFill>
+                            <a:srgbClr val="1E2832"/>
+                          </a:solidFill>
+                          <a:latin typeface="Meiryo"/>
+                          <a:ea typeface="Meiryo"/>
+                          <a:cs typeface="Meiryo"/>
+                        </a:rPr>
+                        <a:t>どこから使う</a:t>
+                      </a:r>
+                    </a:p>
+                  </a:txBody>
+                  <a:tcPr marL="109728" marR="109728" marT="54864" marB="54864" anchor="ctr">
+                    <a:solidFill>
+                      <a:srgbClr val="F2F5F8"/>
+                    </a:solidFill>
+                  </a:tcPr>
+                </a:tc>
+                <a:tc>
+                  <a:txBody>
+                    <a:bodyPr wrap="square"/>
+                    <a:lstStyle/>
+                    <a:p>
+                      <a:r>
+                        <a:rPr sz="1200" b="0">
+                          <a:solidFill>
+                            <a:srgbClr val="1E2832"/>
+                          </a:solidFill>
+                          <a:latin typeface="Meiryo"/>
+                          <a:ea typeface="Meiryo"/>
+                          <a:cs typeface="Meiryo"/>
+                        </a:rPr>
+                        <a:t>Teams・Outlook・Word など使い慣れた製品の中から呼び出す</a:t>
+                      </a:r>
+                    </a:p>
+                  </a:txBody>
+                  <a:tcPr marL="109728" marR="109728" marT="54864" marB="54864" anchor="ctr">
+                    <a:solidFill>
+                      <a:srgbClr val="FFFFFF"/>
+                    </a:solidFill>
+                  </a:tcPr>
+                </a:tc>
+                <a:tc>
+                  <a:txBody>
+                    <a:bodyPr wrap="square"/>
+                    <a:lstStyle/>
+                    <a:p>
+                      <a:r>
+                        <a:rPr sz="1200" b="0">
+                          <a:solidFill>
+                            <a:srgbClr val="1E2832"/>
+                          </a:solidFill>
+                          <a:latin typeface="Meiryo"/>
+                          <a:ea typeface="Meiryo"/>
+                          <a:cs typeface="Meiryo"/>
+                        </a:rPr>
+                        <a:t>専用アプリ（独立した作業環境）で使う</a:t>
+                      </a:r>
+                    </a:p>
+                  </a:txBody>
+                  <a:tcPr marL="109728" marR="109728" marT="54864" marB="54864" anchor="ctr">
+                    <a:solidFill>
+                      <a:srgbClr val="FFFFFF"/>
+                    </a:solidFill>
+                  </a:tcPr>
+                </a:tc>
+              </a:tr>
+              <a:tr h="502920">
+                <a:tc>
+                  <a:txBody>
+                    <a:bodyPr wrap="square"/>
+                    <a:lstStyle/>
+                    <a:p>
+                      <a:r>
+                        <a:rPr sz="1200" b="1">
+                          <a:solidFill>
+                            <a:srgbClr val="1E2832"/>
+                          </a:solidFill>
+                          <a:latin typeface="Meiryo"/>
+                          <a:ea typeface="Meiryo"/>
+                          <a:cs typeface="Meiryo"/>
+                        </a:rPr>
+                        <a:t>データへの接続</a:t>
+                      </a:r>
+                    </a:p>
+                  </a:txBody>
+                  <a:tcPr marL="109728" marR="109728" marT="54864" marB="54864" anchor="ctr">
+                    <a:solidFill>
+                      <a:srgbClr val="F2F5F8"/>
+                    </a:solidFill>
+                  </a:tcPr>
+                </a:tc>
+                <a:tc>
+                  <a:txBody>
+                    <a:bodyPr wrap="square"/>
+                    <a:lstStyle/>
+                    <a:p>
+                      <a:r>
+                        <a:rPr sz="1200" b="0">
+                          <a:solidFill>
+                            <a:srgbClr val="1E2832"/>
+                          </a:solidFill>
+                          <a:latin typeface="Meiryo"/>
+                          <a:ea typeface="Meiryo"/>
+                          <a:cs typeface="Meiryo"/>
+                        </a:rPr>
+                        <a:t>自社テナント(Graph / Work IQ)を自動参照</a:t>
+                      </a:r>
+                    </a:p>
+                  </a:txBody>
+                  <a:tcPr marL="109728" marR="109728" marT="54864" marB="54864" anchor="ctr">
+                    <a:solidFill>
+                      <a:srgbClr val="FFFFFF"/>
+                    </a:solidFill>
+                  </a:tcPr>
+                </a:tc>
+                <a:tc>
+                  <a:txBody>
+                    <a:bodyPr wrap="square"/>
+                    <a:lstStyle/>
+                    <a:p>
+                      <a:r>
+                        <a:rPr sz="1200" b="0">
+                          <a:solidFill>
+                            <a:srgbClr val="1E2832"/>
+                          </a:solidFill>
+                          <a:latin typeface="Meiryo"/>
+                          <a:ea typeface="Meiryo"/>
+                          <a:cs typeface="Meiryo"/>
+                        </a:rPr>
+                        <a:t>渡したフォルダ＋Web＋外部ツール(MCP)</a:t>
+                      </a:r>
+                    </a:p>
+                  </a:txBody>
+                  <a:tcPr marL="109728" marR="109728" marT="54864" marB="54864" anchor="ctr">
+                    <a:solidFill>
+                      <a:srgbClr val="FFFFFF"/>
+                    </a:solidFill>
+                  </a:tcPr>
+                </a:tc>
+              </a:tr>
+              <a:tr h="502920">
                 <a:tc>
                   <a:txBody>
                     <a:bodyPr wrap="square"/>
@@ -3750,228 +3898,6 @@
                   </a:tcPr>
                 </a:tc>
               </a:tr>
-              <a:tr h="541020">
-                <a:tc>
-                  <a:txBody>
-                    <a:bodyPr wrap="square"/>
-                    <a:lstStyle/>
-                    <a:p>
-                      <a:r>
-                        <a:rPr sz="1200" b="1">
-                          <a:solidFill>
-                            <a:srgbClr val="1E2832"/>
-                          </a:solidFill>
-                          <a:latin typeface="Meiryo"/>
-                          <a:ea typeface="Meiryo"/>
-                          <a:cs typeface="Meiryo"/>
-                        </a:rPr>
-                        <a:t>データへの接続</a:t>
-                      </a:r>
-                    </a:p>
-                  </a:txBody>
-                  <a:tcPr marL="109728" marR="109728" marT="54864" marB="54864" anchor="ctr">
-                    <a:solidFill>
-                      <a:srgbClr val="F2F5F8"/>
-                    </a:solidFill>
-                  </a:tcPr>
-                </a:tc>
-                <a:tc>
-                  <a:txBody>
-                    <a:bodyPr wrap="square"/>
-                    <a:lstStyle/>
-                    <a:p>
-                      <a:r>
-                        <a:rPr sz="1200" b="0">
-                          <a:solidFill>
-                            <a:srgbClr val="1E2832"/>
-                          </a:solidFill>
-                          <a:latin typeface="Meiryo"/>
-                          <a:ea typeface="Meiryo"/>
-                          <a:cs typeface="Meiryo"/>
-                        </a:rPr>
-                        <a:t>自社テナント(Graph / Work IQ)を自動参照</a:t>
-                      </a:r>
-                    </a:p>
-                  </a:txBody>
-                  <a:tcPr marL="109728" marR="109728" marT="54864" marB="54864" anchor="ctr">
-                    <a:solidFill>
-                      <a:srgbClr val="FFFFFF"/>
-                    </a:solidFill>
-                  </a:tcPr>
-                </a:tc>
-                <a:tc>
-                  <a:txBody>
-                    <a:bodyPr wrap="square"/>
-                    <a:lstStyle/>
-                    <a:p>
-                      <a:r>
-                        <a:rPr sz="1200" b="0">
-                          <a:solidFill>
-                            <a:srgbClr val="1E2832"/>
-                          </a:solidFill>
-                          <a:latin typeface="Meiryo"/>
-                          <a:ea typeface="Meiryo"/>
-                          <a:cs typeface="Meiryo"/>
-                        </a:rPr>
-                        <a:t>渡したフォルダ＋Web＋外部ツール(MCP)が対象</a:t>
-                      </a:r>
-                    </a:p>
-                  </a:txBody>
-                  <a:tcPr marL="109728" marR="109728" marT="54864" marB="54864" anchor="ctr">
-                    <a:solidFill>
-                      <a:srgbClr val="FFFFFF"/>
-                    </a:solidFill>
-                  </a:tcPr>
-                </a:tc>
-              </a:tr>
-              <a:tr h="541020">
-                <a:tc>
-                  <a:txBody>
-                    <a:bodyPr wrap="square"/>
-                    <a:lstStyle/>
-                    <a:p>
-                      <a:r>
-                        <a:rPr sz="1200" b="1">
-                          <a:solidFill>
-                            <a:srgbClr val="1E2832"/>
-                          </a:solidFill>
-                          <a:latin typeface="Meiryo"/>
-                          <a:ea typeface="Meiryo"/>
-                          <a:cs typeface="Meiryo"/>
-                        </a:rPr>
-                        <a:t>自律エージェント</a:t>
-                      </a:r>
-                    </a:p>
-                  </a:txBody>
-                  <a:tcPr marL="109728" marR="109728" marT="54864" marB="54864" anchor="ctr">
-                    <a:solidFill>
-                      <a:srgbClr val="F2F5F8"/>
-                    </a:solidFill>
-                  </a:tcPr>
-                </a:tc>
-                <a:tc>
-                  <a:txBody>
-                    <a:bodyPr wrap="square"/>
-                    <a:lstStyle/>
-                    <a:p>
-                      <a:r>
-                        <a:rPr sz="1200" b="0">
-                          <a:solidFill>
-                            <a:srgbClr val="1E2832"/>
-                          </a:solidFill>
-                          <a:latin typeface="Meiryo"/>
-                          <a:ea typeface="Meiryo"/>
-                          <a:cs typeface="Meiryo"/>
-                        </a:rPr>
-                        <a:t>あり（Copilot Studio等）</a:t>
-                      </a:r>
-                    </a:p>
-                  </a:txBody>
-                  <a:tcPr marL="109728" marR="109728" marT="54864" marB="54864" anchor="ctr">
-                    <a:solidFill>
-                      <a:srgbClr val="FFFFFF"/>
-                    </a:solidFill>
-                  </a:tcPr>
-                </a:tc>
-                <a:tc>
-                  <a:txBody>
-                    <a:bodyPr wrap="square"/>
-                    <a:lstStyle/>
-                    <a:p>
-                      <a:r>
-                        <a:rPr sz="1200" b="0">
-                          <a:solidFill>
-                            <a:srgbClr val="1E2832"/>
-                          </a:solidFill>
-                          <a:latin typeface="Meiryo"/>
-                          <a:ea typeface="Meiryo"/>
-                          <a:cs typeface="Meiryo"/>
-                        </a:rPr>
-                        <a:t>あり（コード実行・任意ツールまで踏み込む）</a:t>
-                      </a:r>
-                    </a:p>
-                  </a:txBody>
-                  <a:tcPr marL="109728" marR="109728" marT="54864" marB="54864" anchor="ctr">
-                    <a:solidFill>
-                      <a:srgbClr val="FFFFFF"/>
-                    </a:solidFill>
-                  </a:tcPr>
-                </a:tc>
-              </a:tr>
-              <a:tr h="541020">
-                <a:tc>
-                  <a:txBody>
-                    <a:bodyPr wrap="square"/>
-                    <a:lstStyle/>
-                    <a:p>
-                      <a:r>
-                        <a:rPr sz="1200" b="1">
-                          <a:solidFill>
-                            <a:srgbClr val="1E2832"/>
-                          </a:solidFill>
-                          <a:latin typeface="Meiryo"/>
-                          <a:ea typeface="Meiryo"/>
-                          <a:cs typeface="Meiryo"/>
-                        </a:rPr>
-                        <a:t>統治/境界</a:t>
-                      </a:r>
-                    </a:p>
-                  </a:txBody>
-                  <a:tcPr marL="109728" marR="109728" marT="54864" marB="54864" anchor="ctr">
-                    <a:solidFill>
-                      <a:srgbClr val="F2F5F8"/>
-                    </a:solidFill>
-                  </a:tcPr>
-                </a:tc>
-                <a:tc>
-                  <a:txBody>
-                    <a:bodyPr wrap="square"/>
-                    <a:lstStyle/>
-                    <a:p>
-                      <a:r>
-                        <a:rPr sz="1200" b="0">
-                          <a:solidFill>
-                            <a:srgbClr val="1E2832"/>
-                          </a:solidFill>
-                          <a:latin typeface="Meiryo"/>
-                          <a:ea typeface="Meiryo"/>
-                          <a:cs typeface="Meiryo"/>
-                        </a:rPr>
-                        <a:t>M365コンプライアンス（EDP / Purview）</a:t>
-                      </a:r>
-                    </a:p>
-                  </a:txBody>
-                  <a:tcPr marL="109728" marR="109728" marT="54864" marB="54864" anchor="ctr">
-                    <a:solidFill>
-                      <a:srgbClr val="FFFFFF"/>
-                    </a:solidFill>
-                  </a:tcPr>
-                </a:tc>
-                <a:tc>
-                  <a:txBody>
-                    <a:bodyPr wrap="square"/>
-                    <a:lstStyle/>
-                    <a:p>
-                      <a:r>
-                        <a:rPr sz="1200" b="0">
-                          <a:solidFill>
-                            <a:srgbClr val="1E2832"/>
-                          </a:solidFill>
-                          <a:latin typeface="Meiryo"/>
-                          <a:ea typeface="Meiryo"/>
-                          <a:cs typeface="Meiryo"/>
-                        </a:rPr>
-                        <a:t>権限確認・フォルダ単位の制限</a:t>
-                      </a:r>
-                    </a:p>
-                  </a:txBody>
-                  <a:tcPr marL="109728" marR="109728" marT="54864" marB="54864" anchor="ctr">
-                    <a:solidFill>
-                      <a:srgbClr val="FFFFFF"/>
-                    </a:solidFill>
-                  </a:tcPr>
-                </a:tc>
-              </a:tr>
             </a:tbl>
           </a:graphicData>
         </a:graphic>
@@ -3984,8 +3910,8 @@
         </p:nvSpPr>
         <p:spPr>
           <a:xfrm>
-            <a:off x="548640" y="5486400"/>
-            <a:ext cx="10972800" cy="822960"/>
+            <a:off x="548640" y="4526280"/>
+            <a:ext cx="10972800" cy="731520"/>
           </a:xfrm>
           <a:prstGeom prst="rect">
             <a:avLst/>
@@ -4015,6 +3941,61 @@
                 <a:ea typeface="Meiryo"/>
                 <a:cs typeface="Meiryo"/>
               </a:rPr>
+              <a:t>例：</a:t>
+            </a:r>
+            <a:r>
+              <a:rPr sz="1400" b="0">
+                <a:solidFill>
+                  <a:srgbClr val="1E2832"/>
+                </a:solidFill>
+                <a:latin typeface="Meiryo"/>
+                <a:ea typeface="Meiryo"/>
+                <a:cs typeface="Meiryo"/>
+              </a:rPr>
+              <a:t>「競合3社の決算を比べたい」→ 社内に資料があれば Copilot で要約。公開データやCSVから作るなら Cowork が取得・解析してダッシュボード化。</a:t>
+            </a:r>
+          </a:p>
+        </p:txBody>
+      </p:sp>
+      <p:sp>
+        <p:nvSpPr>
+          <p:cNvPr id="7" name="TextBox 6"/>
+          <p:cNvSpPr txBox="1"/>
+          <p:nvPr/>
+        </p:nvSpPr>
+        <p:spPr>
+          <a:xfrm>
+            <a:off x="548640" y="5440680"/>
+            <a:ext cx="10972800" cy="731520"/>
+          </a:xfrm>
+          <a:prstGeom prst="rect">
+            <a:avLst/>
+          </a:prstGeom>
+          <a:noFill/>
+        </p:spPr>
+        <p:txBody>
+          <a:bodyPr wrap="square" anchor="t" lIns="0" rIns="0" tIns="0" bIns="0">
+            <a:spAutoFit/>
+          </a:bodyPr>
+          <a:lstStyle/>
+          <a:p>
+            <a:pPr algn="l">
+              <a:spcBef>
+                <a:spcPts val="0"/>
+              </a:spcBef>
+              <a:spcAft>
+                <a:spcPts val="400"/>
+              </a:spcAft>
+            </a:pPr>
+            <a:r>
+              <a:rPr sz="1300" b="1">
+                <a:solidFill>
+                  <a:srgbClr val="2E5A88"/>
+                </a:solidFill>
+                <a:latin typeface="Meiryo"/>
+                <a:ea typeface="Meiryo"/>
+                <a:cs typeface="Meiryo"/>
+              </a:rPr>
               <a:t>注意：</a:t>
             </a:r>
             <a:r>
@@ -4026,14 +4007,14 @@
                 <a:ea typeface="Meiryo"/>
                 <a:cs typeface="Meiryo"/>
               </a:rPr>
-              <a:t>「Cowork」は両社が使う名称なので社名を冠して区別します。Copilotも内部でClaudeを利用できるため、モデルの違いは選択の決め手になりません。</a:t>
-            </a:r>
-          </a:p>
-        </p:txBody>
-      </p:sp>
-      <p:sp>
-        <p:nvSpPr>
-          <p:cNvPr id="7" name="TextBox 6"/>
+              <a:t>統治は Copilot が M365準拠、Cowork は権限確認・フォルダ単位の制限。両者とも自律エージェント機能を持ち、「Cowork」は両社が使う名称です。</a:t>
+            </a:r>
+          </a:p>
+        </p:txBody>
+      </p:sp>
+      <p:sp>
+        <p:nvSpPr>
+          <p:cNvPr id="8" name="TextBox 7"/>
           <p:cNvSpPr txBox="1"/>
           <p:nvPr/>
         </p:nvSpPr>
@@ -4945,7 +4926,7 @@
               </a:spcAft>
             </a:pPr>
             <a:r>
-              <a:rPr sz="2800" b="1">
+              <a:rPr sz="3000" b="1">
                 <a:solidFill>
                   <a:srgbClr val="1E2832"/>
                 </a:solidFill>
@@ -4953,7 +4934,7 @@
                 <a:ea typeface="Meiryo"/>
                 <a:cs typeface="Meiryo"/>
               </a:rPr>
-              <a:t>Claude Cowork と Claude Code は同じ頭脳で入り口が違う</a:t>
+              <a:t>Claude Cowork と Claude Code の使い分け</a:t>
             </a:r>
           </a:p>
         </p:txBody>
@@ -4997,7 +4978,7 @@
                 <a:ea typeface="Meiryo"/>
                 <a:cs typeface="Meiryo"/>
               </a:rPr>
-              <a:t>土台は同じClaudeなので、できること自体はほぼ同じ。違いは“得意領域”と“入り口（ターミナルの有無）”です。</a:t>
+              <a:t>同じClaudeが動くので、できること自体はほぼ同じです。違いは得意な領域と、ターミナルを使うかどうかです。</a:t>
             </a:r>
           </a:p>
         </p:txBody>

--- a/docs/03_参考資料/Copilot_Cowork_競合比較.pptx
+++ b/docs/03_参考資料/Copilot_Cowork_競合比較.pptx
@@ -4978,7 +4978,7 @@
                 <a:ea typeface="Meiryo"/>
                 <a:cs typeface="Meiryo"/>
               </a:rPr>
-              <a:t>同じClaudeが動くので、できること自体はほぼ同じです。違いは得意な領域と、ターミナルを使うかどうかです。</a:t>
+              <a:t>動いているのは同じClaude。Cowork はコードを書かずに業務をまるごと任せられ、Code は開発に深く踏み込めます。</a:t>
             </a:r>
           </a:p>
         </p:txBody>

--- a/docs/03_参考資料/Copilot_Cowork_競合比較.pptx
+++ b/docs/03_参考資料/Copilot_Cowork_競合比較.pptx
@@ -4978,7 +4978,7 @@
                 <a:ea typeface="Meiryo"/>
                 <a:cs typeface="Meiryo"/>
               </a:rPr>
-              <a:t>動いているのは同じClaude。Cowork はコードを書かずに業務をまるごと任せられ、Code は開発に深く踏み込めます。</a:t>
+              <a:t>できること自体は同じClaudeでほぼ共通（MCP・コード実行・デスクトップアプリもどちらにもあります）。違いは“何に向くか・誰向けか”です。</a:t>
             </a:r>
           </a:p>
         </p:txBody>
@@ -5114,7 +5114,7 @@
                 <a:ea typeface="Meiryo"/>
                 <a:cs typeface="Meiryo"/>
               </a:rPr>
-              <a:t>得意＝文書・資料などのビジネス知識労働</a:t>
+              <a:t>一般業務むけ（コード不要）</a:t>
             </a:r>
           </a:p>
         </p:txBody>
@@ -5169,7 +5169,7 @@
                 <a:ea typeface="Meiryo"/>
                 <a:cs typeface="Meiryo"/>
               </a:rPr>
-              <a:t>コーディング不要で、主に業務ユーザー向け</a:t>
+              <a:t>業務ユーザー（非エンジニア）向け</a:t>
             </a:r>
           </a:p>
           <a:p>
@@ -5201,7 +5201,7 @@
                 <a:ea typeface="Meiryo"/>
                 <a:cs typeface="Meiryo"/>
               </a:rPr>
-              <a:t>文書・スライド・表・レポートを作成</a:t>
+              <a:t>文書・スライド・表づくり、調査・データ整理に</a:t>
             </a:r>
           </a:p>
           <a:p>
@@ -5233,7 +5233,7 @@
                 <a:ea typeface="Meiryo"/>
                 <a:cs typeface="Meiryo"/>
               </a:rPr>
-              <a:t>選んだフォルダのファイル＋Web＋MCP</a:t>
+              <a:t>デスクトップアプリ/Webで対話しながら使う</a:t>
             </a:r>
           </a:p>
           <a:p>
@@ -5265,7 +5265,7 @@
                 <a:ea typeface="Meiryo"/>
                 <a:cs typeface="Meiryo"/>
               </a:rPr>
-              <a:t>調査・資料づくり・データ整理を任せる</a:t>
+              <a:t>コードやコマンドを書かなくてよい</a:t>
             </a:r>
           </a:p>
         </p:txBody>
@@ -5401,7 +5401,7 @@
                 <a:ea typeface="Meiryo"/>
                 <a:cs typeface="Meiryo"/>
               </a:rPr>
-              <a:t>得意＝コード・開発などのソフトウェア作業</a:t>
+              <a:t>ソフトウェア開発むけ（エンジニア）</a:t>
             </a:r>
           </a:p>
         </p:txBody>
@@ -5456,7 +5456,7 @@
                 <a:ea typeface="Meiryo"/>
                 <a:cs typeface="Meiryo"/>
               </a:rPr>
-              <a:t>ターミナル(CLI)・プロジェクト単位で深く踏み込む</a:t>
+              <a:t>エンジニア・開発者向け</a:t>
             </a:r>
           </a:p>
           <a:p>
@@ -5488,7 +5488,7 @@
                 <a:ea typeface="Meiryo"/>
                 <a:cs typeface="Meiryo"/>
               </a:rPr>
-              <a:t>コード・リポジトリ・ファイルを操作</a:t>
+              <a:t>コードを書く・動かす・テストして自分で直す</a:t>
             </a:r>
           </a:p>
           <a:p>
@@ -5520,7 +5520,7 @@
                 <a:ea typeface="Meiryo"/>
                 <a:cs typeface="Meiryo"/>
               </a:rPr>
-              <a:t>スクリプトやパイプラインで作り込み・自動化</a:t>
+              <a:t>実際のプロジェクトの中で作業（git・ビルド・CI）</a:t>
             </a:r>
           </a:p>
           <a:p>
@@ -5552,7 +5552,7 @@
                 <a:ea typeface="Meiryo"/>
                 <a:cs typeface="Meiryo"/>
               </a:rPr>
-              <a:t>データ処理やツールの作り込みはこちら</a:t>
+              <a:t>ターミナル(CLI)やIDEからも使える</a:t>
             </a:r>
           </a:p>
         </p:txBody>

--- a/docs/03_参考資料/Copilot_Cowork_競合比較.pptx
+++ b/docs/03_参考資料/Copilot_Cowork_競合比較.pptx
@@ -4985,7 +4985,7 @@
       </p:sp>
       <p:sp>
         <p:nvSpPr>
-          <p:cNvPr id="5" name="Rounded Rectangle 4"/>
+          <p:cNvPr id="5" name="Rectangle 4"/>
           <p:cNvSpPr/>
           <p:nvPr/>
         </p:nvSpPr>
@@ -4994,10 +4994,8 @@
             <a:off x="548640" y="1874519"/>
             <a:ext cx="5394960" cy="3154680"/>
           </a:xfrm>
-          <a:prstGeom prst="roundRect">
-            <a:avLst>
-              <a:gd name="adj" fmla="val 6000"/>
-            </a:avLst>
+          <a:prstGeom prst="rect">
+            <a:avLst/>
           </a:prstGeom>
           <a:solidFill>
             <a:srgbClr val="FFFFFF"/>
@@ -5272,7 +5270,7 @@
       </p:sp>
       <p:sp>
         <p:nvSpPr>
-          <p:cNvPr id="9" name="Rounded Rectangle 8"/>
+          <p:cNvPr id="9" name="Rectangle 8"/>
           <p:cNvSpPr/>
           <p:nvPr/>
         </p:nvSpPr>
@@ -5281,10 +5279,8 @@
             <a:off x="6245352" y="1874519"/>
             <a:ext cx="5394960" cy="3154680"/>
           </a:xfrm>
-          <a:prstGeom prst="roundRect">
-            <a:avLst>
-              <a:gd name="adj" fmla="val 6000"/>
-            </a:avLst>
+          <a:prstGeom prst="rect">
+            <a:avLst/>
           </a:prstGeom>
           <a:solidFill>
             <a:srgbClr val="FFFFFF"/>
@@ -5839,7 +5835,7 @@
       </p:sp>
       <p:sp>
         <p:nvSpPr>
-          <p:cNvPr id="5" name="Rounded Rectangle 4"/>
+          <p:cNvPr id="5" name="Rectangle 4"/>
           <p:cNvSpPr/>
           <p:nvPr/>
         </p:nvSpPr>
@@ -5848,10 +5844,8 @@
             <a:off x="548640" y="1965960"/>
             <a:ext cx="3511296" cy="3520440"/>
           </a:xfrm>
-          <a:prstGeom prst="roundRect">
-            <a:avLst>
-              <a:gd name="adj" fmla="val 6000"/>
-            </a:avLst>
+          <a:prstGeom prst="rect">
+            <a:avLst/>
           </a:prstGeom>
           <a:solidFill>
             <a:srgbClr val="FFFFFF"/>
@@ -6094,7 +6088,7 @@
       </p:sp>
       <p:sp>
         <p:nvSpPr>
-          <p:cNvPr id="9" name="Rounded Rectangle 8"/>
+          <p:cNvPr id="9" name="Rectangle 8"/>
           <p:cNvSpPr/>
           <p:nvPr/>
         </p:nvSpPr>
@@ -6103,10 +6097,8 @@
             <a:off x="4334255" y="1965960"/>
             <a:ext cx="3511296" cy="3520440"/>
           </a:xfrm>
-          <a:prstGeom prst="roundRect">
-            <a:avLst>
-              <a:gd name="adj" fmla="val 6000"/>
-            </a:avLst>
+          <a:prstGeom prst="rect">
+            <a:avLst/>
           </a:prstGeom>
           <a:solidFill>
             <a:srgbClr val="FFFFFF"/>
@@ -6349,7 +6341,7 @@
       </p:sp>
       <p:sp>
         <p:nvSpPr>
-          <p:cNvPr id="13" name="Rounded Rectangle 12"/>
+          <p:cNvPr id="13" name="Rectangle 12"/>
           <p:cNvSpPr/>
           <p:nvPr/>
         </p:nvSpPr>
@@ -6358,10 +6350,8 @@
             <a:off x="8119871" y="1965960"/>
             <a:ext cx="3511296" cy="3520440"/>
           </a:xfrm>
-          <a:prstGeom prst="roundRect">
-            <a:avLst>
-              <a:gd name="adj" fmla="val 6000"/>
-            </a:avLst>
+          <a:prstGeom prst="rect">
+            <a:avLst/>
           </a:prstGeom>
           <a:solidFill>
             <a:srgbClr val="FFFFFF"/>
